--- a/W1/2. W1S2 final/W1S2.pptx
+++ b/W1/2. W1S2 final/W1S2.pptx
@@ -241,7 +241,7 @@
 <file path=ppt/revisionInfo.xml><?xml version="1.0" encoding="utf-8"?>
 <p1510:revInfo xmlns:a="http://schemas.openxmlformats.org/drawingml/2006/main" xmlns:r="http://schemas.openxmlformats.org/officeDocument/2006/relationships" xmlns:p1510="http://schemas.microsoft.com/office/powerpoint/2015/10/main">
   <p1510:revLst>
-    <p1510:client id="{D969CBA9-08F9-448D-A83C-3503CC0AD359}" v="39" dt="2025-12-18T21:22:09.969"/>
+    <p1510:client id="{2C083308-696B-45F0-8323-061DEF55DE8A}" v="1" dt="2026-01-16T05:10:18.491"/>
   </p1510:revLst>
 </p1510:revInfo>
 </file>
@@ -251,7 +251,7 @@
   <pc:docChgLst>
     <pc:chgData name="Matthieu De Mari" userId="dfb708c9-d8dc-439f-9a3b-c772bf4a311c" providerId="ADAL" clId="{81E9B007-0C2C-493E-9B93-55A62C9C1F12}"/>
     <pc:docChg chg="undo custSel addSld delSld modSld modSection">
-      <pc:chgData name="Matthieu De Mari" userId="dfb708c9-d8dc-439f-9a3b-c772bf4a311c" providerId="ADAL" clId="{81E9B007-0C2C-493E-9B93-55A62C9C1F12}" dt="2025-12-18T21:22:34.717" v="397" actId="20577"/>
+      <pc:chgData name="Matthieu De Mari" userId="dfb708c9-d8dc-439f-9a3b-c772bf4a311c" providerId="ADAL" clId="{81E9B007-0C2C-493E-9B93-55A62C9C1F12}" dt="2026-01-16T05:11:06.280" v="546" actId="20577"/>
       <pc:docMkLst>
         <pc:docMk/>
       </pc:docMkLst>
@@ -435,59 +435,20 @@
           </ac:spMkLst>
         </pc:spChg>
       </pc:sldChg>
-      <pc:sldChg chg="add">
-        <pc:chgData name="Matthieu De Mari" userId="dfb708c9-d8dc-439f-9a3b-c772bf4a311c" providerId="ADAL" clId="{81E9B007-0C2C-493E-9B93-55A62C9C1F12}" dt="2025-12-18T21:15:01.636" v="263"/>
+      <pc:sldChg chg="addSp modSp add mod">
+        <pc:chgData name="Matthieu De Mari" userId="dfb708c9-d8dc-439f-9a3b-c772bf4a311c" providerId="ADAL" clId="{81E9B007-0C2C-493E-9B93-55A62C9C1F12}" dt="2026-01-16T05:11:06.280" v="546" actId="20577"/>
         <pc:sldMkLst>
           <pc:docMk/>
           <pc:sldMk cId="1061347991" sldId="539"/>
         </pc:sldMkLst>
-      </pc:sldChg>
-      <pc:sldChg chg="addSp delSp modSp add del mod">
-        <pc:chgData name="Matthieu De Mari" userId="dfb708c9-d8dc-439f-9a3b-c772bf4a311c" providerId="ADAL" clId="{81E9B007-0C2C-493E-9B93-55A62C9C1F12}" dt="2025-12-18T21:14:46.458" v="262" actId="2696"/>
-        <pc:sldMkLst>
-          <pc:docMk/>
-          <pc:sldMk cId="3438076525" sldId="539"/>
-        </pc:sldMkLst>
-        <pc:spChg chg="del">
-          <ac:chgData name="Matthieu De Mari" userId="dfb708c9-d8dc-439f-9a3b-c772bf4a311c" providerId="ADAL" clId="{81E9B007-0C2C-493E-9B93-55A62C9C1F12}" dt="2025-12-18T21:11:05.689" v="6" actId="478"/>
+        <pc:spChg chg="add mod">
+          <ac:chgData name="Matthieu De Mari" userId="dfb708c9-d8dc-439f-9a3b-c772bf4a311c" providerId="ADAL" clId="{81E9B007-0C2C-493E-9B93-55A62C9C1F12}" dt="2026-01-16T05:11:06.280" v="546" actId="20577"/>
           <ac:spMkLst>
             <pc:docMk/>
-            <pc:sldMk cId="3438076525" sldId="539"/>
-            <ac:spMk id="2" creationId="{B69DE8EC-303C-D2DC-6681-0F9721FB24E1}"/>
+            <pc:sldMk cId="1061347991" sldId="539"/>
+            <ac:spMk id="2" creationId="{CBFC0A27-8316-F94E-FB36-D8BC6E05AB71}"/>
           </ac:spMkLst>
         </pc:spChg>
-        <pc:spChg chg="del">
-          <ac:chgData name="Matthieu De Mari" userId="dfb708c9-d8dc-439f-9a3b-c772bf4a311c" providerId="ADAL" clId="{81E9B007-0C2C-493E-9B93-55A62C9C1F12}" dt="2025-12-18T21:10:46.437" v="1" actId="478"/>
-          <ac:spMkLst>
-            <pc:docMk/>
-            <pc:sldMk cId="3438076525" sldId="539"/>
-            <ac:spMk id="4" creationId="{3FEBB3A6-470C-C5E3-3A02-8845AD25C349}"/>
-          </ac:spMkLst>
-        </pc:spChg>
-        <pc:spChg chg="mod">
-          <ac:chgData name="Matthieu De Mari" userId="dfb708c9-d8dc-439f-9a3b-c772bf4a311c" providerId="ADAL" clId="{81E9B007-0C2C-493E-9B93-55A62C9C1F12}" dt="2025-12-18T21:14:28.651" v="261" actId="20577"/>
-          <ac:spMkLst>
-            <pc:docMk/>
-            <pc:sldMk cId="3438076525" sldId="539"/>
-            <ac:spMk id="5" creationId="{6AE76912-3D36-2FB5-A4F8-1BEAEE6224C7}"/>
-          </ac:spMkLst>
-        </pc:spChg>
-        <pc:picChg chg="del">
-          <ac:chgData name="Matthieu De Mari" userId="dfb708c9-d8dc-439f-9a3b-c772bf4a311c" providerId="ADAL" clId="{81E9B007-0C2C-493E-9B93-55A62C9C1F12}" dt="2025-12-18T21:11:00.809" v="4" actId="478"/>
-          <ac:picMkLst>
-            <pc:docMk/>
-            <pc:sldMk cId="3438076525" sldId="539"/>
-            <ac:picMk id="3" creationId="{9D3A730F-3828-A114-A486-B42BEFB2A6F2}"/>
-          </ac:picMkLst>
-        </pc:picChg>
-        <pc:picChg chg="add mod modCrop">
-          <ac:chgData name="Matthieu De Mari" userId="dfb708c9-d8dc-439f-9a3b-c772bf4a311c" providerId="ADAL" clId="{81E9B007-0C2C-493E-9B93-55A62C9C1F12}" dt="2025-12-18T21:12:25.281" v="23" actId="1076"/>
-          <ac:picMkLst>
-            <pc:docMk/>
-            <pc:sldMk cId="3438076525" sldId="539"/>
-            <ac:picMk id="7" creationId="{F5C7337F-2AD3-3D35-E695-83C54AE5131A}"/>
-          </ac:picMkLst>
-        </pc:picChg>
       </pc:sldChg>
     </pc:docChg>
   </pc:docChgLst>
@@ -576,7 +537,7 @@
           <a:p>
             <a:fld id="{61478373-EB31-4867-8CF0-FA31364748A5}" type="datetimeFigureOut">
               <a:rPr lang="en-GB" smtClean="0"/>
-              <a:t>18/12/2025</a:t>
+              <a:t>16/01/2026</a:t>
             </a:fld>
             <a:endParaRPr lang="en-GB"/>
           </a:p>
@@ -993,7 +954,7 @@
           <a:p>
             <a:fld id="{E85DF616-B21E-4EF6-A6A5-95E2FB3EB1A1}" type="datetimeFigureOut">
               <a:rPr lang="en-GB" smtClean="0"/>
-              <a:t>18/12/2025</a:t>
+              <a:t>16/01/2026</a:t>
             </a:fld>
             <a:endParaRPr lang="en-GB"/>
           </a:p>
@@ -1193,7 +1154,7 @@
           <a:p>
             <a:fld id="{E85DF616-B21E-4EF6-A6A5-95E2FB3EB1A1}" type="datetimeFigureOut">
               <a:rPr lang="en-GB" smtClean="0"/>
-              <a:t>18/12/2025</a:t>
+              <a:t>16/01/2026</a:t>
             </a:fld>
             <a:endParaRPr lang="en-GB"/>
           </a:p>
@@ -1403,7 +1364,7 @@
           <a:p>
             <a:fld id="{E85DF616-B21E-4EF6-A6A5-95E2FB3EB1A1}" type="datetimeFigureOut">
               <a:rPr lang="en-GB" smtClean="0"/>
-              <a:t>18/12/2025</a:t>
+              <a:t>16/01/2026</a:t>
             </a:fld>
             <a:endParaRPr lang="en-GB"/>
           </a:p>
@@ -1603,7 +1564,7 @@
           <a:p>
             <a:fld id="{E85DF616-B21E-4EF6-A6A5-95E2FB3EB1A1}" type="datetimeFigureOut">
               <a:rPr lang="en-GB" smtClean="0"/>
-              <a:t>18/12/2025</a:t>
+              <a:t>16/01/2026</a:t>
             </a:fld>
             <a:endParaRPr lang="en-GB"/>
           </a:p>
@@ -1879,7 +1840,7 @@
           <a:p>
             <a:fld id="{E85DF616-B21E-4EF6-A6A5-95E2FB3EB1A1}" type="datetimeFigureOut">
               <a:rPr lang="en-GB" smtClean="0"/>
-              <a:t>18/12/2025</a:t>
+              <a:t>16/01/2026</a:t>
             </a:fld>
             <a:endParaRPr lang="en-GB"/>
           </a:p>
@@ -2147,7 +2108,7 @@
           <a:p>
             <a:fld id="{E85DF616-B21E-4EF6-A6A5-95E2FB3EB1A1}" type="datetimeFigureOut">
               <a:rPr lang="en-GB" smtClean="0"/>
-              <a:t>18/12/2025</a:t>
+              <a:t>16/01/2026</a:t>
             </a:fld>
             <a:endParaRPr lang="en-GB"/>
           </a:p>
@@ -2562,7 +2523,7 @@
           <a:p>
             <a:fld id="{E85DF616-B21E-4EF6-A6A5-95E2FB3EB1A1}" type="datetimeFigureOut">
               <a:rPr lang="en-GB" smtClean="0"/>
-              <a:t>18/12/2025</a:t>
+              <a:t>16/01/2026</a:t>
             </a:fld>
             <a:endParaRPr lang="en-GB"/>
           </a:p>
@@ -2704,7 +2665,7 @@
           <a:p>
             <a:fld id="{E85DF616-B21E-4EF6-A6A5-95E2FB3EB1A1}" type="datetimeFigureOut">
               <a:rPr lang="en-GB" smtClean="0"/>
-              <a:t>18/12/2025</a:t>
+              <a:t>16/01/2026</a:t>
             </a:fld>
             <a:endParaRPr lang="en-GB"/>
           </a:p>
@@ -2817,7 +2778,7 @@
           <a:p>
             <a:fld id="{E85DF616-B21E-4EF6-A6A5-95E2FB3EB1A1}" type="datetimeFigureOut">
               <a:rPr lang="en-GB" smtClean="0"/>
-              <a:t>18/12/2025</a:t>
+              <a:t>16/01/2026</a:t>
             </a:fld>
             <a:endParaRPr lang="en-GB"/>
           </a:p>
@@ -3130,7 +3091,7 @@
           <a:p>
             <a:fld id="{E85DF616-B21E-4EF6-A6A5-95E2FB3EB1A1}" type="datetimeFigureOut">
               <a:rPr lang="en-GB" smtClean="0"/>
-              <a:t>18/12/2025</a:t>
+              <a:t>16/01/2026</a:t>
             </a:fld>
             <a:endParaRPr lang="en-GB"/>
           </a:p>
@@ -3419,7 +3380,7 @@
           <a:p>
             <a:fld id="{E85DF616-B21E-4EF6-A6A5-95E2FB3EB1A1}" type="datetimeFigureOut">
               <a:rPr lang="en-GB" smtClean="0"/>
-              <a:t>18/12/2025</a:t>
+              <a:t>16/01/2026</a:t>
             </a:fld>
             <a:endParaRPr lang="en-GB"/>
           </a:p>
@@ -3662,7 +3623,7 @@
           <a:p>
             <a:fld id="{E85DF616-B21E-4EF6-A6A5-95E2FB3EB1A1}" type="datetimeFigureOut">
               <a:rPr lang="en-GB" smtClean="0"/>
-              <a:t>18/12/2025</a:t>
+              <a:t>16/01/2026</a:t>
             </a:fld>
             <a:endParaRPr lang="en-GB"/>
           </a:p>
@@ -7608,6 +7569,45 @@
           </a:prstGeom>
         </p:spPr>
       </p:pic>
+      <p:sp>
+        <p:nvSpPr>
+          <p:cNvPr id="2" name="TextBox 1">
+            <a:extLst>
+              <a:ext uri="{FF2B5EF4-FFF2-40B4-BE49-F238E27FC236}">
+                <a16:creationId xmlns:a16="http://schemas.microsoft.com/office/drawing/2014/main" id="{CBFC0A27-8316-F94E-FB36-D8BC6E05AB71}"/>
+              </a:ext>
+            </a:extLst>
+          </p:cNvPr>
+          <p:cNvSpPr txBox="1"/>
+          <p:nvPr/>
+        </p:nvSpPr>
+        <p:spPr>
+          <a:xfrm>
+            <a:off x="4496499" y="6116069"/>
+            <a:ext cx="7298422" cy="646331"/>
+          </a:xfrm>
+          <a:prstGeom prst="rect">
+            <a:avLst/>
+          </a:prstGeom>
+          <a:noFill/>
+        </p:spPr>
+        <p:txBody>
+          <a:bodyPr wrap="square" rtlCol="0">
+            <a:spAutoFit/>
+          </a:bodyPr>
+          <a:lstStyle/>
+          <a:p>
+            <a:r>
+              <a:rPr lang="en-GB" b="1" dirty="0">
+                <a:solidFill>
+                  <a:schemeClr val="accent2"/>
+                </a:solidFill>
+              </a:rPr>
+              <a:t>Note: This overfitting (above) was observed on a Neural Network model, not a polynomial regression, but the observation still holds.</a:t>
+            </a:r>
+          </a:p>
+        </p:txBody>
+      </p:sp>
     </p:spTree>
     <p:extLst>
       <p:ext uri="{BB962C8B-B14F-4D97-AF65-F5344CB8AC3E}">
@@ -10430,8 +10430,8 @@
           </a:p>
         </p:txBody>
       </p:sp>
-      <mc:AlternateContent xmlns:mc="http://schemas.openxmlformats.org/markup-compatibility/2006">
-        <mc:Choice xmlns:a14="http://schemas.microsoft.com/office/drawing/2010/main" Requires="a14">
+      <mc:AlternateContent xmlns:mc="http://schemas.openxmlformats.org/markup-compatibility/2006" xmlns:a14="http://schemas.microsoft.com/office/drawing/2010/main">
+        <mc:Choice Requires="a14">
           <p:sp>
             <p:nvSpPr>
               <p:cNvPr id="3" name="Content Placeholder 2">
@@ -10600,7 +10600,7 @@
             </p:txBody>
           </p:sp>
         </mc:Choice>
-        <mc:Fallback>
+        <mc:Fallback xmlns="">
           <p:sp>
             <p:nvSpPr>
               <p:cNvPr id="3" name="Content Placeholder 2">
@@ -11122,8 +11122,8 @@
           </a:p>
         </p:txBody>
       </p:sp>
-      <mc:AlternateContent xmlns:mc="http://schemas.openxmlformats.org/markup-compatibility/2006">
-        <mc:Choice xmlns:a14="http://schemas.microsoft.com/office/drawing/2010/main" Requires="a14">
+      <mc:AlternateContent xmlns:mc="http://schemas.openxmlformats.org/markup-compatibility/2006" xmlns:a14="http://schemas.microsoft.com/office/drawing/2010/main">
+        <mc:Choice Requires="a14">
           <p:sp>
             <p:nvSpPr>
               <p:cNvPr id="4" name="Content Placeholder 3">
@@ -11222,7 +11222,7 @@
             </p:txBody>
           </p:sp>
         </mc:Choice>
-        <mc:Fallback>
+        <mc:Fallback xmlns="">
           <p:sp>
             <p:nvSpPr>
               <p:cNvPr id="4" name="Content Placeholder 3">
@@ -12406,8 +12406,8 @@
           </p:sp>
         </mc:Fallback>
       </mc:AlternateContent>
-      <mc:AlternateContent xmlns:mc="http://schemas.openxmlformats.org/markup-compatibility/2006">
-        <mc:Choice xmlns:a14="http://schemas.microsoft.com/office/drawing/2010/main" Requires="a14">
+      <mc:AlternateContent xmlns:mc="http://schemas.openxmlformats.org/markup-compatibility/2006" xmlns:a14="http://schemas.microsoft.com/office/drawing/2010/main">
+        <mc:Choice Requires="a14">
           <p:sp>
             <p:nvSpPr>
               <p:cNvPr id="7" name="Content Placeholder 2">
@@ -12590,7 +12590,7 @@
             </p:txBody>
           </p:sp>
         </mc:Choice>
-        <mc:Fallback>
+        <mc:Fallback xmlns="">
           <p:sp>
             <p:nvSpPr>
               <p:cNvPr id="7" name="Content Placeholder 2">
@@ -12754,8 +12754,8 @@
           </a:prstGeom>
         </p:spPr>
       </p:pic>
-      <mc:AlternateContent xmlns:mc="http://schemas.openxmlformats.org/markup-compatibility/2006">
-        <mc:Choice xmlns:a14="http://schemas.microsoft.com/office/drawing/2010/main" Requires="a14">
+      <mc:AlternateContent xmlns:mc="http://schemas.openxmlformats.org/markup-compatibility/2006" xmlns:a14="http://schemas.microsoft.com/office/drawing/2010/main">
+        <mc:Choice Requires="a14">
           <p:sp>
             <p:nvSpPr>
               <p:cNvPr id="2" name="TextBox 1">
@@ -12879,7 +12879,7 @@
             </p:txBody>
           </p:sp>
         </mc:Choice>
-        <mc:Fallback>
+        <mc:Fallback xmlns="">
           <p:sp>
             <p:nvSpPr>
               <p:cNvPr id="2" name="TextBox 1">

--- a/W1/2. W1S2 final/W1S2.pptx
+++ b/W1/2. W1S2 final/W1S2.pptx
@@ -5,7 +5,7 @@
     <p:sldMasterId id="2147483648" r:id="rId1"/>
   </p:sldMasterIdLst>
   <p:notesMasterIdLst>
-    <p:notesMasterId r:id="rId47"/>
+    <p:notesMasterId r:id="rId48"/>
   </p:notesMasterIdLst>
   <p:sldIdLst>
     <p:sldId id="377" r:id="rId2"/>
@@ -17,42 +17,43 @@
     <p:sldId id="476" r:id="rId8"/>
     <p:sldId id="477" r:id="rId9"/>
     <p:sldId id="478" r:id="rId10"/>
-    <p:sldId id="534" r:id="rId11"/>
-    <p:sldId id="479" r:id="rId12"/>
-    <p:sldId id="480" r:id="rId13"/>
-    <p:sldId id="482" r:id="rId14"/>
-    <p:sldId id="483" r:id="rId15"/>
-    <p:sldId id="484" r:id="rId16"/>
-    <p:sldId id="485" r:id="rId17"/>
-    <p:sldId id="486" r:id="rId18"/>
-    <p:sldId id="487" r:id="rId19"/>
-    <p:sldId id="488" r:id="rId20"/>
-    <p:sldId id="489" r:id="rId21"/>
-    <p:sldId id="539" r:id="rId22"/>
-    <p:sldId id="490" r:id="rId23"/>
-    <p:sldId id="536" r:id="rId24"/>
-    <p:sldId id="491" r:id="rId25"/>
-    <p:sldId id="492" r:id="rId26"/>
-    <p:sldId id="493" r:id="rId27"/>
-    <p:sldId id="494" r:id="rId28"/>
-    <p:sldId id="411" r:id="rId29"/>
-    <p:sldId id="495" r:id="rId30"/>
-    <p:sldId id="496" r:id="rId31"/>
-    <p:sldId id="497" r:id="rId32"/>
-    <p:sldId id="498" r:id="rId33"/>
-    <p:sldId id="499" r:id="rId34"/>
-    <p:sldId id="500" r:id="rId35"/>
-    <p:sldId id="537" r:id="rId36"/>
-    <p:sldId id="501" r:id="rId37"/>
-    <p:sldId id="502" r:id="rId38"/>
-    <p:sldId id="412" r:id="rId39"/>
-    <p:sldId id="508" r:id="rId40"/>
-    <p:sldId id="503" r:id="rId41"/>
-    <p:sldId id="504" r:id="rId42"/>
-    <p:sldId id="506" r:id="rId43"/>
-    <p:sldId id="538" r:id="rId44"/>
-    <p:sldId id="505" r:id="rId45"/>
-    <p:sldId id="535" r:id="rId46"/>
+    <p:sldId id="479" r:id="rId11"/>
+    <p:sldId id="480" r:id="rId12"/>
+    <p:sldId id="482" r:id="rId13"/>
+    <p:sldId id="483" r:id="rId14"/>
+    <p:sldId id="484" r:id="rId15"/>
+    <p:sldId id="485" r:id="rId16"/>
+    <p:sldId id="486" r:id="rId17"/>
+    <p:sldId id="487" r:id="rId18"/>
+    <p:sldId id="488" r:id="rId19"/>
+    <p:sldId id="489" r:id="rId20"/>
+    <p:sldId id="539" r:id="rId21"/>
+    <p:sldId id="490" r:id="rId22"/>
+    <p:sldId id="536" r:id="rId23"/>
+    <p:sldId id="491" r:id="rId24"/>
+    <p:sldId id="492" r:id="rId25"/>
+    <p:sldId id="493" r:id="rId26"/>
+    <p:sldId id="494" r:id="rId27"/>
+    <p:sldId id="411" r:id="rId28"/>
+    <p:sldId id="495" r:id="rId29"/>
+    <p:sldId id="496" r:id="rId30"/>
+    <p:sldId id="497" r:id="rId31"/>
+    <p:sldId id="498" r:id="rId32"/>
+    <p:sldId id="499" r:id="rId33"/>
+    <p:sldId id="500" r:id="rId34"/>
+    <p:sldId id="537" r:id="rId35"/>
+    <p:sldId id="501" r:id="rId36"/>
+    <p:sldId id="502" r:id="rId37"/>
+    <p:sldId id="412" r:id="rId38"/>
+    <p:sldId id="508" r:id="rId39"/>
+    <p:sldId id="503" r:id="rId40"/>
+    <p:sldId id="504" r:id="rId41"/>
+    <p:sldId id="506" r:id="rId42"/>
+    <p:sldId id="538" r:id="rId43"/>
+    <p:sldId id="505" r:id="rId44"/>
+    <p:sldId id="535" r:id="rId45"/>
+    <p:sldId id="540" r:id="rId46"/>
+    <p:sldId id="534" r:id="rId47"/>
   </p:sldIdLst>
   <p:sldSz cx="12192000" cy="6858000"/>
   <p:notesSz cx="6858000" cy="9144000"/>
@@ -173,7 +174,6 @@
             <p14:sldId id="476"/>
             <p14:sldId id="477"/>
             <p14:sldId id="478"/>
-            <p14:sldId id="534"/>
             <p14:sldId id="479"/>
             <p14:sldId id="480"/>
             <p14:sldId id="482"/>
@@ -221,6 +221,12 @@
             <p14:sldId id="538"/>
             <p14:sldId id="505"/>
             <p14:sldId id="535"/>
+            <p14:sldId id="540"/>
+          </p14:sldIdLst>
+        </p14:section>
+        <p14:section name="Bonus slides" id="{2A56BA88-A1F2-42A3-B2D5-C773A9EA86C7}">
+          <p14:sldIdLst>
+            <p14:sldId id="534"/>
           </p14:sldIdLst>
         </p14:section>
       </p14:sectionLst>
@@ -241,7 +247,7 @@
 <file path=ppt/revisionInfo.xml><?xml version="1.0" encoding="utf-8"?>
 <p1510:revInfo xmlns:a="http://schemas.openxmlformats.org/drawingml/2006/main" xmlns:r="http://schemas.openxmlformats.org/officeDocument/2006/relationships" xmlns:p1510="http://schemas.microsoft.com/office/powerpoint/2015/10/main">
   <p1510:revLst>
-    <p1510:client id="{2C083308-696B-45F0-8323-061DEF55DE8A}" v="1" dt="2026-01-16T05:10:18.491"/>
+    <p1510:client id="{2C083308-696B-45F0-8323-061DEF55DE8A}" v="252" dt="2026-01-27T10:02:07.882"/>
   </p1510:revLst>
 </p1510:revInfo>
 </file>
@@ -250,49 +256,72 @@
 <pc:chgInfo xmlns:a="http://schemas.openxmlformats.org/drawingml/2006/main" xmlns:r="http://schemas.openxmlformats.org/officeDocument/2006/relationships" xmlns:ac="http://schemas.microsoft.com/office/drawing/2013/main/command" xmlns:pc="http://schemas.microsoft.com/office/powerpoint/2013/main/command">
   <pc:docChgLst>
     <pc:chgData name="Matthieu De Mari" userId="dfb708c9-d8dc-439f-9a3b-c772bf4a311c" providerId="ADAL" clId="{81E9B007-0C2C-493E-9B93-55A62C9C1F12}"/>
-    <pc:docChg chg="undo custSel addSld delSld modSld modSection">
-      <pc:chgData name="Matthieu De Mari" userId="dfb708c9-d8dc-439f-9a3b-c772bf4a311c" providerId="ADAL" clId="{81E9B007-0C2C-493E-9B93-55A62C9C1F12}" dt="2026-01-16T05:11:06.280" v="546" actId="20577"/>
+    <pc:docChg chg="undo custSel addSld delSld modSld addSection modSection">
+      <pc:chgData name="Matthieu De Mari" userId="dfb708c9-d8dc-439f-9a3b-c772bf4a311c" providerId="ADAL" clId="{81E9B007-0C2C-493E-9B93-55A62C9C1F12}" dt="2026-01-27T11:23:28.369" v="1171" actId="20577"/>
       <pc:docMkLst>
         <pc:docMk/>
       </pc:docMkLst>
       <pc:sldChg chg="modSp mod">
-        <pc:chgData name="Matthieu De Mari" userId="dfb708c9-d8dc-439f-9a3b-c772bf4a311c" providerId="ADAL" clId="{81E9B007-0C2C-493E-9B93-55A62C9C1F12}" dt="2025-12-18T21:19:07.628" v="309" actId="20577"/>
+        <pc:chgData name="Matthieu De Mari" userId="dfb708c9-d8dc-439f-9a3b-c772bf4a311c" providerId="ADAL" clId="{81E9B007-0C2C-493E-9B93-55A62C9C1F12}" dt="2026-01-27T04:25:37.545" v="576" actId="20577"/>
         <pc:sldMkLst>
           <pc:docMk/>
-          <pc:sldMk cId="1377302654" sldId="412"/>
+          <pc:sldMk cId="2981077995" sldId="474"/>
         </pc:sldMkLst>
         <pc:spChg chg="mod">
-          <ac:chgData name="Matthieu De Mari" userId="dfb708c9-d8dc-439f-9a3b-c772bf4a311c" providerId="ADAL" clId="{81E9B007-0C2C-493E-9B93-55A62C9C1F12}" dt="2025-12-18T21:19:07.628" v="309" actId="20577"/>
+          <ac:chgData name="Matthieu De Mari" userId="dfb708c9-d8dc-439f-9a3b-c772bf4a311c" providerId="ADAL" clId="{81E9B007-0C2C-493E-9B93-55A62C9C1F12}" dt="2026-01-27T04:25:37.545" v="576" actId="20577"/>
           <ac:spMkLst>
             <pc:docMk/>
-            <pc:sldMk cId="1377302654" sldId="412"/>
-            <ac:spMk id="4" creationId="{5E76589E-870E-419D-CF95-4309EACDB190}"/>
+            <pc:sldMk cId="2981077995" sldId="474"/>
+            <ac:spMk id="3" creationId="{09ACEEFD-8460-F540-F80C-BEACC2297773}"/>
           </ac:spMkLst>
         </pc:spChg>
       </pc:sldChg>
-      <pc:sldChg chg="modSp">
-        <pc:chgData name="Matthieu De Mari" userId="dfb708c9-d8dc-439f-9a3b-c772bf4a311c" providerId="ADAL" clId="{81E9B007-0C2C-493E-9B93-55A62C9C1F12}" dt="2025-12-18T21:15:13.020" v="269"/>
+      <pc:sldChg chg="modSp mod">
+        <pc:chgData name="Matthieu De Mari" userId="dfb708c9-d8dc-439f-9a3b-c772bf4a311c" providerId="ADAL" clId="{81E9B007-0C2C-493E-9B93-55A62C9C1F12}" dt="2026-01-27T04:28:07.269" v="588" actId="20577"/>
         <pc:sldMkLst>
           <pc:docMk/>
-          <pc:sldMk cId="658215501" sldId="489"/>
+          <pc:sldMk cId="3819655263" sldId="482"/>
         </pc:sldMkLst>
         <pc:spChg chg="mod">
-          <ac:chgData name="Matthieu De Mari" userId="dfb708c9-d8dc-439f-9a3b-c772bf4a311c" providerId="ADAL" clId="{81E9B007-0C2C-493E-9B93-55A62C9C1F12}" dt="2025-12-18T21:15:13.020" v="269"/>
+          <ac:chgData name="Matthieu De Mari" userId="dfb708c9-d8dc-439f-9a3b-c772bf4a311c" providerId="ADAL" clId="{81E9B007-0C2C-493E-9B93-55A62C9C1F12}" dt="2026-01-27T04:28:07.269" v="588" actId="20577"/>
           <ac:spMkLst>
             <pc:docMk/>
-            <pc:sldMk cId="658215501" sldId="489"/>
+            <pc:sldMk cId="3819655263" sldId="482"/>
+            <ac:spMk id="8" creationId="{5BEF22B4-109D-679B-56C6-BF8C9EA81DAD}"/>
+          </ac:spMkLst>
+        </pc:spChg>
+      </pc:sldChg>
+      <pc:sldChg chg="modSp mod">
+        <pc:chgData name="Matthieu De Mari" userId="dfb708c9-d8dc-439f-9a3b-c772bf4a311c" providerId="ADAL" clId="{81E9B007-0C2C-493E-9B93-55A62C9C1F12}" dt="2026-01-27T04:29:29.804" v="683" actId="27636"/>
+        <pc:sldMkLst>
+          <pc:docMk/>
+          <pc:sldMk cId="4026475787" sldId="488"/>
+        </pc:sldMkLst>
+        <pc:spChg chg="mod">
+          <ac:chgData name="Matthieu De Mari" userId="dfb708c9-d8dc-439f-9a3b-c772bf4a311c" providerId="ADAL" clId="{81E9B007-0C2C-493E-9B93-55A62C9C1F12}" dt="2026-01-27T04:29:29.804" v="683" actId="27636"/>
+          <ac:spMkLst>
+            <pc:docMk/>
+            <pc:sldMk cId="4026475787" sldId="488"/>
             <ac:spMk id="6" creationId="{3FF27FA6-234D-EB6E-7AD4-4E52F151A639}"/>
           </ac:spMkLst>
         </pc:spChg>
       </pc:sldChg>
       <pc:sldChg chg="modSp mod">
-        <pc:chgData name="Matthieu De Mari" userId="dfb708c9-d8dc-439f-9a3b-c772bf4a311c" providerId="ADAL" clId="{81E9B007-0C2C-493E-9B93-55A62C9C1F12}" dt="2025-12-18T21:15:09.230" v="268" actId="20577"/>
+        <pc:chgData name="Matthieu De Mari" userId="dfb708c9-d8dc-439f-9a3b-c772bf4a311c" providerId="ADAL" clId="{81E9B007-0C2C-493E-9B93-55A62C9C1F12}" dt="2026-01-27T04:30:57.626" v="749" actId="20577"/>
         <pc:sldMkLst>
           <pc:docMk/>
           <pc:sldMk cId="1974002731" sldId="490"/>
         </pc:sldMkLst>
         <pc:spChg chg="mod">
-          <ac:chgData name="Matthieu De Mari" userId="dfb708c9-d8dc-439f-9a3b-c772bf4a311c" providerId="ADAL" clId="{81E9B007-0C2C-493E-9B93-55A62C9C1F12}" dt="2025-12-18T21:15:09.230" v="268" actId="20577"/>
+          <ac:chgData name="Matthieu De Mari" userId="dfb708c9-d8dc-439f-9a3b-c772bf4a311c" providerId="ADAL" clId="{81E9B007-0C2C-493E-9B93-55A62C9C1F12}" dt="2026-01-27T04:30:57.626" v="749" actId="20577"/>
+          <ac:spMkLst>
+            <pc:docMk/>
+            <pc:sldMk cId="1974002731" sldId="490"/>
+            <ac:spMk id="2" creationId="{37C84060-31A2-3AFB-B38D-81D7652356D5}"/>
+          </ac:spMkLst>
+        </pc:spChg>
+        <pc:spChg chg="mod">
+          <ac:chgData name="Matthieu De Mari" userId="dfb708c9-d8dc-439f-9a3b-c772bf4a311c" providerId="ADAL" clId="{81E9B007-0C2C-493E-9B93-55A62C9C1F12}" dt="2026-01-27T04:30:56.773" v="747" actId="20577"/>
           <ac:spMkLst>
             <pc:docMk/>
             <pc:sldMk cId="1974002731" sldId="490"/>
@@ -301,137 +330,108 @@
         </pc:spChg>
       </pc:sldChg>
       <pc:sldChg chg="modSp mod">
-        <pc:chgData name="Matthieu De Mari" userId="dfb708c9-d8dc-439f-9a3b-c772bf4a311c" providerId="ADAL" clId="{81E9B007-0C2C-493E-9B93-55A62C9C1F12}" dt="2025-12-18T21:15:30.548" v="272" actId="207"/>
+        <pc:chgData name="Matthieu De Mari" userId="dfb708c9-d8dc-439f-9a3b-c772bf4a311c" providerId="ADAL" clId="{81E9B007-0C2C-493E-9B93-55A62C9C1F12}" dt="2026-01-27T04:32:10.918" v="862" actId="20577"/>
         <pc:sldMkLst>
           <pc:docMk/>
-          <pc:sldMk cId="2138921819" sldId="493"/>
+          <pc:sldMk cId="1249800631" sldId="492"/>
         </pc:sldMkLst>
         <pc:spChg chg="mod">
-          <ac:chgData name="Matthieu De Mari" userId="dfb708c9-d8dc-439f-9a3b-c772bf4a311c" providerId="ADAL" clId="{81E9B007-0C2C-493E-9B93-55A62C9C1F12}" dt="2025-12-18T21:15:30.548" v="272" actId="207"/>
+          <ac:chgData name="Matthieu De Mari" userId="dfb708c9-d8dc-439f-9a3b-c772bf4a311c" providerId="ADAL" clId="{81E9B007-0C2C-493E-9B93-55A62C9C1F12}" dt="2026-01-27T04:32:10.918" v="862" actId="20577"/>
           <ac:spMkLst>
             <pc:docMk/>
-            <pc:sldMk cId="2138921819" sldId="493"/>
-            <ac:spMk id="3" creationId="{420487D3-EA12-DF6F-4A31-967FCF611809}"/>
+            <pc:sldMk cId="1249800631" sldId="492"/>
+            <ac:spMk id="2" creationId="{37C84060-31A2-3AFB-B38D-81D7652356D5}"/>
           </ac:spMkLst>
         </pc:spChg>
       </pc:sldChg>
-      <pc:sldChg chg="modSp mod">
-        <pc:chgData name="Matthieu De Mari" userId="dfb708c9-d8dc-439f-9a3b-c772bf4a311c" providerId="ADAL" clId="{81E9B007-0C2C-493E-9B93-55A62C9C1F12}" dt="2025-12-18T21:15:36.357" v="273" actId="207"/>
+      <pc:sldChg chg="modSp add del mod">
+        <pc:chgData name="Matthieu De Mari" userId="dfb708c9-d8dc-439f-9a3b-c772bf4a311c" providerId="ADAL" clId="{81E9B007-0C2C-493E-9B93-55A62C9C1F12}" dt="2026-01-27T04:55:39.849" v="866" actId="47"/>
         <pc:sldMkLst>
           <pc:docMk/>
-          <pc:sldMk cId="410904367" sldId="494"/>
+          <pc:sldMk cId="2411344912" sldId="502"/>
         </pc:sldMkLst>
         <pc:spChg chg="mod">
-          <ac:chgData name="Matthieu De Mari" userId="dfb708c9-d8dc-439f-9a3b-c772bf4a311c" providerId="ADAL" clId="{81E9B007-0C2C-493E-9B93-55A62C9C1F12}" dt="2025-12-18T21:15:36.357" v="273" actId="207"/>
+          <ac:chgData name="Matthieu De Mari" userId="dfb708c9-d8dc-439f-9a3b-c772bf4a311c" providerId="ADAL" clId="{81E9B007-0C2C-493E-9B93-55A62C9C1F12}" dt="2026-01-27T04:55:24.290" v="864" actId="20577"/>
           <ac:spMkLst>
             <pc:docMk/>
-            <pc:sldMk cId="410904367" sldId="494"/>
-            <ac:spMk id="4" creationId="{27242388-4C68-D772-1E59-FC76EBC6F2CF}"/>
+            <pc:sldMk cId="2411344912" sldId="502"/>
+            <ac:spMk id="6" creationId="{E104F76B-BBAC-9021-8132-85B53E4D630A}"/>
           </ac:spMkLst>
         </pc:spChg>
       </pc:sldChg>
-      <pc:sldChg chg="modSp mod">
-        <pc:chgData name="Matthieu De Mari" userId="dfb708c9-d8dc-439f-9a3b-c772bf4a311c" providerId="ADAL" clId="{81E9B007-0C2C-493E-9B93-55A62C9C1F12}" dt="2025-12-18T21:18:27.617" v="293" actId="20577"/>
+      <pc:sldChg chg="add">
+        <pc:chgData name="Matthieu De Mari" userId="dfb708c9-d8dc-439f-9a3b-c772bf4a311c" providerId="ADAL" clId="{81E9B007-0C2C-493E-9B93-55A62C9C1F12}" dt="2026-01-27T04:27:19.531" v="580"/>
         <pc:sldMkLst>
           <pc:docMk/>
-          <pc:sldMk cId="2145508996" sldId="501"/>
+          <pc:sldMk cId="423541333" sldId="534"/>
+        </pc:sldMkLst>
+      </pc:sldChg>
+      <pc:sldChg chg="del">
+        <pc:chgData name="Matthieu De Mari" userId="dfb708c9-d8dc-439f-9a3b-c772bf4a311c" providerId="ADAL" clId="{81E9B007-0C2C-493E-9B93-55A62C9C1F12}" dt="2026-01-27T04:27:07.681" v="577" actId="2696"/>
+        <pc:sldMkLst>
+          <pc:docMk/>
+          <pc:sldMk cId="434677060" sldId="534"/>
+        </pc:sldMkLst>
+      </pc:sldChg>
+      <pc:sldChg chg="delSp modSp mod">
+        <pc:chgData name="Matthieu De Mari" userId="dfb708c9-d8dc-439f-9a3b-c772bf4a311c" providerId="ADAL" clId="{81E9B007-0C2C-493E-9B93-55A62C9C1F12}" dt="2026-01-27T10:02:19.241" v="1009" actId="1076"/>
+        <pc:sldMkLst>
+          <pc:docMk/>
+          <pc:sldMk cId="3607984374" sldId="535"/>
         </pc:sldMkLst>
         <pc:spChg chg="mod">
-          <ac:chgData name="Matthieu De Mari" userId="dfb708c9-d8dc-439f-9a3b-c772bf4a311c" providerId="ADAL" clId="{81E9B007-0C2C-493E-9B93-55A62C9C1F12}" dt="2025-12-18T21:18:27.617" v="293" actId="20577"/>
+          <ac:chgData name="Matthieu De Mari" userId="dfb708c9-d8dc-439f-9a3b-c772bf4a311c" providerId="ADAL" clId="{81E9B007-0C2C-493E-9B93-55A62C9C1F12}" dt="2026-01-27T10:02:14.927" v="1008" actId="14100"/>
           <ac:spMkLst>
             <pc:docMk/>
-            <pc:sldMk cId="2145508996" sldId="501"/>
-            <ac:spMk id="3" creationId="{5DAEE9F3-874A-926F-2B55-5B076C48EFE9}"/>
-          </ac:spMkLst>
-        </pc:spChg>
-      </pc:sldChg>
-      <pc:sldChg chg="modSp mod">
-        <pc:chgData name="Matthieu De Mari" userId="dfb708c9-d8dc-439f-9a3b-c772bf4a311c" providerId="ADAL" clId="{81E9B007-0C2C-493E-9B93-55A62C9C1F12}" dt="2025-12-18T21:21:41.840" v="389" actId="20577"/>
-        <pc:sldMkLst>
-          <pc:docMk/>
-          <pc:sldMk cId="1757057001" sldId="504"/>
-        </pc:sldMkLst>
-        <pc:spChg chg="mod">
-          <ac:chgData name="Matthieu De Mari" userId="dfb708c9-d8dc-439f-9a3b-c772bf4a311c" providerId="ADAL" clId="{81E9B007-0C2C-493E-9B93-55A62C9C1F12}" dt="2025-12-18T21:21:41.840" v="389" actId="20577"/>
-          <ac:spMkLst>
-            <pc:docMk/>
-            <pc:sldMk cId="1757057001" sldId="504"/>
-            <ac:spMk id="7" creationId="{A0D24550-75E0-C992-DC9E-D60538DBA84C}"/>
-          </ac:spMkLst>
-        </pc:spChg>
-      </pc:sldChg>
-      <pc:sldChg chg="modSp mod">
-        <pc:chgData name="Matthieu De Mari" userId="dfb708c9-d8dc-439f-9a3b-c772bf4a311c" providerId="ADAL" clId="{81E9B007-0C2C-493E-9B93-55A62C9C1F12}" dt="2025-12-18T21:22:34.717" v="397" actId="20577"/>
-        <pc:sldMkLst>
-          <pc:docMk/>
-          <pc:sldMk cId="1659504250" sldId="505"/>
-        </pc:sldMkLst>
-        <pc:spChg chg="mod">
-          <ac:chgData name="Matthieu De Mari" userId="dfb708c9-d8dc-439f-9a3b-c772bf4a311c" providerId="ADAL" clId="{81E9B007-0C2C-493E-9B93-55A62C9C1F12}" dt="2025-12-18T21:22:34.717" v="397" actId="20577"/>
-          <ac:spMkLst>
-            <pc:docMk/>
-            <pc:sldMk cId="1659504250" sldId="505"/>
+            <pc:sldMk cId="3607984374" sldId="535"/>
             <ac:spMk id="6" creationId="{035BA096-4E67-B5D5-DBD3-F226777FADC7}"/>
           </ac:spMkLst>
         </pc:spChg>
+        <pc:spChg chg="mod">
+          <ac:chgData name="Matthieu De Mari" userId="dfb708c9-d8dc-439f-9a3b-c772bf4a311c" providerId="ADAL" clId="{81E9B007-0C2C-493E-9B93-55A62C9C1F12}" dt="2026-01-27T10:01:07.941" v="965" actId="1076"/>
+          <ac:spMkLst>
+            <pc:docMk/>
+            <pc:sldMk cId="3607984374" sldId="535"/>
+            <ac:spMk id="11" creationId="{ED238786-5737-F9FC-6108-858704D8D20C}"/>
+          </ac:spMkLst>
+        </pc:spChg>
+        <pc:spChg chg="mod">
+          <ac:chgData name="Matthieu De Mari" userId="dfb708c9-d8dc-439f-9a3b-c772bf4a311c" providerId="ADAL" clId="{81E9B007-0C2C-493E-9B93-55A62C9C1F12}" dt="2026-01-27T10:01:11.212" v="966" actId="1076"/>
+          <ac:spMkLst>
+            <pc:docMk/>
+            <pc:sldMk cId="3607984374" sldId="535"/>
+            <ac:spMk id="12" creationId="{61A8A419-4FE0-7FCD-F823-C870DB3A155F}"/>
+          </ac:spMkLst>
+        </pc:spChg>
+        <pc:spChg chg="mod">
+          <ac:chgData name="Matthieu De Mari" userId="dfb708c9-d8dc-439f-9a3b-c772bf4a311c" providerId="ADAL" clId="{81E9B007-0C2C-493E-9B93-55A62C9C1F12}" dt="2026-01-27T10:02:19.241" v="1009" actId="1076"/>
+          <ac:spMkLst>
+            <pc:docMk/>
+            <pc:sldMk cId="3607984374" sldId="535"/>
+            <ac:spMk id="13" creationId="{CF53D115-A062-0A2A-006C-7B83C5ABE2B7}"/>
+          </ac:spMkLst>
+        </pc:spChg>
+        <pc:picChg chg="del mod">
+          <ac:chgData name="Matthieu De Mari" userId="dfb708c9-d8dc-439f-9a3b-c772bf4a311c" providerId="ADAL" clId="{81E9B007-0C2C-493E-9B93-55A62C9C1F12}" dt="2026-01-27T10:00:56.593" v="962" actId="478"/>
+          <ac:picMkLst>
+            <pc:docMk/>
+            <pc:sldMk cId="3607984374" sldId="535"/>
+            <ac:picMk id="10" creationId="{71584AF8-DE87-F7E2-AD58-35BCCD7D1F89}"/>
+          </ac:picMkLst>
+        </pc:picChg>
       </pc:sldChg>
       <pc:sldChg chg="modSp mod">
-        <pc:chgData name="Matthieu De Mari" userId="dfb708c9-d8dc-439f-9a3b-c772bf4a311c" providerId="ADAL" clId="{81E9B007-0C2C-493E-9B93-55A62C9C1F12}" dt="2025-12-18T21:19:19.861" v="331" actId="20577"/>
-        <pc:sldMkLst>
-          <pc:docMk/>
-          <pc:sldMk cId="3495317520" sldId="508"/>
-        </pc:sldMkLst>
-        <pc:spChg chg="mod">
-          <ac:chgData name="Matthieu De Mari" userId="dfb708c9-d8dc-439f-9a3b-c772bf4a311c" providerId="ADAL" clId="{81E9B007-0C2C-493E-9B93-55A62C9C1F12}" dt="2025-12-18T21:19:19.861" v="331" actId="20577"/>
-          <ac:spMkLst>
-            <pc:docMk/>
-            <pc:sldMk cId="3495317520" sldId="508"/>
-            <ac:spMk id="4" creationId="{5E76589E-870E-419D-CF95-4309EACDB190}"/>
-          </ac:spMkLst>
-        </pc:spChg>
-      </pc:sldChg>
-      <pc:sldChg chg="modSp">
-        <pc:chgData name="Matthieu De Mari" userId="dfb708c9-d8dc-439f-9a3b-c772bf4a311c" providerId="ADAL" clId="{81E9B007-0C2C-493E-9B93-55A62C9C1F12}" dt="2025-12-18T21:15:15.108" v="270"/>
+        <pc:chgData name="Matthieu De Mari" userId="dfb708c9-d8dc-439f-9a3b-c772bf4a311c" providerId="ADAL" clId="{81E9B007-0C2C-493E-9B93-55A62C9C1F12}" dt="2026-01-27T04:31:59.243" v="854" actId="20577"/>
         <pc:sldMkLst>
           <pc:docMk/>
           <pc:sldMk cId="3487424720" sldId="536"/>
         </pc:sldMkLst>
         <pc:spChg chg="mod">
-          <ac:chgData name="Matthieu De Mari" userId="dfb708c9-d8dc-439f-9a3b-c772bf4a311c" providerId="ADAL" clId="{81E9B007-0C2C-493E-9B93-55A62C9C1F12}" dt="2025-12-18T21:15:15.108" v="270"/>
+          <ac:chgData name="Matthieu De Mari" userId="dfb708c9-d8dc-439f-9a3b-c772bf4a311c" providerId="ADAL" clId="{81E9B007-0C2C-493E-9B93-55A62C9C1F12}" dt="2026-01-27T04:31:59.243" v="854" actId="20577"/>
           <ac:spMkLst>
             <pc:docMk/>
             <pc:sldMk cId="3487424720" sldId="536"/>
-            <ac:spMk id="6" creationId="{3FF27FA6-234D-EB6E-7AD4-4E52F151A639}"/>
-          </ac:spMkLst>
-        </pc:spChg>
-      </pc:sldChg>
-      <pc:sldChg chg="modSp mod">
-        <pc:chgData name="Matthieu De Mari" userId="dfb708c9-d8dc-439f-9a3b-c772bf4a311c" providerId="ADAL" clId="{81E9B007-0C2C-493E-9B93-55A62C9C1F12}" dt="2025-12-18T21:17:52.069" v="277" actId="20577"/>
-        <pc:sldMkLst>
-          <pc:docMk/>
-          <pc:sldMk cId="2224169310" sldId="537"/>
-        </pc:sldMkLst>
-        <pc:spChg chg="mod">
-          <ac:chgData name="Matthieu De Mari" userId="dfb708c9-d8dc-439f-9a3b-c772bf4a311c" providerId="ADAL" clId="{81E9B007-0C2C-493E-9B93-55A62C9C1F12}" dt="2025-12-18T21:17:52.069" v="277" actId="20577"/>
-          <ac:spMkLst>
-            <pc:docMk/>
-            <pc:sldMk cId="2224169310" sldId="537"/>
-            <ac:spMk id="3" creationId="{99FBFDD0-6F31-1CFE-48D3-44BF5F1483C3}"/>
-          </ac:spMkLst>
-        </pc:spChg>
-      </pc:sldChg>
-      <pc:sldChg chg="modSp">
-        <pc:chgData name="Matthieu De Mari" userId="dfb708c9-d8dc-439f-9a3b-c772bf4a311c" providerId="ADAL" clId="{81E9B007-0C2C-493E-9B93-55A62C9C1F12}" dt="2025-12-18T21:22:09.969" v="390"/>
-        <pc:sldMkLst>
-          <pc:docMk/>
-          <pc:sldMk cId="1671560902" sldId="538"/>
-        </pc:sldMkLst>
-        <pc:spChg chg="mod">
-          <ac:chgData name="Matthieu De Mari" userId="dfb708c9-d8dc-439f-9a3b-c772bf4a311c" providerId="ADAL" clId="{81E9B007-0C2C-493E-9B93-55A62C9C1F12}" dt="2025-12-18T21:22:09.969" v="390"/>
-          <ac:spMkLst>
-            <pc:docMk/>
-            <pc:sldMk cId="1671560902" sldId="538"/>
-            <ac:spMk id="2" creationId="{7E8004EF-5A8C-5081-A7AD-65F92DB1C7E9}"/>
+            <ac:spMk id="2" creationId="{37C84060-31A2-3AFB-B38D-81D7652356D5}"/>
           </ac:spMkLst>
         </pc:spChg>
       </pc:sldChg>
@@ -447,6 +447,45 @@
             <pc:docMk/>
             <pc:sldMk cId="1061347991" sldId="539"/>
             <ac:spMk id="2" creationId="{CBFC0A27-8316-F94E-FB36-D8BC6E05AB71}"/>
+          </ac:spMkLst>
+        </pc:spChg>
+      </pc:sldChg>
+      <pc:sldChg chg="addSp delSp modSp new mod modClrScheme chgLayout">
+        <pc:chgData name="Matthieu De Mari" userId="dfb708c9-d8dc-439f-9a3b-c772bf4a311c" providerId="ADAL" clId="{81E9B007-0C2C-493E-9B93-55A62C9C1F12}" dt="2026-01-27T11:23:28.369" v="1171" actId="20577"/>
+        <pc:sldMkLst>
+          <pc:docMk/>
+          <pc:sldMk cId="3647508694" sldId="540"/>
+        </pc:sldMkLst>
+        <pc:spChg chg="del mod ord">
+          <ac:chgData name="Matthieu De Mari" userId="dfb708c9-d8dc-439f-9a3b-c772bf4a311c" providerId="ADAL" clId="{81E9B007-0C2C-493E-9B93-55A62C9C1F12}" dt="2026-01-27T11:22:49.001" v="1011" actId="700"/>
+          <ac:spMkLst>
+            <pc:docMk/>
+            <pc:sldMk cId="3647508694" sldId="540"/>
+            <ac:spMk id="2" creationId="{600EEE9A-2908-4BEB-B5DB-1766EAB4D19F}"/>
+          </ac:spMkLst>
+        </pc:spChg>
+        <pc:spChg chg="del mod ord">
+          <ac:chgData name="Matthieu De Mari" userId="dfb708c9-d8dc-439f-9a3b-c772bf4a311c" providerId="ADAL" clId="{81E9B007-0C2C-493E-9B93-55A62C9C1F12}" dt="2026-01-27T11:22:49.001" v="1011" actId="700"/>
+          <ac:spMkLst>
+            <pc:docMk/>
+            <pc:sldMk cId="3647508694" sldId="540"/>
+            <ac:spMk id="3" creationId="{D4D820BA-E357-1AAB-AC96-2F5998ABC9BF}"/>
+          </ac:spMkLst>
+        </pc:spChg>
+        <pc:spChg chg="add mod ord">
+          <ac:chgData name="Matthieu De Mari" userId="dfb708c9-d8dc-439f-9a3b-c772bf4a311c" providerId="ADAL" clId="{81E9B007-0C2C-493E-9B93-55A62C9C1F12}" dt="2026-01-27T11:22:53.421" v="1030" actId="20577"/>
+          <ac:spMkLst>
+            <pc:docMk/>
+            <pc:sldMk cId="3647508694" sldId="540"/>
+            <ac:spMk id="4" creationId="{B449D360-8EA5-756A-5FBC-C8D82B54867F}"/>
+          </ac:spMkLst>
+        </pc:spChg>
+        <pc:spChg chg="add mod ord">
+          <ac:chgData name="Matthieu De Mari" userId="dfb708c9-d8dc-439f-9a3b-c772bf4a311c" providerId="ADAL" clId="{81E9B007-0C2C-493E-9B93-55A62C9C1F12}" dt="2026-01-27T11:23:28.369" v="1171" actId="20577"/>
+          <ac:spMkLst>
+            <pc:docMk/>
+            <pc:sldMk cId="3647508694" sldId="540"/>
+            <ac:spMk id="5" creationId="{A742FBCE-29AB-A5D4-EE61-EF8038238C69}"/>
           </ac:spMkLst>
         </pc:spChg>
       </pc:sldChg>
@@ -537,7 +576,7 @@
           <a:p>
             <a:fld id="{61478373-EB31-4867-8CF0-FA31364748A5}" type="datetimeFigureOut">
               <a:rPr lang="en-GB" smtClean="0"/>
-              <a:t>16/01/2026</a:t>
+              <a:t>27/01/2026</a:t>
             </a:fld>
             <a:endParaRPr lang="en-GB"/>
           </a:p>
@@ -954,7 +993,7 @@
           <a:p>
             <a:fld id="{E85DF616-B21E-4EF6-A6A5-95E2FB3EB1A1}" type="datetimeFigureOut">
               <a:rPr lang="en-GB" smtClean="0"/>
-              <a:t>16/01/2026</a:t>
+              <a:t>27/01/2026</a:t>
             </a:fld>
             <a:endParaRPr lang="en-GB"/>
           </a:p>
@@ -1154,7 +1193,7 @@
           <a:p>
             <a:fld id="{E85DF616-B21E-4EF6-A6A5-95E2FB3EB1A1}" type="datetimeFigureOut">
               <a:rPr lang="en-GB" smtClean="0"/>
-              <a:t>16/01/2026</a:t>
+              <a:t>27/01/2026</a:t>
             </a:fld>
             <a:endParaRPr lang="en-GB"/>
           </a:p>
@@ -1364,7 +1403,7 @@
           <a:p>
             <a:fld id="{E85DF616-B21E-4EF6-A6A5-95E2FB3EB1A1}" type="datetimeFigureOut">
               <a:rPr lang="en-GB" smtClean="0"/>
-              <a:t>16/01/2026</a:t>
+              <a:t>27/01/2026</a:t>
             </a:fld>
             <a:endParaRPr lang="en-GB"/>
           </a:p>
@@ -1564,7 +1603,7 @@
           <a:p>
             <a:fld id="{E85DF616-B21E-4EF6-A6A5-95E2FB3EB1A1}" type="datetimeFigureOut">
               <a:rPr lang="en-GB" smtClean="0"/>
-              <a:t>16/01/2026</a:t>
+              <a:t>27/01/2026</a:t>
             </a:fld>
             <a:endParaRPr lang="en-GB"/>
           </a:p>
@@ -1840,7 +1879,7 @@
           <a:p>
             <a:fld id="{E85DF616-B21E-4EF6-A6A5-95E2FB3EB1A1}" type="datetimeFigureOut">
               <a:rPr lang="en-GB" smtClean="0"/>
-              <a:t>16/01/2026</a:t>
+              <a:t>27/01/2026</a:t>
             </a:fld>
             <a:endParaRPr lang="en-GB"/>
           </a:p>
@@ -2108,7 +2147,7 @@
           <a:p>
             <a:fld id="{E85DF616-B21E-4EF6-A6A5-95E2FB3EB1A1}" type="datetimeFigureOut">
               <a:rPr lang="en-GB" smtClean="0"/>
-              <a:t>16/01/2026</a:t>
+              <a:t>27/01/2026</a:t>
             </a:fld>
             <a:endParaRPr lang="en-GB"/>
           </a:p>
@@ -2523,7 +2562,7 @@
           <a:p>
             <a:fld id="{E85DF616-B21E-4EF6-A6A5-95E2FB3EB1A1}" type="datetimeFigureOut">
               <a:rPr lang="en-GB" smtClean="0"/>
-              <a:t>16/01/2026</a:t>
+              <a:t>27/01/2026</a:t>
             </a:fld>
             <a:endParaRPr lang="en-GB"/>
           </a:p>
@@ -2665,7 +2704,7 @@
           <a:p>
             <a:fld id="{E85DF616-B21E-4EF6-A6A5-95E2FB3EB1A1}" type="datetimeFigureOut">
               <a:rPr lang="en-GB" smtClean="0"/>
-              <a:t>16/01/2026</a:t>
+              <a:t>27/01/2026</a:t>
             </a:fld>
             <a:endParaRPr lang="en-GB"/>
           </a:p>
@@ -2778,7 +2817,7 @@
           <a:p>
             <a:fld id="{E85DF616-B21E-4EF6-A6A5-95E2FB3EB1A1}" type="datetimeFigureOut">
               <a:rPr lang="en-GB" smtClean="0"/>
-              <a:t>16/01/2026</a:t>
+              <a:t>27/01/2026</a:t>
             </a:fld>
             <a:endParaRPr lang="en-GB"/>
           </a:p>
@@ -3091,7 +3130,7 @@
           <a:p>
             <a:fld id="{E85DF616-B21E-4EF6-A6A5-95E2FB3EB1A1}" type="datetimeFigureOut">
               <a:rPr lang="en-GB" smtClean="0"/>
-              <a:t>16/01/2026</a:t>
+              <a:t>27/01/2026</a:t>
             </a:fld>
             <a:endParaRPr lang="en-GB"/>
           </a:p>
@@ -3380,7 +3419,7 @@
           <a:p>
             <a:fld id="{E85DF616-B21E-4EF6-A6A5-95E2FB3EB1A1}" type="datetimeFigureOut">
               <a:rPr lang="en-GB" smtClean="0"/>
-              <a:t>16/01/2026</a:t>
+              <a:t>27/01/2026</a:t>
             </a:fld>
             <a:endParaRPr lang="en-GB"/>
           </a:p>
@@ -3623,7 +3662,7 @@
           <a:p>
             <a:fld id="{E85DF616-B21E-4EF6-A6A5-95E2FB3EB1A1}" type="datetimeFigureOut">
               <a:rPr lang="en-GB" smtClean="0"/>
-              <a:t>16/01/2026</a:t>
+              <a:t>27/01/2026</a:t>
             </a:fld>
             <a:endParaRPr lang="en-GB"/>
           </a:p>
@@ -4288,315 +4327,6 @@
           <p:cNvPr id="2" name="Title 1">
             <a:extLst>
               <a:ext uri="{FF2B5EF4-FFF2-40B4-BE49-F238E27FC236}">
-                <a16:creationId xmlns:a16="http://schemas.microsoft.com/office/drawing/2014/main" id="{CA62C214-EC19-770C-7653-ED041921B2C8}"/>
-              </a:ext>
-            </a:extLst>
-          </p:cNvPr>
-          <p:cNvSpPr>
-            <a:spLocks noGrp="1"/>
-          </p:cNvSpPr>
-          <p:nvPr>
-            <p:ph type="title"/>
-          </p:nvPr>
-        </p:nvSpPr>
-        <p:spPr/>
-        <p:txBody>
-          <a:bodyPr/>
-          <a:lstStyle/>
-          <a:p>
-            <a:r>
-              <a:rPr lang="en-GB"/>
-              <a:t>Quick parenthesis</a:t>
-            </a:r>
-            <a:r>
-              <a:rPr lang="en-GB" dirty="0"/>
-              <a:t>: The hyperplane concept</a:t>
-            </a:r>
-            <a:endParaRPr lang="en-SG" dirty="0"/>
-          </a:p>
-        </p:txBody>
-      </p:sp>
-      <p:sp>
-        <p:nvSpPr>
-          <p:cNvPr id="4" name="Content Placeholder 3">
-            <a:extLst>
-              <a:ext uri="{FF2B5EF4-FFF2-40B4-BE49-F238E27FC236}">
-                <a16:creationId xmlns:a16="http://schemas.microsoft.com/office/drawing/2014/main" id="{657F3A6F-958B-7334-0196-4CE158CF83B0}"/>
-              </a:ext>
-            </a:extLst>
-          </p:cNvPr>
-          <p:cNvSpPr>
-            <a:spLocks noGrp="1"/>
-          </p:cNvSpPr>
-          <p:nvPr>
-            <p:ph sz="half" idx="1"/>
-          </p:nvPr>
-        </p:nvSpPr>
-        <p:spPr>
-          <a:xfrm>
-            <a:off x="838200" y="1825624"/>
-            <a:ext cx="5181600" cy="5032375"/>
-          </a:xfrm>
-        </p:spPr>
-        <p:txBody>
-          <a:bodyPr>
-            <a:normAutofit/>
-          </a:bodyPr>
-          <a:lstStyle/>
-          <a:p>
-            <a:pPr marL="0" indent="0">
-              <a:buNone/>
-            </a:pPr>
-            <a:r>
-              <a:rPr lang="en-GB" b="1" dirty="0"/>
-              <a:t>Definition (</a:t>
-            </a:r>
-            <a:r>
-              <a:rPr lang="en-GB" b="1" dirty="0">
-                <a:solidFill>
-                  <a:srgbClr val="00B050"/>
-                </a:solidFill>
-              </a:rPr>
-              <a:t>Hyperplanes</a:t>
-            </a:r>
-            <a:r>
-              <a:rPr lang="en-GB" b="1" dirty="0"/>
-              <a:t> in Linear Algebra):</a:t>
-            </a:r>
-          </a:p>
-          <a:p>
-            <a:pPr marL="0" indent="0">
-              <a:buNone/>
-            </a:pPr>
-            <a:r>
-              <a:rPr lang="en-GB" dirty="0"/>
-              <a:t>A </a:t>
-            </a:r>
-            <a:r>
-              <a:rPr lang="en-GB" b="1" dirty="0">
-                <a:solidFill>
-                  <a:srgbClr val="00B050"/>
-                </a:solidFill>
-              </a:rPr>
-              <a:t>hyperplane</a:t>
-            </a:r>
-            <a:r>
-              <a:rPr lang="en-GB" dirty="0"/>
-              <a:t> is a subspace of one dimension less than the ambient space.</a:t>
-            </a:r>
-          </a:p>
-          <a:p>
-            <a:pPr marL="0" indent="0">
-              <a:buNone/>
-            </a:pPr>
-            <a:endParaRPr lang="en-GB" dirty="0"/>
-          </a:p>
-          <a:p>
-            <a:pPr marL="0" indent="0">
-              <a:buNone/>
-            </a:pPr>
-            <a:r>
-              <a:rPr lang="en-GB" dirty="0"/>
-              <a:t>In the case of linear regression with one input feature and one output feature, the ambient space is of dimension 2 (that is 1+1). </a:t>
-            </a:r>
-          </a:p>
-          <a:p>
-            <a:pPr marL="0" indent="0">
-              <a:buNone/>
-            </a:pPr>
-            <a:endParaRPr lang="en-SG" b="1" dirty="0"/>
-          </a:p>
-        </p:txBody>
-      </p:sp>
-      <mc:AlternateContent xmlns:mc="http://schemas.openxmlformats.org/markup-compatibility/2006" xmlns:a14="http://schemas.microsoft.com/office/drawing/2010/main">
-        <mc:Choice Requires="a14">
-          <p:sp>
-            <p:nvSpPr>
-              <p:cNvPr id="5" name="Content Placeholder 4">
-                <a:extLst>
-                  <a:ext uri="{FF2B5EF4-FFF2-40B4-BE49-F238E27FC236}">
-                    <a16:creationId xmlns:a16="http://schemas.microsoft.com/office/drawing/2014/main" id="{6D84BCCB-A835-F94C-CAC7-2175BFC0AEB5}"/>
-                  </a:ext>
-                </a:extLst>
-              </p:cNvPr>
-              <p:cNvSpPr>
-                <a:spLocks noGrp="1"/>
-              </p:cNvSpPr>
-              <p:nvPr>
-                <p:ph sz="half" idx="2"/>
-              </p:nvPr>
-            </p:nvSpPr>
-            <p:spPr>
-              <a:xfrm>
-                <a:off x="6172199" y="1825625"/>
-                <a:ext cx="5665840" cy="5032374"/>
-              </a:xfrm>
-            </p:spPr>
-            <p:txBody>
-              <a:bodyPr>
-                <a:normAutofit/>
-              </a:bodyPr>
-              <a:lstStyle/>
-              <a:p>
-                <a:pPr marL="0" indent="0">
-                  <a:buNone/>
-                </a:pPr>
-                <a:r>
-                  <a:rPr lang="en-GB" dirty="0"/>
-                  <a:t>The Linear Regression model equation, is defined as</a:t>
-                </a:r>
-              </a:p>
-              <a:p>
-                <a:pPr marL="0" indent="0">
-                  <a:buNone/>
-                </a:pPr>
-                <a14:m>
-                  <m:oMathPara xmlns:m="http://schemas.openxmlformats.org/officeDocument/2006/math">
-                    <m:oMathParaPr>
-                      <m:jc m:val="centerGroup"/>
-                    </m:oMathParaPr>
-                    <m:oMath xmlns:m="http://schemas.openxmlformats.org/officeDocument/2006/math">
-                      <m:r>
-                        <a:rPr lang="en-GB" b="0" i="1" smtClean="0">
-                          <a:latin typeface="Cambria Math" panose="02040503050406030204" pitchFamily="18" charset="0"/>
-                        </a:rPr>
-                        <m:t>𝑦</m:t>
-                      </m:r>
-                      <m:r>
-                        <a:rPr lang="en-GB" b="0" i="1" smtClean="0">
-                          <a:latin typeface="Cambria Math" panose="02040503050406030204" pitchFamily="18" charset="0"/>
-                        </a:rPr>
-                        <m:t>= </m:t>
-                      </m:r>
-                      <m:r>
-                        <a:rPr lang="en-GB" b="0" i="1" smtClean="0">
-                          <a:latin typeface="Cambria Math" panose="02040503050406030204" pitchFamily="18" charset="0"/>
-                        </a:rPr>
-                        <m:t>𝑎𝑥</m:t>
-                      </m:r>
-                      <m:r>
-                        <a:rPr lang="en-GB" b="0" i="1" smtClean="0">
-                          <a:latin typeface="Cambria Math" panose="02040503050406030204" pitchFamily="18" charset="0"/>
-                        </a:rPr>
-                        <m:t>+</m:t>
-                      </m:r>
-                      <m:r>
-                        <a:rPr lang="en-GB" b="0" i="1" smtClean="0">
-                          <a:latin typeface="Cambria Math" panose="02040503050406030204" pitchFamily="18" charset="0"/>
-                        </a:rPr>
-                        <m:t>𝑏</m:t>
-                      </m:r>
-                    </m:oMath>
-                  </m:oMathPara>
-                </a14:m>
-                <a:endParaRPr lang="en-GB" dirty="0"/>
-              </a:p>
-              <a:p>
-                <a:pPr marL="0" indent="0">
-                  <a:buNone/>
-                </a:pPr>
-                <a:endParaRPr lang="en-GB" dirty="0"/>
-              </a:p>
-              <a:p>
-                <a:pPr marL="0" indent="0">
-                  <a:buNone/>
-                </a:pPr>
-                <a:r>
-                  <a:rPr lang="en-GB" dirty="0"/>
-                  <a:t>This is the equation of a line, which is a 1D subspace, and therefore a hyperplane of the 2D ambient space.</a:t>
-                </a:r>
-              </a:p>
-              <a:p>
-                <a:pPr marL="0" indent="0">
-                  <a:buNone/>
-                </a:pPr>
-                <a:r>
-                  <a:rPr lang="en-GB" dirty="0"/>
-                  <a:t>The same happens with the polynomial regression, but at a higher degree instead of just 2D/1D.</a:t>
-                </a:r>
-              </a:p>
-            </p:txBody>
-          </p:sp>
-        </mc:Choice>
-        <mc:Fallback xmlns="">
-          <p:sp>
-            <p:nvSpPr>
-              <p:cNvPr id="5" name="Content Placeholder 4">
-                <a:extLst>
-                  <a:ext uri="{FF2B5EF4-FFF2-40B4-BE49-F238E27FC236}">
-                    <a16:creationId xmlns:a16="http://schemas.microsoft.com/office/drawing/2014/main" id="{6D84BCCB-A835-F94C-CAC7-2175BFC0AEB5}"/>
-                  </a:ext>
-                </a:extLst>
-              </p:cNvPr>
-              <p:cNvSpPr>
-                <a:spLocks noGrp="1" noRot="1" noChangeAspect="1" noMove="1" noResize="1" noEditPoints="1" noAdjustHandles="1" noChangeArrowheads="1" noChangeShapeType="1" noTextEdit="1"/>
-              </p:cNvSpPr>
-              <p:nvPr>
-                <p:ph sz="half" idx="2"/>
-              </p:nvPr>
-            </p:nvSpPr>
-            <p:spPr>
-              <a:xfrm>
-                <a:off x="6172199" y="1825625"/>
-                <a:ext cx="5665840" cy="5032374"/>
-              </a:xfrm>
-              <a:blipFill>
-                <a:blip r:embed="rId2"/>
-                <a:stretch>
-                  <a:fillRect l="-2151" t="-1937" r="-3333"/>
-                </a:stretch>
-              </a:blipFill>
-            </p:spPr>
-            <p:txBody>
-              <a:bodyPr/>
-              <a:lstStyle/>
-              <a:p>
-                <a:r>
-                  <a:rPr lang="en-SG">
-                    <a:noFill/>
-                  </a:rPr>
-                  <a:t> </a:t>
-                </a:r>
-              </a:p>
-            </p:txBody>
-          </p:sp>
-        </mc:Fallback>
-      </mc:AlternateContent>
-    </p:spTree>
-    <p:extLst>
-      <p:ext uri="{BB962C8B-B14F-4D97-AF65-F5344CB8AC3E}">
-        <p14:creationId xmlns:p14="http://schemas.microsoft.com/office/powerpoint/2010/main" val="434677060"/>
-      </p:ext>
-    </p:extLst>
-  </p:cSld>
-  <p:clrMapOvr>
-    <a:masterClrMapping/>
-  </p:clrMapOvr>
-</p:sld>
-</file>
-
-<file path=ppt/slides/slide11.xml><?xml version="1.0" encoding="utf-8"?>
-<p:sld xmlns:a="http://schemas.openxmlformats.org/drawingml/2006/main" xmlns:r="http://schemas.openxmlformats.org/officeDocument/2006/relationships" xmlns:p="http://schemas.openxmlformats.org/presentationml/2006/main">
-  <p:cSld>
-    <p:spTree>
-      <p:nvGrpSpPr>
-        <p:cNvPr id="1" name=""/>
-        <p:cNvGrpSpPr/>
-        <p:nvPr/>
-      </p:nvGrpSpPr>
-      <p:grpSpPr>
-        <a:xfrm>
-          <a:off x="0" y="0"/>
-          <a:ext cx="0" cy="0"/>
-          <a:chOff x="0" y="0"/>
-          <a:chExt cx="0" cy="0"/>
-        </a:xfrm>
-      </p:grpSpPr>
-      <p:sp>
-        <p:nvSpPr>
-          <p:cNvPr id="2" name="Title 1">
-            <a:extLst>
-              <a:ext uri="{FF2B5EF4-FFF2-40B4-BE49-F238E27FC236}">
                 <a16:creationId xmlns:a16="http://schemas.microsoft.com/office/drawing/2014/main" id="{A51540BB-97C7-1060-F5DD-F4A4417D2522}"/>
               </a:ext>
             </a:extLst>
@@ -4949,7 +4679,7 @@
 </p:sld>
 </file>
 
-<file path=ppt/slides/slide12.xml><?xml version="1.0" encoding="utf-8"?>
+<file path=ppt/slides/slide11.xml><?xml version="1.0" encoding="utf-8"?>
 <p:sld xmlns:a="http://schemas.openxmlformats.org/drawingml/2006/main" xmlns:r="http://schemas.openxmlformats.org/officeDocument/2006/relationships" xmlns:p="http://schemas.openxmlformats.org/presentationml/2006/main">
   <p:cSld>
     <p:spTree>
@@ -5038,7 +4768,7 @@
 </p:sld>
 </file>
 
-<file path=ppt/slides/slide13.xml><?xml version="1.0" encoding="utf-8"?>
+<file path=ppt/slides/slide12.xml><?xml version="1.0" encoding="utf-8"?>
 <p:sld xmlns:a="http://schemas.openxmlformats.org/drawingml/2006/main" xmlns:r="http://schemas.openxmlformats.org/officeDocument/2006/relationships" xmlns:p="http://schemas.openxmlformats.org/presentationml/2006/main">
   <p:cSld>
     <p:spTree>
@@ -5120,7 +4850,7 @@
                   <a:schemeClr val="accent2"/>
                 </a:solidFill>
               </a:rPr>
-              <a:t>Data no longer shows linearity, which is expected. </a:t>
+              <a:t>Data no longer exhibits linearity, which is expected. </a:t>
             </a:r>
           </a:p>
           <a:p>
@@ -5154,7 +4884,7 @@
 </p:sld>
 </file>
 
-<file path=ppt/slides/slide14.xml><?xml version="1.0" encoding="utf-8"?>
+<file path=ppt/slides/slide13.xml><?xml version="1.0" encoding="utf-8"?>
 <p:sld xmlns:a="http://schemas.openxmlformats.org/drawingml/2006/main" xmlns:r="http://schemas.openxmlformats.org/officeDocument/2006/relationships" xmlns:p="http://schemas.openxmlformats.org/presentationml/2006/main">
   <p:cSld>
     <p:spTree>
@@ -5795,7 +5525,7 @@
 </p:sld>
 </file>
 
-<file path=ppt/slides/slide15.xml><?xml version="1.0" encoding="utf-8"?>
+<file path=ppt/slides/slide14.xml><?xml version="1.0" encoding="utf-8"?>
 <p:sld xmlns:a="http://schemas.openxmlformats.org/drawingml/2006/main" xmlns:r="http://schemas.openxmlformats.org/officeDocument/2006/relationships" xmlns:p="http://schemas.openxmlformats.org/presentationml/2006/main">
   <p:cSld>
     <p:spTree>
@@ -6003,7 +5733,7 @@
 </p:sld>
 </file>
 
-<file path=ppt/slides/slide16.xml><?xml version="1.0" encoding="utf-8"?>
+<file path=ppt/slides/slide15.xml><?xml version="1.0" encoding="utf-8"?>
 <p:sld xmlns:a="http://schemas.openxmlformats.org/drawingml/2006/main" xmlns:r="http://schemas.openxmlformats.org/officeDocument/2006/relationships" xmlns:p="http://schemas.openxmlformats.org/presentationml/2006/main">
   <p:cSld>
     <p:spTree>
@@ -6108,7 +5838,7 @@
 </p:sld>
 </file>
 
-<file path=ppt/slides/slide17.xml><?xml version="1.0" encoding="utf-8"?>
+<file path=ppt/slides/slide16.xml><?xml version="1.0" encoding="utf-8"?>
 <p:sld xmlns:a="http://schemas.openxmlformats.org/drawingml/2006/main" xmlns:r="http://schemas.openxmlformats.org/officeDocument/2006/relationships" xmlns:p="http://schemas.openxmlformats.org/presentationml/2006/main">
   <p:cSld>
     <p:spTree>
@@ -6224,7 +5954,7 @@
 </p:sld>
 </file>
 
-<file path=ppt/slides/slide18.xml><?xml version="1.0" encoding="utf-8"?>
+<file path=ppt/slides/slide17.xml><?xml version="1.0" encoding="utf-8"?>
 <p:sld xmlns:a="http://schemas.openxmlformats.org/drawingml/2006/main" xmlns:r="http://schemas.openxmlformats.org/officeDocument/2006/relationships" xmlns:p="http://schemas.openxmlformats.org/presentationml/2006/main">
   <p:cSld>
     <p:spTree>
@@ -6438,7 +6168,7 @@
 </p:sld>
 </file>
 
-<file path=ppt/slides/slide19.xml><?xml version="1.0" encoding="utf-8"?>
+<file path=ppt/slides/slide18.xml><?xml version="1.0" encoding="utf-8"?>
 <p:sld xmlns:a="http://schemas.openxmlformats.org/drawingml/2006/main" xmlns:r="http://schemas.openxmlformats.org/officeDocument/2006/relationships" xmlns:p="http://schemas.openxmlformats.org/presentationml/2006/main">
   <p:cSld>
     <p:spTree>
@@ -6509,7 +6239,9 @@
               </a:xfrm>
             </p:spPr>
             <p:txBody>
-              <a:bodyPr/>
+              <a:bodyPr>
+                <a:normAutofit lnSpcReduction="10000"/>
+              </a:bodyPr>
               <a:lstStyle/>
               <a:p>
                 <a:r>
@@ -6528,11 +6260,8 @@
                 </a14:m>
                 <a:r>
                   <a:rPr lang="en-GB" dirty="0"/>
-                  <a:t> that is too high compared to the relationship connecting inputs and outputs (it was 3).</a:t>
-                </a:r>
-              </a:p>
-              <a:p>
-                <a:endParaRPr lang="en-GB" dirty="0"/>
+                  <a:t> that is too high compared to the relationship connecting inputs and outputs (it was degree 3 but we use a polynomial regressor with degree 6, which is much higher).</a:t>
+                </a:r>
               </a:p>
               <a:p>
                 <a:r>
@@ -6577,7 +6306,7 @@
               <a:blipFill>
                 <a:blip r:embed="rId2"/>
                 <a:stretch>
-                  <a:fillRect l="-2261" t="-2241" r="-4020"/>
+                  <a:fillRect l="-2261" t="-3081" r="-4020"/>
                 </a:stretch>
               </a:blipFill>
             </p:spPr>
@@ -6586,7 +6315,7 @@
               <a:lstStyle/>
               <a:p>
                 <a:r>
-                  <a:rPr lang="en-SG">
+                  <a:rPr lang="en-GB">
                     <a:noFill/>
                   </a:rPr>
                   <a:t> </a:t>
@@ -6639,660 +6368,7 @@
 </p:sld>
 </file>
 
-<file path=ppt/slides/slide2.xml><?xml version="1.0" encoding="utf-8"?>
-<p:sld xmlns:a="http://schemas.openxmlformats.org/drawingml/2006/main" xmlns:r="http://schemas.openxmlformats.org/officeDocument/2006/relationships" xmlns:p="http://schemas.openxmlformats.org/presentationml/2006/main">
-  <p:cSld>
-    <p:spTree>
-      <p:nvGrpSpPr>
-        <p:cNvPr id="1" name=""/>
-        <p:cNvGrpSpPr/>
-        <p:nvPr/>
-      </p:nvGrpSpPr>
-      <p:grpSpPr>
-        <a:xfrm>
-          <a:off x="0" y="0"/>
-          <a:ext cx="0" cy="0"/>
-          <a:chOff x="0" y="0"/>
-          <a:chExt cx="0" cy="0"/>
-        </a:xfrm>
-      </p:grpSpPr>
-      <p:sp>
-        <p:nvSpPr>
-          <p:cNvPr id="2" name="Title 1">
-            <a:extLst>
-              <a:ext uri="{FF2B5EF4-FFF2-40B4-BE49-F238E27FC236}">
-                <a16:creationId xmlns:a16="http://schemas.microsoft.com/office/drawing/2014/main" id="{49D40417-A4D3-4CE8-96E7-708E2439AE7B}"/>
-              </a:ext>
-            </a:extLst>
-          </p:cNvPr>
-          <p:cNvSpPr>
-            <a:spLocks noGrp="1"/>
-          </p:cNvSpPr>
-          <p:nvPr>
-            <p:ph type="title"/>
-          </p:nvPr>
-        </p:nvSpPr>
-        <p:spPr/>
-        <p:txBody>
-          <a:bodyPr/>
-          <a:lstStyle/>
-          <a:p>
-            <a:r>
-              <a:rPr lang="en-US" dirty="0"/>
-              <a:t>About this week (Week 1)</a:t>
-            </a:r>
-            <a:endParaRPr lang="en-GB" dirty="0"/>
-          </a:p>
-        </p:txBody>
-      </p:sp>
-      <p:sp>
-        <p:nvSpPr>
-          <p:cNvPr id="3" name="Content Placeholder 2">
-            <a:extLst>
-              <a:ext uri="{FF2B5EF4-FFF2-40B4-BE49-F238E27FC236}">
-                <a16:creationId xmlns:a16="http://schemas.microsoft.com/office/drawing/2014/main" id="{35995840-A9D9-479A-A34F-EA7DC229D38E}"/>
-              </a:ext>
-            </a:extLst>
-          </p:cNvPr>
-          <p:cNvSpPr>
-            <a:spLocks noGrp="1"/>
-          </p:cNvSpPr>
-          <p:nvPr>
-            <p:ph idx="1"/>
-          </p:nvPr>
-        </p:nvSpPr>
-        <p:spPr>
-          <a:xfrm>
-            <a:off x="838200" y="1825625"/>
-            <a:ext cx="10515600" cy="4827102"/>
-          </a:xfrm>
-        </p:spPr>
-        <p:txBody>
-          <a:bodyPr/>
-          <a:lstStyle/>
-          <a:p>
-            <a:pPr marL="514350" indent="-514350">
-              <a:buFont typeface="+mj-lt"/>
-              <a:buAutoNum type="arabicPeriod"/>
-            </a:pPr>
-            <a:r>
-              <a:rPr lang="en-US" dirty="0">
-                <a:solidFill>
-                  <a:schemeClr val="bg1">
-                    <a:lumMod val="65000"/>
-                  </a:schemeClr>
-                </a:solidFill>
-              </a:rPr>
-              <a:t>What are the </a:t>
-            </a:r>
-            <a:r>
-              <a:rPr lang="en-US" b="1" dirty="0">
-                <a:solidFill>
-                  <a:schemeClr val="bg1">
-                    <a:lumMod val="65000"/>
-                  </a:schemeClr>
-                </a:solidFill>
-              </a:rPr>
-              <a:t>typical</a:t>
-            </a:r>
-            <a:r>
-              <a:rPr lang="en-US" dirty="0">
-                <a:solidFill>
-                  <a:schemeClr val="bg1">
-                    <a:lumMod val="65000"/>
-                  </a:schemeClr>
-                </a:solidFill>
-              </a:rPr>
-              <a:t> </a:t>
-            </a:r>
-            <a:r>
-              <a:rPr lang="en-US" b="1" dirty="0">
-                <a:solidFill>
-                  <a:schemeClr val="bg1">
-                    <a:lumMod val="65000"/>
-                  </a:schemeClr>
-                </a:solidFill>
-              </a:rPr>
-              <a:t>concepts</a:t>
-            </a:r>
-            <a:r>
-              <a:rPr lang="en-US" dirty="0">
-                <a:solidFill>
-                  <a:schemeClr val="bg1">
-                    <a:lumMod val="65000"/>
-                  </a:schemeClr>
-                </a:solidFill>
-              </a:rPr>
-              <a:t> </a:t>
-            </a:r>
-            <a:r>
-              <a:rPr lang="en-US" b="1" dirty="0">
-                <a:solidFill>
-                  <a:schemeClr val="bg1">
-                    <a:lumMod val="65000"/>
-                  </a:schemeClr>
-                </a:solidFill>
-              </a:rPr>
-              <a:t>of</a:t>
-            </a:r>
-            <a:r>
-              <a:rPr lang="en-US" dirty="0">
-                <a:solidFill>
-                  <a:schemeClr val="bg1">
-                    <a:lumMod val="65000"/>
-                  </a:schemeClr>
-                </a:solidFill>
-              </a:rPr>
-              <a:t> </a:t>
-            </a:r>
-            <a:r>
-              <a:rPr lang="en-US" b="1" dirty="0">
-                <a:solidFill>
-                  <a:schemeClr val="bg1">
-                    <a:lumMod val="65000"/>
-                  </a:schemeClr>
-                </a:solidFill>
-              </a:rPr>
-              <a:t>Machine</a:t>
-            </a:r>
-            <a:r>
-              <a:rPr lang="en-US" dirty="0">
-                <a:solidFill>
-                  <a:schemeClr val="bg1">
-                    <a:lumMod val="65000"/>
-                  </a:schemeClr>
-                </a:solidFill>
-              </a:rPr>
-              <a:t> </a:t>
-            </a:r>
-            <a:r>
-              <a:rPr lang="en-US" b="1" dirty="0">
-                <a:solidFill>
-                  <a:schemeClr val="bg1">
-                    <a:lumMod val="65000"/>
-                  </a:schemeClr>
-                </a:solidFill>
-              </a:rPr>
-              <a:t>Learning</a:t>
-            </a:r>
-            <a:r>
-              <a:rPr lang="en-US" dirty="0">
-                <a:solidFill>
-                  <a:schemeClr val="bg1">
-                    <a:lumMod val="65000"/>
-                  </a:schemeClr>
-                </a:solidFill>
-              </a:rPr>
-              <a:t> to be used as a starting point for this course?</a:t>
-            </a:r>
-          </a:p>
-          <a:p>
-            <a:pPr marL="514350" indent="-514350">
-              <a:buFont typeface="+mj-lt"/>
-              <a:buAutoNum type="arabicPeriod"/>
-            </a:pPr>
-            <a:r>
-              <a:rPr lang="en-GB" dirty="0">
-                <a:solidFill>
-                  <a:schemeClr val="bg1">
-                    <a:lumMod val="65000"/>
-                  </a:schemeClr>
-                </a:solidFill>
-              </a:rPr>
-              <a:t>What are the </a:t>
-            </a:r>
-            <a:r>
-              <a:rPr lang="en-GB" b="1" dirty="0">
-                <a:solidFill>
-                  <a:schemeClr val="bg1">
-                    <a:lumMod val="65000"/>
-                  </a:schemeClr>
-                </a:solidFill>
-              </a:rPr>
-              <a:t>different</a:t>
-            </a:r>
-            <a:r>
-              <a:rPr lang="en-GB" dirty="0">
-                <a:solidFill>
-                  <a:schemeClr val="bg1">
-                    <a:lumMod val="65000"/>
-                  </a:schemeClr>
-                </a:solidFill>
-              </a:rPr>
-              <a:t> </a:t>
-            </a:r>
-            <a:r>
-              <a:rPr lang="en-GB" b="1" dirty="0">
-                <a:solidFill>
-                  <a:schemeClr val="bg1">
-                    <a:lumMod val="65000"/>
-                  </a:schemeClr>
-                </a:solidFill>
-              </a:rPr>
-              <a:t>families</a:t>
-            </a:r>
-            <a:r>
-              <a:rPr lang="en-GB" dirty="0">
-                <a:solidFill>
-                  <a:schemeClr val="bg1">
-                    <a:lumMod val="65000"/>
-                  </a:schemeClr>
-                </a:solidFill>
-              </a:rPr>
-              <a:t> </a:t>
-            </a:r>
-            <a:r>
-              <a:rPr lang="en-GB" b="1" dirty="0">
-                <a:solidFill>
-                  <a:schemeClr val="bg1">
-                    <a:lumMod val="65000"/>
-                  </a:schemeClr>
-                </a:solidFill>
-              </a:rPr>
-              <a:t>of</a:t>
-            </a:r>
-            <a:r>
-              <a:rPr lang="en-GB" dirty="0">
-                <a:solidFill>
-                  <a:schemeClr val="bg1">
-                    <a:lumMod val="65000"/>
-                  </a:schemeClr>
-                </a:solidFill>
-              </a:rPr>
-              <a:t> </a:t>
-            </a:r>
-            <a:r>
-              <a:rPr lang="en-GB" b="1" dirty="0">
-                <a:solidFill>
-                  <a:schemeClr val="bg1">
-                    <a:lumMod val="65000"/>
-                  </a:schemeClr>
-                </a:solidFill>
-              </a:rPr>
-              <a:t>problems</a:t>
-            </a:r>
-            <a:r>
-              <a:rPr lang="en-GB" dirty="0">
-                <a:solidFill>
-                  <a:schemeClr val="bg1">
-                    <a:lumMod val="65000"/>
-                  </a:schemeClr>
-                </a:solidFill>
-              </a:rPr>
-              <a:t> in Deep Learning?</a:t>
-            </a:r>
-          </a:p>
-          <a:p>
-            <a:pPr marL="514350" indent="-514350">
-              <a:buFont typeface="+mj-lt"/>
-              <a:buAutoNum type="arabicPeriod"/>
-            </a:pPr>
-            <a:r>
-              <a:rPr lang="en-GB" dirty="0">
-                <a:solidFill>
-                  <a:schemeClr val="bg1">
-                    <a:lumMod val="65000"/>
-                  </a:schemeClr>
-                </a:solidFill>
-              </a:rPr>
-              <a:t>What is the </a:t>
-            </a:r>
-            <a:r>
-              <a:rPr lang="en-GB" b="1" dirty="0">
-                <a:solidFill>
-                  <a:schemeClr val="bg1">
-                    <a:lumMod val="65000"/>
-                  </a:schemeClr>
-                </a:solidFill>
-              </a:rPr>
-              <a:t>typical</a:t>
-            </a:r>
-            <a:r>
-              <a:rPr lang="en-GB" dirty="0">
-                <a:solidFill>
-                  <a:schemeClr val="bg1">
-                    <a:lumMod val="65000"/>
-                  </a:schemeClr>
-                </a:solidFill>
-              </a:rPr>
-              <a:t> </a:t>
-            </a:r>
-            <a:r>
-              <a:rPr lang="en-GB" b="1" dirty="0">
-                <a:solidFill>
-                  <a:schemeClr val="bg1">
-                    <a:lumMod val="65000"/>
-                  </a:schemeClr>
-                </a:solidFill>
-              </a:rPr>
-              <a:t>structure</a:t>
-            </a:r>
-            <a:r>
-              <a:rPr lang="en-GB" dirty="0">
-                <a:solidFill>
-                  <a:schemeClr val="bg1">
-                    <a:lumMod val="65000"/>
-                  </a:schemeClr>
-                </a:solidFill>
-              </a:rPr>
-              <a:t> </a:t>
-            </a:r>
-            <a:r>
-              <a:rPr lang="en-GB" b="1" dirty="0">
-                <a:solidFill>
-                  <a:schemeClr val="bg1">
-                    <a:lumMod val="65000"/>
-                  </a:schemeClr>
-                </a:solidFill>
-              </a:rPr>
-              <a:t>of a Deep Learning problem</a:t>
-            </a:r>
-            <a:r>
-              <a:rPr lang="en-GB" dirty="0">
-                <a:solidFill>
-                  <a:schemeClr val="bg1">
-                    <a:lumMod val="65000"/>
-                  </a:schemeClr>
-                </a:solidFill>
-              </a:rPr>
-              <a:t>?</a:t>
-            </a:r>
-          </a:p>
-          <a:p>
-            <a:pPr marL="514350" indent="-514350">
-              <a:buFont typeface="+mj-lt"/>
-              <a:buAutoNum type="arabicPeriod"/>
-            </a:pPr>
-            <a:r>
-              <a:rPr lang="en-GB" dirty="0">
-                <a:solidFill>
-                  <a:schemeClr val="bg1">
-                    <a:lumMod val="65000"/>
-                  </a:schemeClr>
-                </a:solidFill>
-              </a:rPr>
-              <a:t>What is </a:t>
-            </a:r>
-            <a:r>
-              <a:rPr lang="en-GB" b="1" dirty="0">
-                <a:solidFill>
-                  <a:schemeClr val="bg1">
-                    <a:lumMod val="65000"/>
-                  </a:schemeClr>
-                </a:solidFill>
-              </a:rPr>
-              <a:t>linear</a:t>
-            </a:r>
-            <a:r>
-              <a:rPr lang="en-GB" dirty="0">
-                <a:solidFill>
-                  <a:schemeClr val="bg1">
-                    <a:lumMod val="65000"/>
-                  </a:schemeClr>
-                </a:solidFill>
-              </a:rPr>
-              <a:t> </a:t>
-            </a:r>
-            <a:r>
-              <a:rPr lang="en-GB" b="1" dirty="0">
-                <a:solidFill>
-                  <a:schemeClr val="bg1">
-                    <a:lumMod val="65000"/>
-                  </a:schemeClr>
-                </a:solidFill>
-              </a:rPr>
-              <a:t>regression</a:t>
-            </a:r>
-            <a:r>
-              <a:rPr lang="en-GB" dirty="0">
-                <a:solidFill>
-                  <a:schemeClr val="bg1">
-                    <a:lumMod val="65000"/>
-                  </a:schemeClr>
-                </a:solidFill>
-              </a:rPr>
-              <a:t> and how to implement it?</a:t>
-            </a:r>
-          </a:p>
-          <a:p>
-            <a:pPr marL="514350" indent="-514350">
-              <a:buFont typeface="+mj-lt"/>
-              <a:buAutoNum type="arabicPeriod"/>
-            </a:pPr>
-            <a:r>
-              <a:rPr lang="en-GB" dirty="0">
-                <a:solidFill>
-                  <a:schemeClr val="bg1">
-                    <a:lumMod val="65000"/>
-                  </a:schemeClr>
-                </a:solidFill>
-              </a:rPr>
-              <a:t>What is the </a:t>
-            </a:r>
-            <a:r>
-              <a:rPr lang="en-GB" b="1" dirty="0">
-                <a:solidFill>
-                  <a:schemeClr val="bg1">
-                    <a:lumMod val="65000"/>
-                  </a:schemeClr>
-                </a:solidFill>
-              </a:rPr>
-              <a:t>gradient</a:t>
-            </a:r>
-            <a:r>
-              <a:rPr lang="en-GB" dirty="0">
-                <a:solidFill>
-                  <a:schemeClr val="bg1">
-                    <a:lumMod val="65000"/>
-                  </a:schemeClr>
-                </a:solidFill>
-              </a:rPr>
-              <a:t> </a:t>
-            </a:r>
-            <a:r>
-              <a:rPr lang="en-GB" b="1" dirty="0">
-                <a:solidFill>
-                  <a:schemeClr val="bg1">
-                    <a:lumMod val="65000"/>
-                  </a:schemeClr>
-                </a:solidFill>
-              </a:rPr>
-              <a:t>descent</a:t>
-            </a:r>
-            <a:r>
-              <a:rPr lang="en-GB" dirty="0">
-                <a:solidFill>
-                  <a:schemeClr val="bg1">
-                    <a:lumMod val="65000"/>
-                  </a:schemeClr>
-                </a:solidFill>
-              </a:rPr>
-              <a:t> </a:t>
-            </a:r>
-            <a:r>
-              <a:rPr lang="en-GB" b="1" dirty="0">
-                <a:solidFill>
-                  <a:schemeClr val="bg1">
-                    <a:lumMod val="65000"/>
-                  </a:schemeClr>
-                </a:solidFill>
-              </a:rPr>
-              <a:t>algorithm</a:t>
-            </a:r>
-            <a:r>
-              <a:rPr lang="en-GB" dirty="0">
-                <a:solidFill>
-                  <a:schemeClr val="bg1">
-                    <a:lumMod val="65000"/>
-                  </a:schemeClr>
-                </a:solidFill>
-              </a:rPr>
-              <a:t> and how is it used to </a:t>
-            </a:r>
-            <a:r>
-              <a:rPr lang="en-GB" b="1" dirty="0">
-                <a:solidFill>
-                  <a:schemeClr val="bg1">
-                    <a:lumMod val="65000"/>
-                  </a:schemeClr>
-                </a:solidFill>
-              </a:rPr>
-              <a:t>train</a:t>
-            </a:r>
-            <a:r>
-              <a:rPr lang="en-GB" dirty="0">
-                <a:solidFill>
-                  <a:schemeClr val="bg1">
-                    <a:lumMod val="65000"/>
-                  </a:schemeClr>
-                </a:solidFill>
-              </a:rPr>
-              <a:t> </a:t>
-            </a:r>
-            <a:r>
-              <a:rPr lang="en-GB" b="1" dirty="0">
-                <a:solidFill>
-                  <a:schemeClr val="bg1">
-                    <a:lumMod val="65000"/>
-                  </a:schemeClr>
-                </a:solidFill>
-              </a:rPr>
-              <a:t>Machine</a:t>
-            </a:r>
-            <a:r>
-              <a:rPr lang="en-GB" dirty="0">
-                <a:solidFill>
-                  <a:schemeClr val="bg1">
-                    <a:lumMod val="65000"/>
-                  </a:schemeClr>
-                </a:solidFill>
-              </a:rPr>
-              <a:t> </a:t>
-            </a:r>
-            <a:r>
-              <a:rPr lang="en-GB" b="1" dirty="0">
-                <a:solidFill>
-                  <a:schemeClr val="bg1">
-                    <a:lumMod val="65000"/>
-                  </a:schemeClr>
-                </a:solidFill>
-              </a:rPr>
-              <a:t>Learning</a:t>
-            </a:r>
-            <a:r>
-              <a:rPr lang="en-GB" dirty="0">
-                <a:solidFill>
-                  <a:schemeClr val="bg1">
-                    <a:lumMod val="65000"/>
-                  </a:schemeClr>
-                </a:solidFill>
-              </a:rPr>
-              <a:t> </a:t>
-            </a:r>
-            <a:r>
-              <a:rPr lang="en-GB" b="1" dirty="0">
-                <a:solidFill>
-                  <a:schemeClr val="bg1">
-                    <a:lumMod val="65000"/>
-                  </a:schemeClr>
-                </a:solidFill>
-              </a:rPr>
-              <a:t>models</a:t>
-            </a:r>
-            <a:r>
-              <a:rPr lang="en-GB" dirty="0">
-                <a:solidFill>
-                  <a:schemeClr val="bg1">
-                    <a:lumMod val="65000"/>
-                  </a:schemeClr>
-                </a:solidFill>
-              </a:rPr>
-              <a:t>?</a:t>
-            </a:r>
-          </a:p>
-          <a:p>
-            <a:pPr marL="514350" indent="-514350">
-              <a:buFont typeface="+mj-lt"/>
-              <a:buAutoNum type="arabicPeriod"/>
-            </a:pPr>
-            <a:r>
-              <a:rPr lang="en-GB" dirty="0"/>
-              <a:t>What is </a:t>
-            </a:r>
-            <a:r>
-              <a:rPr lang="en-GB" b="1" dirty="0"/>
-              <a:t>polynomial</a:t>
-            </a:r>
-            <a:r>
-              <a:rPr lang="en-GB" dirty="0"/>
-              <a:t> </a:t>
-            </a:r>
-            <a:r>
-              <a:rPr lang="en-GB" b="1" dirty="0"/>
-              <a:t>regression</a:t>
-            </a:r>
-            <a:r>
-              <a:rPr lang="en-GB" dirty="0"/>
-              <a:t> and how to implement it?</a:t>
-            </a:r>
-          </a:p>
-          <a:p>
-            <a:pPr marL="514350" indent="-514350">
-              <a:buFont typeface="+mj-lt"/>
-              <a:buAutoNum type="arabicPeriod"/>
-            </a:pPr>
-            <a:r>
-              <a:rPr lang="en-GB" dirty="0"/>
-              <a:t>What is </a:t>
-            </a:r>
-            <a:r>
-              <a:rPr lang="en-GB" b="1" dirty="0"/>
-              <a:t>regularization</a:t>
-            </a:r>
-            <a:r>
-              <a:rPr lang="en-GB" dirty="0"/>
-              <a:t> and how to implement it in </a:t>
-            </a:r>
-            <a:r>
-              <a:rPr lang="en-GB" b="1" dirty="0"/>
-              <a:t>Ridge</a:t>
-            </a:r>
-            <a:r>
-              <a:rPr lang="en-GB" dirty="0"/>
-              <a:t> </a:t>
-            </a:r>
-            <a:r>
-              <a:rPr lang="en-GB" b="1" dirty="0"/>
-              <a:t>regression</a:t>
-            </a:r>
-            <a:r>
-              <a:rPr lang="en-GB" dirty="0"/>
-              <a:t>?</a:t>
-            </a:r>
-          </a:p>
-          <a:p>
-            <a:pPr marL="514350" indent="-514350">
-              <a:buFont typeface="+mj-lt"/>
-              <a:buAutoNum type="arabicPeriod"/>
-            </a:pPr>
-            <a:endParaRPr lang="en-GB" dirty="0"/>
-          </a:p>
-        </p:txBody>
-      </p:sp>
-    </p:spTree>
-    <p:extLst>
-      <p:ext uri="{BB962C8B-B14F-4D97-AF65-F5344CB8AC3E}">
-        <p14:creationId xmlns:p14="http://schemas.microsoft.com/office/powerpoint/2010/main" val="3442501962"/>
-      </p:ext>
-    </p:extLst>
-  </p:cSld>
-  <p:clrMapOvr>
-    <a:masterClrMapping/>
-  </p:clrMapOvr>
-</p:sld>
-</file>
-
-<file path=ppt/slides/slide20.xml><?xml version="1.0" encoding="utf-8"?>
+<file path=ppt/slides/slide19.xml><?xml version="1.0" encoding="utf-8"?>
 <p:sld xmlns:a="http://schemas.openxmlformats.org/drawingml/2006/main" xmlns:r="http://schemas.openxmlformats.org/officeDocument/2006/relationships" xmlns:p="http://schemas.openxmlformats.org/presentationml/2006/main">
   <p:cSld>
     <p:spTree>
@@ -7453,7 +6529,660 @@
 </p:sld>
 </file>
 
-<file path=ppt/slides/slide21.xml><?xml version="1.0" encoding="utf-8"?>
+<file path=ppt/slides/slide2.xml><?xml version="1.0" encoding="utf-8"?>
+<p:sld xmlns:a="http://schemas.openxmlformats.org/drawingml/2006/main" xmlns:r="http://schemas.openxmlformats.org/officeDocument/2006/relationships" xmlns:p="http://schemas.openxmlformats.org/presentationml/2006/main">
+  <p:cSld>
+    <p:spTree>
+      <p:nvGrpSpPr>
+        <p:cNvPr id="1" name=""/>
+        <p:cNvGrpSpPr/>
+        <p:nvPr/>
+      </p:nvGrpSpPr>
+      <p:grpSpPr>
+        <a:xfrm>
+          <a:off x="0" y="0"/>
+          <a:ext cx="0" cy="0"/>
+          <a:chOff x="0" y="0"/>
+          <a:chExt cx="0" cy="0"/>
+        </a:xfrm>
+      </p:grpSpPr>
+      <p:sp>
+        <p:nvSpPr>
+          <p:cNvPr id="2" name="Title 1">
+            <a:extLst>
+              <a:ext uri="{FF2B5EF4-FFF2-40B4-BE49-F238E27FC236}">
+                <a16:creationId xmlns:a16="http://schemas.microsoft.com/office/drawing/2014/main" id="{49D40417-A4D3-4CE8-96E7-708E2439AE7B}"/>
+              </a:ext>
+            </a:extLst>
+          </p:cNvPr>
+          <p:cNvSpPr>
+            <a:spLocks noGrp="1"/>
+          </p:cNvSpPr>
+          <p:nvPr>
+            <p:ph type="title"/>
+          </p:nvPr>
+        </p:nvSpPr>
+        <p:spPr/>
+        <p:txBody>
+          <a:bodyPr/>
+          <a:lstStyle/>
+          <a:p>
+            <a:r>
+              <a:rPr lang="en-US" dirty="0"/>
+              <a:t>About this week (Week 1)</a:t>
+            </a:r>
+            <a:endParaRPr lang="en-GB" dirty="0"/>
+          </a:p>
+        </p:txBody>
+      </p:sp>
+      <p:sp>
+        <p:nvSpPr>
+          <p:cNvPr id="3" name="Content Placeholder 2">
+            <a:extLst>
+              <a:ext uri="{FF2B5EF4-FFF2-40B4-BE49-F238E27FC236}">
+                <a16:creationId xmlns:a16="http://schemas.microsoft.com/office/drawing/2014/main" id="{35995840-A9D9-479A-A34F-EA7DC229D38E}"/>
+              </a:ext>
+            </a:extLst>
+          </p:cNvPr>
+          <p:cNvSpPr>
+            <a:spLocks noGrp="1"/>
+          </p:cNvSpPr>
+          <p:nvPr>
+            <p:ph idx="1"/>
+          </p:nvPr>
+        </p:nvSpPr>
+        <p:spPr>
+          <a:xfrm>
+            <a:off x="838200" y="1825625"/>
+            <a:ext cx="10515600" cy="4827102"/>
+          </a:xfrm>
+        </p:spPr>
+        <p:txBody>
+          <a:bodyPr/>
+          <a:lstStyle/>
+          <a:p>
+            <a:pPr marL="514350" indent="-514350">
+              <a:buFont typeface="+mj-lt"/>
+              <a:buAutoNum type="arabicPeriod"/>
+            </a:pPr>
+            <a:r>
+              <a:rPr lang="en-US" dirty="0">
+                <a:solidFill>
+                  <a:schemeClr val="bg1">
+                    <a:lumMod val="65000"/>
+                  </a:schemeClr>
+                </a:solidFill>
+              </a:rPr>
+              <a:t>What are the </a:t>
+            </a:r>
+            <a:r>
+              <a:rPr lang="en-US" b="1" dirty="0">
+                <a:solidFill>
+                  <a:schemeClr val="bg1">
+                    <a:lumMod val="65000"/>
+                  </a:schemeClr>
+                </a:solidFill>
+              </a:rPr>
+              <a:t>typical</a:t>
+            </a:r>
+            <a:r>
+              <a:rPr lang="en-US" dirty="0">
+                <a:solidFill>
+                  <a:schemeClr val="bg1">
+                    <a:lumMod val="65000"/>
+                  </a:schemeClr>
+                </a:solidFill>
+              </a:rPr>
+              <a:t> </a:t>
+            </a:r>
+            <a:r>
+              <a:rPr lang="en-US" b="1" dirty="0">
+                <a:solidFill>
+                  <a:schemeClr val="bg1">
+                    <a:lumMod val="65000"/>
+                  </a:schemeClr>
+                </a:solidFill>
+              </a:rPr>
+              <a:t>concepts</a:t>
+            </a:r>
+            <a:r>
+              <a:rPr lang="en-US" dirty="0">
+                <a:solidFill>
+                  <a:schemeClr val="bg1">
+                    <a:lumMod val="65000"/>
+                  </a:schemeClr>
+                </a:solidFill>
+              </a:rPr>
+              <a:t> </a:t>
+            </a:r>
+            <a:r>
+              <a:rPr lang="en-US" b="1" dirty="0">
+                <a:solidFill>
+                  <a:schemeClr val="bg1">
+                    <a:lumMod val="65000"/>
+                  </a:schemeClr>
+                </a:solidFill>
+              </a:rPr>
+              <a:t>of</a:t>
+            </a:r>
+            <a:r>
+              <a:rPr lang="en-US" dirty="0">
+                <a:solidFill>
+                  <a:schemeClr val="bg1">
+                    <a:lumMod val="65000"/>
+                  </a:schemeClr>
+                </a:solidFill>
+              </a:rPr>
+              <a:t> </a:t>
+            </a:r>
+            <a:r>
+              <a:rPr lang="en-US" b="1" dirty="0">
+                <a:solidFill>
+                  <a:schemeClr val="bg1">
+                    <a:lumMod val="65000"/>
+                  </a:schemeClr>
+                </a:solidFill>
+              </a:rPr>
+              <a:t>Machine</a:t>
+            </a:r>
+            <a:r>
+              <a:rPr lang="en-US" dirty="0">
+                <a:solidFill>
+                  <a:schemeClr val="bg1">
+                    <a:lumMod val="65000"/>
+                  </a:schemeClr>
+                </a:solidFill>
+              </a:rPr>
+              <a:t> </a:t>
+            </a:r>
+            <a:r>
+              <a:rPr lang="en-US" b="1" dirty="0">
+                <a:solidFill>
+                  <a:schemeClr val="bg1">
+                    <a:lumMod val="65000"/>
+                  </a:schemeClr>
+                </a:solidFill>
+              </a:rPr>
+              <a:t>Learning</a:t>
+            </a:r>
+            <a:r>
+              <a:rPr lang="en-US" dirty="0">
+                <a:solidFill>
+                  <a:schemeClr val="bg1">
+                    <a:lumMod val="65000"/>
+                  </a:schemeClr>
+                </a:solidFill>
+              </a:rPr>
+              <a:t> to be used as a starting point for this course?</a:t>
+            </a:r>
+          </a:p>
+          <a:p>
+            <a:pPr marL="514350" indent="-514350">
+              <a:buFont typeface="+mj-lt"/>
+              <a:buAutoNum type="arabicPeriod"/>
+            </a:pPr>
+            <a:r>
+              <a:rPr lang="en-GB" dirty="0">
+                <a:solidFill>
+                  <a:schemeClr val="bg1">
+                    <a:lumMod val="65000"/>
+                  </a:schemeClr>
+                </a:solidFill>
+              </a:rPr>
+              <a:t>What are the </a:t>
+            </a:r>
+            <a:r>
+              <a:rPr lang="en-GB" b="1" dirty="0">
+                <a:solidFill>
+                  <a:schemeClr val="bg1">
+                    <a:lumMod val="65000"/>
+                  </a:schemeClr>
+                </a:solidFill>
+              </a:rPr>
+              <a:t>different</a:t>
+            </a:r>
+            <a:r>
+              <a:rPr lang="en-GB" dirty="0">
+                <a:solidFill>
+                  <a:schemeClr val="bg1">
+                    <a:lumMod val="65000"/>
+                  </a:schemeClr>
+                </a:solidFill>
+              </a:rPr>
+              <a:t> </a:t>
+            </a:r>
+            <a:r>
+              <a:rPr lang="en-GB" b="1" dirty="0">
+                <a:solidFill>
+                  <a:schemeClr val="bg1">
+                    <a:lumMod val="65000"/>
+                  </a:schemeClr>
+                </a:solidFill>
+              </a:rPr>
+              <a:t>families</a:t>
+            </a:r>
+            <a:r>
+              <a:rPr lang="en-GB" dirty="0">
+                <a:solidFill>
+                  <a:schemeClr val="bg1">
+                    <a:lumMod val="65000"/>
+                  </a:schemeClr>
+                </a:solidFill>
+              </a:rPr>
+              <a:t> </a:t>
+            </a:r>
+            <a:r>
+              <a:rPr lang="en-GB" b="1" dirty="0">
+                <a:solidFill>
+                  <a:schemeClr val="bg1">
+                    <a:lumMod val="65000"/>
+                  </a:schemeClr>
+                </a:solidFill>
+              </a:rPr>
+              <a:t>of</a:t>
+            </a:r>
+            <a:r>
+              <a:rPr lang="en-GB" dirty="0">
+                <a:solidFill>
+                  <a:schemeClr val="bg1">
+                    <a:lumMod val="65000"/>
+                  </a:schemeClr>
+                </a:solidFill>
+              </a:rPr>
+              <a:t> </a:t>
+            </a:r>
+            <a:r>
+              <a:rPr lang="en-GB" b="1" dirty="0">
+                <a:solidFill>
+                  <a:schemeClr val="bg1">
+                    <a:lumMod val="65000"/>
+                  </a:schemeClr>
+                </a:solidFill>
+              </a:rPr>
+              <a:t>problems</a:t>
+            </a:r>
+            <a:r>
+              <a:rPr lang="en-GB" dirty="0">
+                <a:solidFill>
+                  <a:schemeClr val="bg1">
+                    <a:lumMod val="65000"/>
+                  </a:schemeClr>
+                </a:solidFill>
+              </a:rPr>
+              <a:t> in Deep Learning?</a:t>
+            </a:r>
+          </a:p>
+          <a:p>
+            <a:pPr marL="514350" indent="-514350">
+              <a:buFont typeface="+mj-lt"/>
+              <a:buAutoNum type="arabicPeriod"/>
+            </a:pPr>
+            <a:r>
+              <a:rPr lang="en-GB" dirty="0">
+                <a:solidFill>
+                  <a:schemeClr val="bg1">
+                    <a:lumMod val="65000"/>
+                  </a:schemeClr>
+                </a:solidFill>
+              </a:rPr>
+              <a:t>What is the </a:t>
+            </a:r>
+            <a:r>
+              <a:rPr lang="en-GB" b="1" dirty="0">
+                <a:solidFill>
+                  <a:schemeClr val="bg1">
+                    <a:lumMod val="65000"/>
+                  </a:schemeClr>
+                </a:solidFill>
+              </a:rPr>
+              <a:t>typical</a:t>
+            </a:r>
+            <a:r>
+              <a:rPr lang="en-GB" dirty="0">
+                <a:solidFill>
+                  <a:schemeClr val="bg1">
+                    <a:lumMod val="65000"/>
+                  </a:schemeClr>
+                </a:solidFill>
+              </a:rPr>
+              <a:t> </a:t>
+            </a:r>
+            <a:r>
+              <a:rPr lang="en-GB" b="1" dirty="0">
+                <a:solidFill>
+                  <a:schemeClr val="bg1">
+                    <a:lumMod val="65000"/>
+                  </a:schemeClr>
+                </a:solidFill>
+              </a:rPr>
+              <a:t>structure</a:t>
+            </a:r>
+            <a:r>
+              <a:rPr lang="en-GB" dirty="0">
+                <a:solidFill>
+                  <a:schemeClr val="bg1">
+                    <a:lumMod val="65000"/>
+                  </a:schemeClr>
+                </a:solidFill>
+              </a:rPr>
+              <a:t> </a:t>
+            </a:r>
+            <a:r>
+              <a:rPr lang="en-GB" b="1" dirty="0">
+                <a:solidFill>
+                  <a:schemeClr val="bg1">
+                    <a:lumMod val="65000"/>
+                  </a:schemeClr>
+                </a:solidFill>
+              </a:rPr>
+              <a:t>of a Deep Learning problem</a:t>
+            </a:r>
+            <a:r>
+              <a:rPr lang="en-GB" dirty="0">
+                <a:solidFill>
+                  <a:schemeClr val="bg1">
+                    <a:lumMod val="65000"/>
+                  </a:schemeClr>
+                </a:solidFill>
+              </a:rPr>
+              <a:t>?</a:t>
+            </a:r>
+          </a:p>
+          <a:p>
+            <a:pPr marL="514350" indent="-514350">
+              <a:buFont typeface="+mj-lt"/>
+              <a:buAutoNum type="arabicPeriod"/>
+            </a:pPr>
+            <a:r>
+              <a:rPr lang="en-GB" dirty="0">
+                <a:solidFill>
+                  <a:schemeClr val="bg1">
+                    <a:lumMod val="65000"/>
+                  </a:schemeClr>
+                </a:solidFill>
+              </a:rPr>
+              <a:t>What is </a:t>
+            </a:r>
+            <a:r>
+              <a:rPr lang="en-GB" b="1" dirty="0">
+                <a:solidFill>
+                  <a:schemeClr val="bg1">
+                    <a:lumMod val="65000"/>
+                  </a:schemeClr>
+                </a:solidFill>
+              </a:rPr>
+              <a:t>linear</a:t>
+            </a:r>
+            <a:r>
+              <a:rPr lang="en-GB" dirty="0">
+                <a:solidFill>
+                  <a:schemeClr val="bg1">
+                    <a:lumMod val="65000"/>
+                  </a:schemeClr>
+                </a:solidFill>
+              </a:rPr>
+              <a:t> </a:t>
+            </a:r>
+            <a:r>
+              <a:rPr lang="en-GB" b="1" dirty="0">
+                <a:solidFill>
+                  <a:schemeClr val="bg1">
+                    <a:lumMod val="65000"/>
+                  </a:schemeClr>
+                </a:solidFill>
+              </a:rPr>
+              <a:t>regression</a:t>
+            </a:r>
+            <a:r>
+              <a:rPr lang="en-GB" dirty="0">
+                <a:solidFill>
+                  <a:schemeClr val="bg1">
+                    <a:lumMod val="65000"/>
+                  </a:schemeClr>
+                </a:solidFill>
+              </a:rPr>
+              <a:t> and how to implement it?</a:t>
+            </a:r>
+          </a:p>
+          <a:p>
+            <a:pPr marL="514350" indent="-514350">
+              <a:buFont typeface="+mj-lt"/>
+              <a:buAutoNum type="arabicPeriod"/>
+            </a:pPr>
+            <a:r>
+              <a:rPr lang="en-GB" dirty="0">
+                <a:solidFill>
+                  <a:schemeClr val="bg1">
+                    <a:lumMod val="65000"/>
+                  </a:schemeClr>
+                </a:solidFill>
+              </a:rPr>
+              <a:t>What is the </a:t>
+            </a:r>
+            <a:r>
+              <a:rPr lang="en-GB" b="1" dirty="0">
+                <a:solidFill>
+                  <a:schemeClr val="bg1">
+                    <a:lumMod val="65000"/>
+                  </a:schemeClr>
+                </a:solidFill>
+              </a:rPr>
+              <a:t>gradient</a:t>
+            </a:r>
+            <a:r>
+              <a:rPr lang="en-GB" dirty="0">
+                <a:solidFill>
+                  <a:schemeClr val="bg1">
+                    <a:lumMod val="65000"/>
+                  </a:schemeClr>
+                </a:solidFill>
+              </a:rPr>
+              <a:t> </a:t>
+            </a:r>
+            <a:r>
+              <a:rPr lang="en-GB" b="1" dirty="0">
+                <a:solidFill>
+                  <a:schemeClr val="bg1">
+                    <a:lumMod val="65000"/>
+                  </a:schemeClr>
+                </a:solidFill>
+              </a:rPr>
+              <a:t>descent</a:t>
+            </a:r>
+            <a:r>
+              <a:rPr lang="en-GB" dirty="0">
+                <a:solidFill>
+                  <a:schemeClr val="bg1">
+                    <a:lumMod val="65000"/>
+                  </a:schemeClr>
+                </a:solidFill>
+              </a:rPr>
+              <a:t> </a:t>
+            </a:r>
+            <a:r>
+              <a:rPr lang="en-GB" b="1" dirty="0">
+                <a:solidFill>
+                  <a:schemeClr val="bg1">
+                    <a:lumMod val="65000"/>
+                  </a:schemeClr>
+                </a:solidFill>
+              </a:rPr>
+              <a:t>algorithm</a:t>
+            </a:r>
+            <a:r>
+              <a:rPr lang="en-GB" dirty="0">
+                <a:solidFill>
+                  <a:schemeClr val="bg1">
+                    <a:lumMod val="65000"/>
+                  </a:schemeClr>
+                </a:solidFill>
+              </a:rPr>
+              <a:t> and how is it used to </a:t>
+            </a:r>
+            <a:r>
+              <a:rPr lang="en-GB" b="1" dirty="0">
+                <a:solidFill>
+                  <a:schemeClr val="bg1">
+                    <a:lumMod val="65000"/>
+                  </a:schemeClr>
+                </a:solidFill>
+              </a:rPr>
+              <a:t>train</a:t>
+            </a:r>
+            <a:r>
+              <a:rPr lang="en-GB" dirty="0">
+                <a:solidFill>
+                  <a:schemeClr val="bg1">
+                    <a:lumMod val="65000"/>
+                  </a:schemeClr>
+                </a:solidFill>
+              </a:rPr>
+              <a:t> </a:t>
+            </a:r>
+            <a:r>
+              <a:rPr lang="en-GB" b="1" dirty="0">
+                <a:solidFill>
+                  <a:schemeClr val="bg1">
+                    <a:lumMod val="65000"/>
+                  </a:schemeClr>
+                </a:solidFill>
+              </a:rPr>
+              <a:t>Machine</a:t>
+            </a:r>
+            <a:r>
+              <a:rPr lang="en-GB" dirty="0">
+                <a:solidFill>
+                  <a:schemeClr val="bg1">
+                    <a:lumMod val="65000"/>
+                  </a:schemeClr>
+                </a:solidFill>
+              </a:rPr>
+              <a:t> </a:t>
+            </a:r>
+            <a:r>
+              <a:rPr lang="en-GB" b="1" dirty="0">
+                <a:solidFill>
+                  <a:schemeClr val="bg1">
+                    <a:lumMod val="65000"/>
+                  </a:schemeClr>
+                </a:solidFill>
+              </a:rPr>
+              <a:t>Learning</a:t>
+            </a:r>
+            <a:r>
+              <a:rPr lang="en-GB" dirty="0">
+                <a:solidFill>
+                  <a:schemeClr val="bg1">
+                    <a:lumMod val="65000"/>
+                  </a:schemeClr>
+                </a:solidFill>
+              </a:rPr>
+              <a:t> </a:t>
+            </a:r>
+            <a:r>
+              <a:rPr lang="en-GB" b="1" dirty="0">
+                <a:solidFill>
+                  <a:schemeClr val="bg1">
+                    <a:lumMod val="65000"/>
+                  </a:schemeClr>
+                </a:solidFill>
+              </a:rPr>
+              <a:t>models</a:t>
+            </a:r>
+            <a:r>
+              <a:rPr lang="en-GB" dirty="0">
+                <a:solidFill>
+                  <a:schemeClr val="bg1">
+                    <a:lumMod val="65000"/>
+                  </a:schemeClr>
+                </a:solidFill>
+              </a:rPr>
+              <a:t>?</a:t>
+            </a:r>
+          </a:p>
+          <a:p>
+            <a:pPr marL="514350" indent="-514350">
+              <a:buFont typeface="+mj-lt"/>
+              <a:buAutoNum type="arabicPeriod"/>
+            </a:pPr>
+            <a:r>
+              <a:rPr lang="en-GB" dirty="0"/>
+              <a:t>What is </a:t>
+            </a:r>
+            <a:r>
+              <a:rPr lang="en-GB" b="1" dirty="0"/>
+              <a:t>polynomial</a:t>
+            </a:r>
+            <a:r>
+              <a:rPr lang="en-GB" dirty="0"/>
+              <a:t> </a:t>
+            </a:r>
+            <a:r>
+              <a:rPr lang="en-GB" b="1" dirty="0"/>
+              <a:t>regression</a:t>
+            </a:r>
+            <a:r>
+              <a:rPr lang="en-GB" dirty="0"/>
+              <a:t> and how to implement it?</a:t>
+            </a:r>
+          </a:p>
+          <a:p>
+            <a:pPr marL="514350" indent="-514350">
+              <a:buFont typeface="+mj-lt"/>
+              <a:buAutoNum type="arabicPeriod"/>
+            </a:pPr>
+            <a:r>
+              <a:rPr lang="en-GB" dirty="0"/>
+              <a:t>What is </a:t>
+            </a:r>
+            <a:r>
+              <a:rPr lang="en-GB" b="1" dirty="0"/>
+              <a:t>regularization</a:t>
+            </a:r>
+            <a:r>
+              <a:rPr lang="en-GB" dirty="0"/>
+              <a:t> and how to implement it in </a:t>
+            </a:r>
+            <a:r>
+              <a:rPr lang="en-GB" b="1" dirty="0"/>
+              <a:t>Ridge</a:t>
+            </a:r>
+            <a:r>
+              <a:rPr lang="en-GB" dirty="0"/>
+              <a:t> </a:t>
+            </a:r>
+            <a:r>
+              <a:rPr lang="en-GB" b="1" dirty="0"/>
+              <a:t>regression</a:t>
+            </a:r>
+            <a:r>
+              <a:rPr lang="en-GB" dirty="0"/>
+              <a:t>?</a:t>
+            </a:r>
+          </a:p>
+          <a:p>
+            <a:pPr marL="514350" indent="-514350">
+              <a:buFont typeface="+mj-lt"/>
+              <a:buAutoNum type="arabicPeriod"/>
+            </a:pPr>
+            <a:endParaRPr lang="en-GB" dirty="0"/>
+          </a:p>
+        </p:txBody>
+      </p:sp>
+    </p:spTree>
+    <p:extLst>
+      <p:ext uri="{BB962C8B-B14F-4D97-AF65-F5344CB8AC3E}">
+        <p14:creationId xmlns:p14="http://schemas.microsoft.com/office/powerpoint/2010/main" val="3442501962"/>
+      </p:ext>
+    </p:extLst>
+  </p:cSld>
+  <p:clrMapOvr>
+    <a:masterClrMapping/>
+  </p:clrMapOvr>
+</p:sld>
+</file>
+
+<file path=ppt/slides/slide20.xml><?xml version="1.0" encoding="utf-8"?>
 <p:sld xmlns:a="http://schemas.openxmlformats.org/drawingml/2006/main" xmlns:r="http://schemas.openxmlformats.org/officeDocument/2006/relationships" xmlns:p="http://schemas.openxmlformats.org/presentationml/2006/main">
   <p:cSld>
     <p:spTree>
@@ -7621,6 +7350,218 @@
 </p:sld>
 </file>
 
+<file path=ppt/slides/slide21.xml><?xml version="1.0" encoding="utf-8"?>
+<p:sld xmlns:a="http://schemas.openxmlformats.org/drawingml/2006/main" xmlns:r="http://schemas.openxmlformats.org/officeDocument/2006/relationships" xmlns:p="http://schemas.openxmlformats.org/presentationml/2006/main">
+  <p:cSld>
+    <p:spTree>
+      <p:nvGrpSpPr>
+        <p:cNvPr id="1" name=""/>
+        <p:cNvGrpSpPr/>
+        <p:nvPr/>
+      </p:nvGrpSpPr>
+      <p:grpSpPr>
+        <a:xfrm>
+          <a:off x="0" y="0"/>
+          <a:ext cx="0" cy="0"/>
+          <a:chOff x="0" y="0"/>
+          <a:chExt cx="0" cy="0"/>
+        </a:xfrm>
+      </p:grpSpPr>
+      <p:sp>
+        <p:nvSpPr>
+          <p:cNvPr id="5" name="Title 4">
+            <a:extLst>
+              <a:ext uri="{FF2B5EF4-FFF2-40B4-BE49-F238E27FC236}">
+                <a16:creationId xmlns:a16="http://schemas.microsoft.com/office/drawing/2014/main" id="{BC884000-0FC9-A696-A696-8635960E124E}"/>
+              </a:ext>
+            </a:extLst>
+          </p:cNvPr>
+          <p:cNvSpPr>
+            <a:spLocks noGrp="1"/>
+          </p:cNvSpPr>
+          <p:nvPr>
+            <p:ph type="title"/>
+          </p:nvPr>
+        </p:nvSpPr>
+        <p:spPr/>
+        <p:txBody>
+          <a:bodyPr/>
+          <a:lstStyle/>
+          <a:p>
+            <a:r>
+              <a:rPr lang="en-GB" dirty="0"/>
+              <a:t>Overfitting vs. degree of polynomial</a:t>
+            </a:r>
+            <a:endParaRPr lang="en-SG" dirty="0"/>
+          </a:p>
+        </p:txBody>
+      </p:sp>
+      <p:sp>
+        <p:nvSpPr>
+          <p:cNvPr id="6" name="Content Placeholder 5">
+            <a:extLst>
+              <a:ext uri="{FF2B5EF4-FFF2-40B4-BE49-F238E27FC236}">
+                <a16:creationId xmlns:a16="http://schemas.microsoft.com/office/drawing/2014/main" id="{3FF27FA6-234D-EB6E-7AD4-4E52F151A639}"/>
+              </a:ext>
+            </a:extLst>
+          </p:cNvPr>
+          <p:cNvSpPr>
+            <a:spLocks noGrp="1"/>
+          </p:cNvSpPr>
+          <p:nvPr>
+            <p:ph sz="half" idx="1"/>
+          </p:nvPr>
+        </p:nvSpPr>
+        <p:spPr/>
+        <p:txBody>
+          <a:bodyPr>
+            <a:normAutofit/>
+          </a:bodyPr>
+          <a:lstStyle/>
+          <a:p>
+            <a:pPr marL="0" indent="0">
+              <a:buNone/>
+            </a:pPr>
+            <a:r>
+              <a:rPr lang="en-GB" b="1" dirty="0"/>
+              <a:t>Definition (</a:t>
+            </a:r>
+            <a:r>
+              <a:rPr lang="en-GB" b="1" dirty="0">
+                <a:solidFill>
+                  <a:srgbClr val="00B050"/>
+                </a:solidFill>
+              </a:rPr>
+              <a:t>Overfitting</a:t>
+            </a:r>
+            <a:r>
+              <a:rPr lang="en-GB" b="1" dirty="0"/>
+              <a:t>):</a:t>
+            </a:r>
+          </a:p>
+          <a:p>
+            <a:pPr marL="0" indent="0">
+              <a:buNone/>
+            </a:pPr>
+            <a:r>
+              <a:rPr lang="en-GB" b="1" dirty="0">
+                <a:solidFill>
+                  <a:srgbClr val="00B050"/>
+                </a:solidFill>
+              </a:rPr>
+              <a:t>Overfitting</a:t>
+            </a:r>
+            <a:r>
+              <a:rPr lang="en-GB" dirty="0"/>
+              <a:t> is a phenomenon that occurs in machine learning when a model is trained too well on the training data.</a:t>
+            </a:r>
+          </a:p>
+          <a:p>
+            <a:pPr marL="0" indent="0">
+              <a:buNone/>
+            </a:pPr>
+            <a:r>
+              <a:rPr lang="en-GB" dirty="0"/>
+              <a:t>As a result, it may perform poorly on new, unseen data (here an apartment with 150sqm surface, which was not present in the training dataset).</a:t>
+            </a:r>
+            <a:endParaRPr lang="en-SG" dirty="0"/>
+          </a:p>
+        </p:txBody>
+      </p:sp>
+      <p:sp>
+        <p:nvSpPr>
+          <p:cNvPr id="2" name="Content Placeholder 1">
+            <a:extLst>
+              <a:ext uri="{FF2B5EF4-FFF2-40B4-BE49-F238E27FC236}">
+                <a16:creationId xmlns:a16="http://schemas.microsoft.com/office/drawing/2014/main" id="{37C84060-31A2-3AFB-B38D-81D7652356D5}"/>
+              </a:ext>
+            </a:extLst>
+          </p:cNvPr>
+          <p:cNvSpPr>
+            <a:spLocks noGrp="1"/>
+          </p:cNvSpPr>
+          <p:nvPr>
+            <p:ph sz="half" idx="2"/>
+          </p:nvPr>
+        </p:nvSpPr>
+        <p:spPr>
+          <a:xfrm>
+            <a:off x="6172200" y="1825624"/>
+            <a:ext cx="5181600" cy="5032375"/>
+          </a:xfrm>
+        </p:spPr>
+        <p:txBody>
+          <a:bodyPr>
+            <a:normAutofit/>
+          </a:bodyPr>
+          <a:lstStyle/>
+          <a:p>
+            <a:pPr marL="0" indent="0">
+              <a:buNone/>
+            </a:pPr>
+            <a:r>
+              <a:rPr lang="en-GB" dirty="0"/>
+              <a:t>This typically happens when</a:t>
+            </a:r>
+          </a:p>
+          <a:p>
+            <a:r>
+              <a:rPr lang="en-GB" dirty="0"/>
+              <a:t>a model is trained using too many features in the dataset,</a:t>
+            </a:r>
+          </a:p>
+          <a:p>
+            <a:r>
+              <a:rPr lang="en-GB" dirty="0"/>
+              <a:t>or has imbalance in the data.</a:t>
+            </a:r>
+          </a:p>
+          <a:p>
+            <a:pPr marL="0" indent="0">
+              <a:buNone/>
+            </a:pPr>
+            <a:r>
+              <a:rPr lang="en-GB" dirty="0"/>
+              <a:t>It becomes too complex for the task at hand, resulting in poor </a:t>
+            </a:r>
+            <a:r>
+              <a:rPr lang="en-GB" b="1" dirty="0">
+                <a:solidFill>
+                  <a:srgbClr val="7030A0"/>
+                </a:solidFill>
+              </a:rPr>
+              <a:t>generalization</a:t>
+            </a:r>
+            <a:r>
+              <a:rPr lang="en-GB" dirty="0"/>
+              <a:t> to new data.</a:t>
+            </a:r>
+          </a:p>
+          <a:p>
+            <a:pPr marL="0" indent="0">
+              <a:buNone/>
+            </a:pPr>
+            <a:r>
+              <a:rPr lang="en-GB" dirty="0"/>
+              <a:t>In other words, it memorizes the noise in the training data rather than learning the correct underlying pattern.</a:t>
+            </a:r>
+            <a:endParaRPr lang="en-SG" dirty="0"/>
+          </a:p>
+        </p:txBody>
+      </p:sp>
+    </p:spTree>
+    <p:extLst>
+      <p:ext uri="{BB962C8B-B14F-4D97-AF65-F5344CB8AC3E}">
+        <p14:creationId xmlns:p14="http://schemas.microsoft.com/office/powerpoint/2010/main" val="1974002731"/>
+      </p:ext>
+    </p:extLst>
+  </p:cSld>
+  <p:clrMapOvr>
+    <a:masterClrMapping/>
+  </p:clrMapOvr>
+</p:sld>
+</file>
+
 <file path=ppt/slides/slide22.xml><?xml version="1.0" encoding="utf-8"?>
 <p:sld xmlns:a="http://schemas.openxmlformats.org/drawingml/2006/main" xmlns:r="http://schemas.openxmlformats.org/officeDocument/2006/relationships" xmlns:p="http://schemas.openxmlformats.org/presentationml/2006/main">
   <p:cSld>
@@ -7771,29 +7712,12 @@
               <a:buNone/>
             </a:pPr>
             <a:r>
+              <a:rPr lang="en-GB" b="1" dirty="0"/>
+              <a:t>More importantly: </a:t>
+            </a:r>
+            <a:r>
               <a:rPr lang="en-GB" dirty="0"/>
-              <a:t>This typically happens when</a:t>
-            </a:r>
-          </a:p>
-          <a:p>
-            <a:r>
-              <a:rPr lang="en-GB" dirty="0"/>
-              <a:t>a model is trained using too many features in the dataset,</a:t>
-            </a:r>
-          </a:p>
-          <a:p>
-            <a:r>
-              <a:rPr lang="en-GB" dirty="0"/>
-              <a:t>or has imbalance in the data.</a:t>
-            </a:r>
-          </a:p>
-          <a:p>
-            <a:pPr marL="0" indent="0">
-              <a:buNone/>
-            </a:pPr>
-            <a:r>
-              <a:rPr lang="en-GB" dirty="0"/>
-              <a:t>It becomes too complex for the task at hand, resulting in poor </a:t>
+              <a:t>It also typically happens </a:t>
             </a:r>
             <a:r>
               <a:rPr lang="en-GB" b="1" dirty="0">
@@ -7801,190 +7725,11 @@
                   <a:srgbClr val="7030A0"/>
                 </a:solidFill>
               </a:rPr>
-              <a:t>generalization</a:t>
+              <a:t>if the model complexity is too high compared to the dataset complexity</a:t>
             </a:r>
             <a:r>
               <a:rPr lang="en-GB" dirty="0"/>
-              <a:t> to new data.</a:t>
-            </a:r>
-          </a:p>
-          <a:p>
-            <a:pPr marL="0" indent="0">
-              <a:buNone/>
-            </a:pPr>
-            <a:r>
-              <a:rPr lang="en-GB" dirty="0"/>
-              <a:t>In other words, it memorizes the noise in the training data rather than learning the correct underlying pattern.</a:t>
-            </a:r>
-            <a:endParaRPr lang="en-SG" dirty="0"/>
-          </a:p>
-        </p:txBody>
-      </p:sp>
-    </p:spTree>
-    <p:extLst>
-      <p:ext uri="{BB962C8B-B14F-4D97-AF65-F5344CB8AC3E}">
-        <p14:creationId xmlns:p14="http://schemas.microsoft.com/office/powerpoint/2010/main" val="1974002731"/>
-      </p:ext>
-    </p:extLst>
-  </p:cSld>
-  <p:clrMapOvr>
-    <a:masterClrMapping/>
-  </p:clrMapOvr>
-</p:sld>
-</file>
-
-<file path=ppt/slides/slide23.xml><?xml version="1.0" encoding="utf-8"?>
-<p:sld xmlns:a="http://schemas.openxmlformats.org/drawingml/2006/main" xmlns:r="http://schemas.openxmlformats.org/officeDocument/2006/relationships" xmlns:p="http://schemas.openxmlformats.org/presentationml/2006/main">
-  <p:cSld>
-    <p:spTree>
-      <p:nvGrpSpPr>
-        <p:cNvPr id="1" name=""/>
-        <p:cNvGrpSpPr/>
-        <p:nvPr/>
-      </p:nvGrpSpPr>
-      <p:grpSpPr>
-        <a:xfrm>
-          <a:off x="0" y="0"/>
-          <a:ext cx="0" cy="0"/>
-          <a:chOff x="0" y="0"/>
-          <a:chExt cx="0" cy="0"/>
-        </a:xfrm>
-      </p:grpSpPr>
-      <p:sp>
-        <p:nvSpPr>
-          <p:cNvPr id="5" name="Title 4">
-            <a:extLst>
-              <a:ext uri="{FF2B5EF4-FFF2-40B4-BE49-F238E27FC236}">
-                <a16:creationId xmlns:a16="http://schemas.microsoft.com/office/drawing/2014/main" id="{BC884000-0FC9-A696-A696-8635960E124E}"/>
-              </a:ext>
-            </a:extLst>
-          </p:cNvPr>
-          <p:cNvSpPr>
-            <a:spLocks noGrp="1"/>
-          </p:cNvSpPr>
-          <p:nvPr>
-            <p:ph type="title"/>
-          </p:nvPr>
-        </p:nvSpPr>
-        <p:spPr/>
-        <p:txBody>
-          <a:bodyPr/>
-          <a:lstStyle/>
-          <a:p>
-            <a:r>
-              <a:rPr lang="en-GB" dirty="0"/>
-              <a:t>Overfitting vs. degree of polynomial</a:t>
-            </a:r>
-            <a:endParaRPr lang="en-SG" dirty="0"/>
-          </a:p>
-        </p:txBody>
-      </p:sp>
-      <p:sp>
-        <p:nvSpPr>
-          <p:cNvPr id="6" name="Content Placeholder 5">
-            <a:extLst>
-              <a:ext uri="{FF2B5EF4-FFF2-40B4-BE49-F238E27FC236}">
-                <a16:creationId xmlns:a16="http://schemas.microsoft.com/office/drawing/2014/main" id="{3FF27FA6-234D-EB6E-7AD4-4E52F151A639}"/>
-              </a:ext>
-            </a:extLst>
-          </p:cNvPr>
-          <p:cNvSpPr>
-            <a:spLocks noGrp="1"/>
-          </p:cNvSpPr>
-          <p:nvPr>
-            <p:ph sz="half" idx="1"/>
-          </p:nvPr>
-        </p:nvSpPr>
-        <p:spPr/>
-        <p:txBody>
-          <a:bodyPr>
-            <a:normAutofit/>
-          </a:bodyPr>
-          <a:lstStyle/>
-          <a:p>
-            <a:pPr marL="0" indent="0">
-              <a:buNone/>
-            </a:pPr>
-            <a:r>
-              <a:rPr lang="en-GB" b="1" dirty="0"/>
-              <a:t>Definition (</a:t>
-            </a:r>
-            <a:r>
-              <a:rPr lang="en-GB" b="1" dirty="0">
-                <a:solidFill>
-                  <a:srgbClr val="00B050"/>
-                </a:solidFill>
-              </a:rPr>
-              <a:t>Overfitting</a:t>
-            </a:r>
-            <a:r>
-              <a:rPr lang="en-GB" b="1" dirty="0"/>
-              <a:t>):</a:t>
-            </a:r>
-          </a:p>
-          <a:p>
-            <a:pPr marL="0" indent="0">
-              <a:buNone/>
-            </a:pPr>
-            <a:r>
-              <a:rPr lang="en-GB" b="1" dirty="0">
-                <a:solidFill>
-                  <a:srgbClr val="00B050"/>
-                </a:solidFill>
-              </a:rPr>
-              <a:t>Overfitting</a:t>
-            </a:r>
-            <a:r>
-              <a:rPr lang="en-GB" dirty="0"/>
-              <a:t> is a phenomenon that occurs in machine learning when a model is trained too well on the training data.</a:t>
-            </a:r>
-          </a:p>
-          <a:p>
-            <a:pPr marL="0" indent="0">
-              <a:buNone/>
-            </a:pPr>
-            <a:r>
-              <a:rPr lang="en-GB" dirty="0"/>
-              <a:t>As a result, it may perform poorly on new, unseen data (here an apartment with 150sqm surface, which was not present in the training dataset).</a:t>
-            </a:r>
-            <a:endParaRPr lang="en-SG" dirty="0"/>
-          </a:p>
-        </p:txBody>
-      </p:sp>
-      <p:sp>
-        <p:nvSpPr>
-          <p:cNvPr id="2" name="Content Placeholder 1">
-            <a:extLst>
-              <a:ext uri="{FF2B5EF4-FFF2-40B4-BE49-F238E27FC236}">
-                <a16:creationId xmlns:a16="http://schemas.microsoft.com/office/drawing/2014/main" id="{37C84060-31A2-3AFB-B38D-81D7652356D5}"/>
-              </a:ext>
-            </a:extLst>
-          </p:cNvPr>
-          <p:cNvSpPr>
-            <a:spLocks noGrp="1"/>
-          </p:cNvSpPr>
-          <p:nvPr>
-            <p:ph sz="half" idx="2"/>
-          </p:nvPr>
-        </p:nvSpPr>
-        <p:spPr>
-          <a:xfrm>
-            <a:off x="6172200" y="1825624"/>
-            <a:ext cx="5181600" cy="5032375"/>
-          </a:xfrm>
-        </p:spPr>
-        <p:txBody>
-          <a:bodyPr>
-            <a:normAutofit/>
-          </a:bodyPr>
-          <a:lstStyle/>
-          <a:p>
-            <a:pPr marL="0" indent="0">
-              <a:buNone/>
-            </a:pPr>
-            <a:r>
-              <a:rPr lang="en-GB" dirty="0"/>
-              <a:t>It also typically happens if the model complexity is too high compared to the dataset complexity.</a:t>
+              <a:t>.</a:t>
             </a:r>
           </a:p>
           <a:p>
@@ -7999,7 +7744,7 @@
             </a:pPr>
             <a:r>
               <a:rPr lang="en-GB" dirty="0"/>
-              <a:t>Typically, the model complexity here is the polynomial degree we use: the higher the polynomial degree, the higher the complexity of the model.</a:t>
+              <a:t>Typically, the model complexity here is the polynomial degree we used for the polynomial regressor: the higher the polynomial degree, the higher the complexity of the model (and its number of trainable parameters)</a:t>
             </a:r>
             <a:endParaRPr lang="en-SG" dirty="0"/>
           </a:p>
@@ -8018,7 +7763,7 @@
 </p:sld>
 </file>
 
-<file path=ppt/slides/slide24.xml><?xml version="1.0" encoding="utf-8"?>
+<file path=ppt/slides/slide23.xml><?xml version="1.0" encoding="utf-8"?>
 <p:sld xmlns:a="http://schemas.openxmlformats.org/drawingml/2006/main" xmlns:r="http://schemas.openxmlformats.org/officeDocument/2006/relationships" xmlns:p="http://schemas.openxmlformats.org/presentationml/2006/main">
   <p:cSld>
     <p:spTree>
@@ -8251,7 +7996,7 @@
 </p:sld>
 </file>
 
-<file path=ppt/slides/slide25.xml><?xml version="1.0" encoding="utf-8"?>
+<file path=ppt/slides/slide24.xml><?xml version="1.0" encoding="utf-8"?>
 <p:sld xmlns:a="http://schemas.openxmlformats.org/drawingml/2006/main" xmlns:r="http://schemas.openxmlformats.org/officeDocument/2006/relationships" xmlns:p="http://schemas.openxmlformats.org/presentationml/2006/main">
   <p:cSld>
     <p:spTree>
@@ -8492,7 +8237,7 @@
           <a:p>
             <a:r>
               <a:rPr lang="en-GB" dirty="0"/>
-              <a:t>or when the model is not powerful enough to capture the complexity of the task.</a:t>
+              <a:t>or when the model is not powerful enough to capture the complexity of the task/dataset.</a:t>
             </a:r>
             <a:endParaRPr lang="en-SG" dirty="0"/>
           </a:p>
@@ -8511,7 +8256,7 @@
 </p:sld>
 </file>
 
-<file path=ppt/slides/slide26.xml><?xml version="1.0" encoding="utf-8"?>
+<file path=ppt/slides/slide25.xml><?xml version="1.0" encoding="utf-8"?>
 <p:sld xmlns:a="http://schemas.openxmlformats.org/drawingml/2006/main" xmlns:r="http://schemas.openxmlformats.org/officeDocument/2006/relationships" xmlns:p="http://schemas.openxmlformats.org/presentationml/2006/main">
   <p:cSld>
     <p:spTree>
@@ -8711,7 +8456,7 @@
 </p:sld>
 </file>
 
-<file path=ppt/slides/slide27.xml><?xml version="1.0" encoding="utf-8"?>
+<file path=ppt/slides/slide26.xml><?xml version="1.0" encoding="utf-8"?>
 <p:sld xmlns:a="http://schemas.openxmlformats.org/drawingml/2006/main" xmlns:r="http://schemas.openxmlformats.org/officeDocument/2006/relationships" xmlns:p="http://schemas.openxmlformats.org/presentationml/2006/main">
   <p:cSld>
     <p:spTree>
@@ -8878,7 +8623,7 @@
 </p:sld>
 </file>
 
-<file path=ppt/slides/slide28.xml><?xml version="1.0" encoding="utf-8"?>
+<file path=ppt/slides/slide27.xml><?xml version="1.0" encoding="utf-8"?>
 <p:sld xmlns:a="http://schemas.openxmlformats.org/drawingml/2006/main" xmlns:r="http://schemas.openxmlformats.org/officeDocument/2006/relationships" xmlns:p="http://schemas.openxmlformats.org/presentationml/2006/main">
   <p:cSld>
     <p:spTree>
@@ -9100,7 +8845,7 @@
 </p:sld>
 </file>
 
-<file path=ppt/slides/slide29.xml><?xml version="1.0" encoding="utf-8"?>
+<file path=ppt/slides/slide28.xml><?xml version="1.0" encoding="utf-8"?>
 <p:sld xmlns:a="http://schemas.openxmlformats.org/drawingml/2006/main" xmlns:r="http://schemas.openxmlformats.org/officeDocument/2006/relationships" xmlns:p="http://schemas.openxmlformats.org/presentationml/2006/main">
   <p:cSld>
     <p:spTree>
@@ -9362,256 +9107,7 @@
 </p:sld>
 </file>
 
-<file path=ppt/slides/slide3.xml><?xml version="1.0" encoding="utf-8"?>
-<p:sld xmlns:a="http://schemas.openxmlformats.org/drawingml/2006/main" xmlns:r="http://schemas.openxmlformats.org/officeDocument/2006/relationships" xmlns:p="http://schemas.openxmlformats.org/presentationml/2006/main">
-  <p:cSld>
-    <p:spTree>
-      <p:nvGrpSpPr>
-        <p:cNvPr id="1" name=""/>
-        <p:cNvGrpSpPr/>
-        <p:nvPr/>
-      </p:nvGrpSpPr>
-      <p:grpSpPr>
-        <a:xfrm>
-          <a:off x="0" y="0"/>
-          <a:ext cx="0" cy="0"/>
-          <a:chOff x="0" y="0"/>
-          <a:chExt cx="0" cy="0"/>
-        </a:xfrm>
-      </p:grpSpPr>
-      <p:sp>
-        <p:nvSpPr>
-          <p:cNvPr id="2" name="Title 1">
-            <a:extLst>
-              <a:ext uri="{FF2B5EF4-FFF2-40B4-BE49-F238E27FC236}">
-                <a16:creationId xmlns:a16="http://schemas.microsoft.com/office/drawing/2014/main" id="{49D40417-A4D3-4CE8-96E7-708E2439AE7B}"/>
-              </a:ext>
-            </a:extLst>
-          </p:cNvPr>
-          <p:cNvSpPr>
-            <a:spLocks noGrp="1"/>
-          </p:cNvSpPr>
-          <p:nvPr>
-            <p:ph type="title"/>
-          </p:nvPr>
-        </p:nvSpPr>
-        <p:spPr/>
-        <p:txBody>
-          <a:bodyPr/>
-          <a:lstStyle/>
-          <a:p>
-            <a:r>
-              <a:rPr lang="en-US" dirty="0"/>
-              <a:t>About this week (Week 1)</a:t>
-            </a:r>
-            <a:endParaRPr lang="en-GB" dirty="0"/>
-          </a:p>
-        </p:txBody>
-      </p:sp>
-      <p:sp>
-        <p:nvSpPr>
-          <p:cNvPr id="3" name="Content Placeholder 2">
-            <a:extLst>
-              <a:ext uri="{FF2B5EF4-FFF2-40B4-BE49-F238E27FC236}">
-                <a16:creationId xmlns:a16="http://schemas.microsoft.com/office/drawing/2014/main" id="{35995840-A9D9-479A-A34F-EA7DC229D38E}"/>
-              </a:ext>
-            </a:extLst>
-          </p:cNvPr>
-          <p:cNvSpPr>
-            <a:spLocks noGrp="1"/>
-          </p:cNvSpPr>
-          <p:nvPr>
-            <p:ph idx="1"/>
-          </p:nvPr>
-        </p:nvSpPr>
-        <p:spPr>
-          <a:xfrm>
-            <a:off x="838200" y="1825625"/>
-            <a:ext cx="10515600" cy="4827102"/>
-          </a:xfrm>
-        </p:spPr>
-        <p:txBody>
-          <a:bodyPr/>
-          <a:lstStyle/>
-          <a:p>
-            <a:pPr marL="514350" indent="-514350">
-              <a:buFont typeface="+mj-lt"/>
-              <a:buAutoNum type="arabicPeriod" startAt="8"/>
-            </a:pPr>
-            <a:r>
-              <a:rPr lang="en-US" dirty="0"/>
-              <a:t>What is </a:t>
-            </a:r>
-            <a:r>
-              <a:rPr lang="en-US" b="1" dirty="0"/>
-              <a:t>overfitting</a:t>
-            </a:r>
-            <a:r>
-              <a:rPr lang="en-US" dirty="0"/>
-              <a:t> and why is it bad?</a:t>
-            </a:r>
-          </a:p>
-          <a:p>
-            <a:pPr marL="514350" indent="-514350">
-              <a:buFont typeface="+mj-lt"/>
-              <a:buAutoNum type="arabicPeriod" startAt="8"/>
-            </a:pPr>
-            <a:r>
-              <a:rPr lang="en-US" dirty="0"/>
-              <a:t>What is </a:t>
-            </a:r>
-            <a:r>
-              <a:rPr lang="en-US" b="1" dirty="0"/>
-              <a:t>underfitting</a:t>
-            </a:r>
-            <a:r>
-              <a:rPr lang="en-US" dirty="0"/>
-              <a:t> and why is it bad?</a:t>
-            </a:r>
-          </a:p>
-          <a:p>
-            <a:pPr marL="514350" indent="-514350">
-              <a:buFont typeface="+mj-lt"/>
-              <a:buAutoNum type="arabicPeriod" startAt="8"/>
-            </a:pPr>
-            <a:r>
-              <a:rPr lang="en-US" dirty="0"/>
-              <a:t>What is </a:t>
-            </a:r>
-            <a:r>
-              <a:rPr lang="en-US" b="1" dirty="0"/>
-              <a:t>generalization</a:t>
-            </a:r>
-            <a:r>
-              <a:rPr lang="en-US" dirty="0"/>
-              <a:t> and how to evaluate it?</a:t>
-            </a:r>
-          </a:p>
-          <a:p>
-            <a:pPr marL="514350" indent="-514350">
-              <a:buFont typeface="+mj-lt"/>
-              <a:buAutoNum type="arabicPeriod" startAt="8"/>
-            </a:pPr>
-            <a:r>
-              <a:rPr lang="en-US" dirty="0"/>
-              <a:t>What is a </a:t>
-            </a:r>
-            <a:r>
-              <a:rPr lang="en-US" b="1" dirty="0"/>
-              <a:t>train-test</a:t>
-            </a:r>
-            <a:r>
-              <a:rPr lang="en-US" dirty="0"/>
-              <a:t> </a:t>
-            </a:r>
-            <a:r>
-              <a:rPr lang="en-US" b="1" dirty="0"/>
-              <a:t>split</a:t>
-            </a:r>
-            <a:r>
-              <a:rPr lang="en-US" dirty="0"/>
-              <a:t> and why is it related to </a:t>
-            </a:r>
-            <a:r>
-              <a:rPr lang="en-US" b="1" dirty="0"/>
-              <a:t>generalization</a:t>
-            </a:r>
-            <a:r>
-              <a:rPr lang="en-US" dirty="0"/>
-              <a:t>?</a:t>
-            </a:r>
-          </a:p>
-          <a:p>
-            <a:pPr marL="514350" indent="-514350">
-              <a:buFont typeface="+mj-lt"/>
-              <a:buAutoNum type="arabicPeriod" startAt="8"/>
-            </a:pPr>
-            <a:r>
-              <a:rPr lang="en-US" dirty="0"/>
-              <a:t>What is a </a:t>
-            </a:r>
-            <a:r>
-              <a:rPr lang="en-US" b="1" dirty="0"/>
-              <a:t>sigmoid</a:t>
-            </a:r>
-            <a:r>
-              <a:rPr lang="en-US" dirty="0"/>
-              <a:t> function? What is a </a:t>
-            </a:r>
-            <a:r>
-              <a:rPr lang="en-US" b="1" dirty="0"/>
-              <a:t>logistic</a:t>
-            </a:r>
-            <a:r>
-              <a:rPr lang="en-US" dirty="0"/>
-              <a:t> function?</a:t>
-            </a:r>
-          </a:p>
-          <a:p>
-            <a:pPr marL="514350" indent="-514350">
-              <a:buFont typeface="+mj-lt"/>
-              <a:buAutoNum type="arabicPeriod" startAt="8"/>
-            </a:pPr>
-            <a:r>
-              <a:rPr lang="en-US" dirty="0"/>
-              <a:t>How to perform </a:t>
-            </a:r>
-            <a:r>
-              <a:rPr lang="en-US" b="1" dirty="0"/>
-              <a:t>binary</a:t>
-            </a:r>
-            <a:r>
-              <a:rPr lang="en-US" dirty="0"/>
-              <a:t> </a:t>
-            </a:r>
-            <a:r>
-              <a:rPr lang="en-US" b="1" dirty="0"/>
-              <a:t>classification</a:t>
-            </a:r>
-            <a:r>
-              <a:rPr lang="en-US" dirty="0"/>
-              <a:t> using a </a:t>
-            </a:r>
-            <a:r>
-              <a:rPr lang="en-US" b="1" dirty="0"/>
-              <a:t>logistic</a:t>
-            </a:r>
-            <a:r>
-              <a:rPr lang="en-US" dirty="0"/>
-              <a:t> </a:t>
-            </a:r>
-            <a:r>
-              <a:rPr lang="en-US" b="1" dirty="0"/>
-              <a:t>regressor</a:t>
-            </a:r>
-            <a:r>
-              <a:rPr lang="en-US" dirty="0"/>
-              <a:t> and how is it related to linear regression?</a:t>
-            </a:r>
-          </a:p>
-          <a:p>
-            <a:pPr marL="514350" indent="-514350">
-              <a:buFont typeface="+mj-lt"/>
-              <a:buAutoNum type="arabicPeriod" startAt="8"/>
-            </a:pPr>
-            <a:endParaRPr lang="en-GB" dirty="0"/>
-          </a:p>
-        </p:txBody>
-      </p:sp>
-    </p:spTree>
-    <p:extLst>
-      <p:ext uri="{BB962C8B-B14F-4D97-AF65-F5344CB8AC3E}">
-        <p14:creationId xmlns:p14="http://schemas.microsoft.com/office/powerpoint/2010/main" val="1464669599"/>
-      </p:ext>
-    </p:extLst>
-  </p:cSld>
-  <p:clrMapOvr>
-    <a:masterClrMapping/>
-  </p:clrMapOvr>
-</p:sld>
-</file>
-
-<file path=ppt/slides/slide30.xml><?xml version="1.0" encoding="utf-8"?>
+<file path=ppt/slides/slide29.xml><?xml version="1.0" encoding="utf-8"?>
 <p:sld xmlns:a="http://schemas.openxmlformats.org/drawingml/2006/main" xmlns:r="http://schemas.openxmlformats.org/officeDocument/2006/relationships" xmlns:p="http://schemas.openxmlformats.org/presentationml/2006/main">
   <p:cSld>
     <p:spTree>
@@ -9700,7 +9196,256 @@
 </p:sld>
 </file>
 
-<file path=ppt/slides/slide31.xml><?xml version="1.0" encoding="utf-8"?>
+<file path=ppt/slides/slide3.xml><?xml version="1.0" encoding="utf-8"?>
+<p:sld xmlns:a="http://schemas.openxmlformats.org/drawingml/2006/main" xmlns:r="http://schemas.openxmlformats.org/officeDocument/2006/relationships" xmlns:p="http://schemas.openxmlformats.org/presentationml/2006/main">
+  <p:cSld>
+    <p:spTree>
+      <p:nvGrpSpPr>
+        <p:cNvPr id="1" name=""/>
+        <p:cNvGrpSpPr/>
+        <p:nvPr/>
+      </p:nvGrpSpPr>
+      <p:grpSpPr>
+        <a:xfrm>
+          <a:off x="0" y="0"/>
+          <a:ext cx="0" cy="0"/>
+          <a:chOff x="0" y="0"/>
+          <a:chExt cx="0" cy="0"/>
+        </a:xfrm>
+      </p:grpSpPr>
+      <p:sp>
+        <p:nvSpPr>
+          <p:cNvPr id="2" name="Title 1">
+            <a:extLst>
+              <a:ext uri="{FF2B5EF4-FFF2-40B4-BE49-F238E27FC236}">
+                <a16:creationId xmlns:a16="http://schemas.microsoft.com/office/drawing/2014/main" id="{49D40417-A4D3-4CE8-96E7-708E2439AE7B}"/>
+              </a:ext>
+            </a:extLst>
+          </p:cNvPr>
+          <p:cNvSpPr>
+            <a:spLocks noGrp="1"/>
+          </p:cNvSpPr>
+          <p:nvPr>
+            <p:ph type="title"/>
+          </p:nvPr>
+        </p:nvSpPr>
+        <p:spPr/>
+        <p:txBody>
+          <a:bodyPr/>
+          <a:lstStyle/>
+          <a:p>
+            <a:r>
+              <a:rPr lang="en-US" dirty="0"/>
+              <a:t>About this week (Week 1)</a:t>
+            </a:r>
+            <a:endParaRPr lang="en-GB" dirty="0"/>
+          </a:p>
+        </p:txBody>
+      </p:sp>
+      <p:sp>
+        <p:nvSpPr>
+          <p:cNvPr id="3" name="Content Placeholder 2">
+            <a:extLst>
+              <a:ext uri="{FF2B5EF4-FFF2-40B4-BE49-F238E27FC236}">
+                <a16:creationId xmlns:a16="http://schemas.microsoft.com/office/drawing/2014/main" id="{35995840-A9D9-479A-A34F-EA7DC229D38E}"/>
+              </a:ext>
+            </a:extLst>
+          </p:cNvPr>
+          <p:cNvSpPr>
+            <a:spLocks noGrp="1"/>
+          </p:cNvSpPr>
+          <p:nvPr>
+            <p:ph idx="1"/>
+          </p:nvPr>
+        </p:nvSpPr>
+        <p:spPr>
+          <a:xfrm>
+            <a:off x="838200" y="1825625"/>
+            <a:ext cx="10515600" cy="4827102"/>
+          </a:xfrm>
+        </p:spPr>
+        <p:txBody>
+          <a:bodyPr/>
+          <a:lstStyle/>
+          <a:p>
+            <a:pPr marL="514350" indent="-514350">
+              <a:buFont typeface="+mj-lt"/>
+              <a:buAutoNum type="arabicPeriod" startAt="8"/>
+            </a:pPr>
+            <a:r>
+              <a:rPr lang="en-US" dirty="0"/>
+              <a:t>What is </a:t>
+            </a:r>
+            <a:r>
+              <a:rPr lang="en-US" b="1" dirty="0"/>
+              <a:t>overfitting</a:t>
+            </a:r>
+            <a:r>
+              <a:rPr lang="en-US" dirty="0"/>
+              <a:t> and why is it bad?</a:t>
+            </a:r>
+          </a:p>
+          <a:p>
+            <a:pPr marL="514350" indent="-514350">
+              <a:buFont typeface="+mj-lt"/>
+              <a:buAutoNum type="arabicPeriod" startAt="8"/>
+            </a:pPr>
+            <a:r>
+              <a:rPr lang="en-US" dirty="0"/>
+              <a:t>What is </a:t>
+            </a:r>
+            <a:r>
+              <a:rPr lang="en-US" b="1" dirty="0"/>
+              <a:t>underfitting</a:t>
+            </a:r>
+            <a:r>
+              <a:rPr lang="en-US" dirty="0"/>
+              <a:t> and why is it bad?</a:t>
+            </a:r>
+          </a:p>
+          <a:p>
+            <a:pPr marL="514350" indent="-514350">
+              <a:buFont typeface="+mj-lt"/>
+              <a:buAutoNum type="arabicPeriod" startAt="8"/>
+            </a:pPr>
+            <a:r>
+              <a:rPr lang="en-US" dirty="0"/>
+              <a:t>What is </a:t>
+            </a:r>
+            <a:r>
+              <a:rPr lang="en-US" b="1" dirty="0"/>
+              <a:t>generalization</a:t>
+            </a:r>
+            <a:r>
+              <a:rPr lang="en-US" dirty="0"/>
+              <a:t> and how to evaluate it?</a:t>
+            </a:r>
+          </a:p>
+          <a:p>
+            <a:pPr marL="514350" indent="-514350">
+              <a:buFont typeface="+mj-lt"/>
+              <a:buAutoNum type="arabicPeriod" startAt="8"/>
+            </a:pPr>
+            <a:r>
+              <a:rPr lang="en-US" dirty="0"/>
+              <a:t>What is a </a:t>
+            </a:r>
+            <a:r>
+              <a:rPr lang="en-US" b="1" dirty="0"/>
+              <a:t>train-test</a:t>
+            </a:r>
+            <a:r>
+              <a:rPr lang="en-US" dirty="0"/>
+              <a:t> </a:t>
+            </a:r>
+            <a:r>
+              <a:rPr lang="en-US" b="1" dirty="0"/>
+              <a:t>split</a:t>
+            </a:r>
+            <a:r>
+              <a:rPr lang="en-US" dirty="0"/>
+              <a:t> and why is it related to </a:t>
+            </a:r>
+            <a:r>
+              <a:rPr lang="en-US" b="1" dirty="0"/>
+              <a:t>generalization</a:t>
+            </a:r>
+            <a:r>
+              <a:rPr lang="en-US" dirty="0"/>
+              <a:t>?</a:t>
+            </a:r>
+          </a:p>
+          <a:p>
+            <a:pPr marL="514350" indent="-514350">
+              <a:buFont typeface="+mj-lt"/>
+              <a:buAutoNum type="arabicPeriod" startAt="8"/>
+            </a:pPr>
+            <a:r>
+              <a:rPr lang="en-US" dirty="0"/>
+              <a:t>What is a </a:t>
+            </a:r>
+            <a:r>
+              <a:rPr lang="en-US" b="1" dirty="0"/>
+              <a:t>sigmoid</a:t>
+            </a:r>
+            <a:r>
+              <a:rPr lang="en-US" dirty="0"/>
+              <a:t> function? What is a </a:t>
+            </a:r>
+            <a:r>
+              <a:rPr lang="en-US" b="1" dirty="0"/>
+              <a:t>logistic</a:t>
+            </a:r>
+            <a:r>
+              <a:rPr lang="en-US" dirty="0"/>
+              <a:t> function?</a:t>
+            </a:r>
+          </a:p>
+          <a:p>
+            <a:pPr marL="514350" indent="-514350">
+              <a:buFont typeface="+mj-lt"/>
+              <a:buAutoNum type="arabicPeriod" startAt="8"/>
+            </a:pPr>
+            <a:r>
+              <a:rPr lang="en-US" dirty="0"/>
+              <a:t>How to perform </a:t>
+            </a:r>
+            <a:r>
+              <a:rPr lang="en-US" b="1" dirty="0"/>
+              <a:t>binary</a:t>
+            </a:r>
+            <a:r>
+              <a:rPr lang="en-US" dirty="0"/>
+              <a:t> </a:t>
+            </a:r>
+            <a:r>
+              <a:rPr lang="en-US" b="1" dirty="0"/>
+              <a:t>classification</a:t>
+            </a:r>
+            <a:r>
+              <a:rPr lang="en-US" dirty="0"/>
+              <a:t> using a </a:t>
+            </a:r>
+            <a:r>
+              <a:rPr lang="en-US" b="1" dirty="0"/>
+              <a:t>logistic</a:t>
+            </a:r>
+            <a:r>
+              <a:rPr lang="en-US" dirty="0"/>
+              <a:t> </a:t>
+            </a:r>
+            <a:r>
+              <a:rPr lang="en-US" b="1" dirty="0"/>
+              <a:t>regressor</a:t>
+            </a:r>
+            <a:r>
+              <a:rPr lang="en-US" dirty="0"/>
+              <a:t> and how is it related to linear regression?</a:t>
+            </a:r>
+          </a:p>
+          <a:p>
+            <a:pPr marL="514350" indent="-514350">
+              <a:buFont typeface="+mj-lt"/>
+              <a:buAutoNum type="arabicPeriod" startAt="8"/>
+            </a:pPr>
+            <a:endParaRPr lang="en-GB" dirty="0"/>
+          </a:p>
+        </p:txBody>
+      </p:sp>
+    </p:spTree>
+    <p:extLst>
+      <p:ext uri="{BB962C8B-B14F-4D97-AF65-F5344CB8AC3E}">
+        <p14:creationId xmlns:p14="http://schemas.microsoft.com/office/powerpoint/2010/main" val="1464669599"/>
+      </p:ext>
+    </p:extLst>
+  </p:cSld>
+  <p:clrMapOvr>
+    <a:masterClrMapping/>
+  </p:clrMapOvr>
+</p:sld>
+</file>
+
+<file path=ppt/slides/slide30.xml><?xml version="1.0" encoding="utf-8"?>
 <p:sld xmlns:a="http://schemas.openxmlformats.org/drawingml/2006/main" xmlns:r="http://schemas.openxmlformats.org/officeDocument/2006/relationships" xmlns:p="http://schemas.openxmlformats.org/presentationml/2006/main">
   <p:cSld>
     <p:spTree>
@@ -9760,7 +9505,7 @@
 </p:sld>
 </file>
 
-<file path=ppt/slides/slide32.xml><?xml version="1.0" encoding="utf-8"?>
+<file path=ppt/slides/slide31.xml><?xml version="1.0" encoding="utf-8"?>
 <p:sld xmlns:a="http://schemas.openxmlformats.org/drawingml/2006/main" xmlns:r="http://schemas.openxmlformats.org/officeDocument/2006/relationships" xmlns:p="http://schemas.openxmlformats.org/presentationml/2006/main">
   <p:cSld>
     <p:spTree>
@@ -9884,7 +9629,7 @@
 </p:sld>
 </file>
 
-<file path=ppt/slides/slide33.xml><?xml version="1.0" encoding="utf-8"?>
+<file path=ppt/slides/slide32.xml><?xml version="1.0" encoding="utf-8"?>
 <p:sld xmlns:a="http://schemas.openxmlformats.org/drawingml/2006/main" xmlns:r="http://schemas.openxmlformats.org/officeDocument/2006/relationships" xmlns:p="http://schemas.openxmlformats.org/presentationml/2006/main">
   <p:cSld>
     <p:spTree>
@@ -10008,7 +9753,7 @@
 </p:sld>
 </file>
 
-<file path=ppt/slides/slide34.xml><?xml version="1.0" encoding="utf-8"?>
+<file path=ppt/slides/slide33.xml><?xml version="1.0" encoding="utf-8"?>
 <p:sld xmlns:a="http://schemas.openxmlformats.org/drawingml/2006/main" xmlns:r="http://schemas.openxmlformats.org/officeDocument/2006/relationships" xmlns:p="http://schemas.openxmlformats.org/presentationml/2006/main">
   <p:cSld>
     <p:spTree>
@@ -10241,7 +9986,7 @@
 </p:sld>
 </file>
 
-<file path=ppt/slides/slide35.xml><?xml version="1.0" encoding="utf-8"?>
+<file path=ppt/slides/slide34.xml><?xml version="1.0" encoding="utf-8"?>
 <p:sld xmlns:a="http://schemas.openxmlformats.org/drawingml/2006/main" xmlns:r="http://schemas.openxmlformats.org/officeDocument/2006/relationships" xmlns:p="http://schemas.openxmlformats.org/presentationml/2006/main">
   <p:cSld>
     <p:spTree>
@@ -10384,7 +10129,7 @@
 </p:sld>
 </file>
 
-<file path=ppt/slides/slide36.xml><?xml version="1.0" encoding="utf-8"?>
+<file path=ppt/slides/slide35.xml><?xml version="1.0" encoding="utf-8"?>
 <p:sld xmlns:a="http://schemas.openxmlformats.org/drawingml/2006/main" xmlns:r="http://schemas.openxmlformats.org/officeDocument/2006/relationships" xmlns:p="http://schemas.openxmlformats.org/presentationml/2006/main">
   <p:cSld>
     <p:spTree>
@@ -10657,7 +10402,7 @@
 </p:sld>
 </file>
 
-<file path=ppt/slides/slide37.xml><?xml version="1.0" encoding="utf-8"?>
+<file path=ppt/slides/slide36.xml><?xml version="1.0" encoding="utf-8"?>
 <p:sld xmlns:a="http://schemas.openxmlformats.org/drawingml/2006/main" xmlns:r="http://schemas.openxmlformats.org/officeDocument/2006/relationships" xmlns:p="http://schemas.openxmlformats.org/presentationml/2006/main">
   <p:cSld>
     <p:spTree>
@@ -10739,7 +10484,22 @@
                   <a:schemeClr val="accent2"/>
                 </a:solidFill>
               </a:rPr>
-              <a:t>But then, why did black end up being ok then? It had not seen the &lt;45sqm data either!</a:t>
+              <a:t>But then, why did black end up being ok then?</a:t>
+            </a:r>
+            <a:br>
+              <a:rPr lang="en-GB" sz="2400" b="1" dirty="0">
+                <a:solidFill>
+                  <a:schemeClr val="accent2"/>
+                </a:solidFill>
+              </a:rPr>
+            </a:br>
+            <a:r>
+              <a:rPr lang="en-GB" sz="2400" b="1" dirty="0">
+                <a:solidFill>
+                  <a:schemeClr val="accent2"/>
+                </a:solidFill>
+              </a:rPr>
+              <a:t>It had not seen the &lt;45sqm data either!</a:t>
             </a:r>
             <a:endParaRPr lang="en-SG" sz="2400" b="1" dirty="0">
               <a:solidFill>
@@ -10815,6 +10575,198 @@
 </p:sld>
 </file>
 
+<file path=ppt/slides/slide37.xml><?xml version="1.0" encoding="utf-8"?>
+<p:sld xmlns:a="http://schemas.openxmlformats.org/drawingml/2006/main" xmlns:r="http://schemas.openxmlformats.org/officeDocument/2006/relationships" xmlns:p="http://schemas.openxmlformats.org/presentationml/2006/main">
+  <p:cSld>
+    <p:spTree>
+      <p:nvGrpSpPr>
+        <p:cNvPr id="1" name=""/>
+        <p:cNvGrpSpPr/>
+        <p:nvPr/>
+      </p:nvGrpSpPr>
+      <p:grpSpPr>
+        <a:xfrm>
+          <a:off x="0" y="0"/>
+          <a:ext cx="0" cy="0"/>
+          <a:chOff x="0" y="0"/>
+          <a:chExt cx="0" cy="0"/>
+        </a:xfrm>
+      </p:grpSpPr>
+      <p:sp>
+        <p:nvSpPr>
+          <p:cNvPr id="2" name="Title 1">
+            <a:extLst>
+              <a:ext uri="{FF2B5EF4-FFF2-40B4-BE49-F238E27FC236}">
+                <a16:creationId xmlns:a16="http://schemas.microsoft.com/office/drawing/2014/main" id="{1D3B68C2-4970-4C7E-1F52-6140F374C9AD}"/>
+              </a:ext>
+            </a:extLst>
+          </p:cNvPr>
+          <p:cNvSpPr>
+            <a:spLocks noGrp="1"/>
+          </p:cNvSpPr>
+          <p:nvPr>
+            <p:ph type="title"/>
+          </p:nvPr>
+        </p:nvSpPr>
+        <p:spPr/>
+        <p:txBody>
+          <a:bodyPr/>
+          <a:lstStyle/>
+          <a:p>
+            <a:r>
+              <a:rPr lang="en-GB" dirty="0"/>
+              <a:t>Regularization</a:t>
+            </a:r>
+            <a:endParaRPr lang="en-SG" dirty="0"/>
+          </a:p>
+        </p:txBody>
+      </p:sp>
+      <p:sp>
+        <p:nvSpPr>
+          <p:cNvPr id="3" name="Content Placeholder 2">
+            <a:extLst>
+              <a:ext uri="{FF2B5EF4-FFF2-40B4-BE49-F238E27FC236}">
+                <a16:creationId xmlns:a16="http://schemas.microsoft.com/office/drawing/2014/main" id="{7BDE96C0-465C-7952-04EA-C267AC8BF678}"/>
+              </a:ext>
+            </a:extLst>
+          </p:cNvPr>
+          <p:cNvSpPr>
+            <a:spLocks noGrp="1"/>
+          </p:cNvSpPr>
+          <p:nvPr>
+            <p:ph sz="half" idx="1"/>
+          </p:nvPr>
+        </p:nvSpPr>
+        <p:spPr/>
+        <p:txBody>
+          <a:bodyPr>
+            <a:normAutofit/>
+          </a:bodyPr>
+          <a:lstStyle/>
+          <a:p>
+            <a:pPr marL="0" indent="0">
+              <a:buNone/>
+            </a:pPr>
+            <a:r>
+              <a:rPr lang="en-GB" b="1" dirty="0"/>
+              <a:t>Definition (</a:t>
+            </a:r>
+            <a:r>
+              <a:rPr lang="en-GB" b="1" dirty="0">
+                <a:solidFill>
+                  <a:srgbClr val="00B050"/>
+                </a:solidFill>
+              </a:rPr>
+              <a:t>Regularization</a:t>
+            </a:r>
+            <a:r>
+              <a:rPr lang="en-GB" b="1" dirty="0"/>
+              <a:t>):</a:t>
+            </a:r>
+          </a:p>
+          <a:p>
+            <a:pPr marL="0" indent="0">
+              <a:buNone/>
+            </a:pPr>
+            <a:r>
+              <a:rPr lang="en-SG" b="1" dirty="0">
+                <a:solidFill>
+                  <a:srgbClr val="00B050"/>
+                </a:solidFill>
+              </a:rPr>
+              <a:t>Regularization</a:t>
+            </a:r>
+            <a:r>
+              <a:rPr lang="en-SG" dirty="0"/>
+              <a:t> consists of techniques, whose purpose is to help the model to avoid overfitting.</a:t>
+            </a:r>
+          </a:p>
+          <a:p>
+            <a:pPr marL="0" indent="0">
+              <a:buNone/>
+            </a:pPr>
+            <a:r>
+              <a:rPr lang="en-SG" dirty="0"/>
+              <a:t>It can typically be done by making sure the model is not too complex for the data, but many other approaches exist. </a:t>
+            </a:r>
+          </a:p>
+        </p:txBody>
+      </p:sp>
+      <p:sp>
+        <p:nvSpPr>
+          <p:cNvPr id="4" name="Content Placeholder 3">
+            <a:extLst>
+              <a:ext uri="{FF2B5EF4-FFF2-40B4-BE49-F238E27FC236}">
+                <a16:creationId xmlns:a16="http://schemas.microsoft.com/office/drawing/2014/main" id="{5E76589E-870E-419D-CF95-4309EACDB190}"/>
+              </a:ext>
+            </a:extLst>
+          </p:cNvPr>
+          <p:cNvSpPr>
+            <a:spLocks noGrp="1"/>
+          </p:cNvSpPr>
+          <p:nvPr>
+            <p:ph sz="half" idx="2"/>
+          </p:nvPr>
+        </p:nvSpPr>
+        <p:spPr>
+          <a:xfrm>
+            <a:off x="6172200" y="1825624"/>
+            <a:ext cx="5181600" cy="5032375"/>
+          </a:xfrm>
+        </p:spPr>
+        <p:txBody>
+          <a:bodyPr>
+            <a:normAutofit/>
+          </a:bodyPr>
+          <a:lstStyle/>
+          <a:p>
+            <a:pPr marL="0" indent="0">
+              <a:buNone/>
+            </a:pPr>
+            <a:r>
+              <a:rPr lang="en-GB" dirty="0"/>
+              <a:t>In general,</a:t>
+            </a:r>
+          </a:p>
+          <a:p>
+            <a:r>
+              <a:rPr lang="en-GB" b="1" dirty="0"/>
+              <a:t>Scale model and dataset complexity: </a:t>
+            </a:r>
+            <a:r>
+              <a:rPr lang="en-GB" dirty="0"/>
+              <a:t>the more complex the data is (in terms of features), the more complex the model can/should be.</a:t>
+            </a:r>
+          </a:p>
+          <a:p>
+            <a:r>
+              <a:rPr lang="en-GB" b="1" dirty="0"/>
+              <a:t>Scale model and dataset size: </a:t>
+            </a:r>
+            <a:r>
+              <a:rPr lang="en-GB" dirty="0"/>
+              <a:t>the more data you have (in terms of quantity of individual samples in dataset), the more complex the model can be.</a:t>
+            </a:r>
+            <a:endParaRPr lang="en-SG" dirty="0"/>
+          </a:p>
+          <a:p>
+            <a:endParaRPr lang="en-SG" b="1" dirty="0"/>
+          </a:p>
+        </p:txBody>
+      </p:sp>
+    </p:spTree>
+    <p:extLst>
+      <p:ext uri="{BB962C8B-B14F-4D97-AF65-F5344CB8AC3E}">
+        <p14:creationId xmlns:p14="http://schemas.microsoft.com/office/powerpoint/2010/main" val="1377302654"/>
+      </p:ext>
+    </p:extLst>
+  </p:cSld>
+  <p:clrMapOvr>
+    <a:masterClrMapping/>
+  </p:clrMapOvr>
+</p:sld>
+</file>
+
 <file path=ppt/slides/slide38.xml><?xml version="1.0" encoding="utf-8"?>
 <p:sld xmlns:a="http://schemas.openxmlformats.org/drawingml/2006/main" xmlns:r="http://schemas.openxmlformats.org/officeDocument/2006/relationships" xmlns:p="http://schemas.openxmlformats.org/presentationml/2006/main">
   <p:cSld>
@@ -10879,198 +10831,6 @@
         </p:nvSpPr>
         <p:spPr/>
         <p:txBody>
-          <a:bodyPr>
-            <a:normAutofit/>
-          </a:bodyPr>
-          <a:lstStyle/>
-          <a:p>
-            <a:pPr marL="0" indent="0">
-              <a:buNone/>
-            </a:pPr>
-            <a:r>
-              <a:rPr lang="en-GB" b="1" dirty="0"/>
-              <a:t>Definition (</a:t>
-            </a:r>
-            <a:r>
-              <a:rPr lang="en-GB" b="1" dirty="0">
-                <a:solidFill>
-                  <a:srgbClr val="00B050"/>
-                </a:solidFill>
-              </a:rPr>
-              <a:t>Regularization</a:t>
-            </a:r>
-            <a:r>
-              <a:rPr lang="en-GB" b="1" dirty="0"/>
-              <a:t>):</a:t>
-            </a:r>
-          </a:p>
-          <a:p>
-            <a:pPr marL="0" indent="0">
-              <a:buNone/>
-            </a:pPr>
-            <a:r>
-              <a:rPr lang="en-SG" b="1" dirty="0">
-                <a:solidFill>
-                  <a:srgbClr val="00B050"/>
-                </a:solidFill>
-              </a:rPr>
-              <a:t>Regularization</a:t>
-            </a:r>
-            <a:r>
-              <a:rPr lang="en-SG" dirty="0"/>
-              <a:t> consists of techniques, whose purpose is to help the model to avoid overfitting.</a:t>
-            </a:r>
-          </a:p>
-          <a:p>
-            <a:pPr marL="0" indent="0">
-              <a:buNone/>
-            </a:pPr>
-            <a:r>
-              <a:rPr lang="en-SG" dirty="0"/>
-              <a:t>It can typically be done by making sure the model is not too complex for the data, but many other approaches exist. </a:t>
-            </a:r>
-          </a:p>
-        </p:txBody>
-      </p:sp>
-      <p:sp>
-        <p:nvSpPr>
-          <p:cNvPr id="4" name="Content Placeholder 3">
-            <a:extLst>
-              <a:ext uri="{FF2B5EF4-FFF2-40B4-BE49-F238E27FC236}">
-                <a16:creationId xmlns:a16="http://schemas.microsoft.com/office/drawing/2014/main" id="{5E76589E-870E-419D-CF95-4309EACDB190}"/>
-              </a:ext>
-            </a:extLst>
-          </p:cNvPr>
-          <p:cNvSpPr>
-            <a:spLocks noGrp="1"/>
-          </p:cNvSpPr>
-          <p:nvPr>
-            <p:ph sz="half" idx="2"/>
-          </p:nvPr>
-        </p:nvSpPr>
-        <p:spPr>
-          <a:xfrm>
-            <a:off x="6172200" y="1825624"/>
-            <a:ext cx="5181600" cy="5032375"/>
-          </a:xfrm>
-        </p:spPr>
-        <p:txBody>
-          <a:bodyPr>
-            <a:normAutofit/>
-          </a:bodyPr>
-          <a:lstStyle/>
-          <a:p>
-            <a:pPr marL="0" indent="0">
-              <a:buNone/>
-            </a:pPr>
-            <a:r>
-              <a:rPr lang="en-GB" dirty="0"/>
-              <a:t>In general,</a:t>
-            </a:r>
-          </a:p>
-          <a:p>
-            <a:r>
-              <a:rPr lang="en-GB" b="1" dirty="0"/>
-              <a:t>Scale model and dataset complexity: </a:t>
-            </a:r>
-            <a:r>
-              <a:rPr lang="en-GB" dirty="0"/>
-              <a:t>the more complex the data is (in terms of features), the more complex the model can/should be.</a:t>
-            </a:r>
-          </a:p>
-          <a:p>
-            <a:r>
-              <a:rPr lang="en-GB" b="1" dirty="0"/>
-              <a:t>Scale model and dataset size: </a:t>
-            </a:r>
-            <a:r>
-              <a:rPr lang="en-GB" dirty="0"/>
-              <a:t>the more data you have (in terms of quantity of individual samples in dataset), the more complex the model can be.</a:t>
-            </a:r>
-            <a:endParaRPr lang="en-SG" dirty="0"/>
-          </a:p>
-          <a:p>
-            <a:endParaRPr lang="en-SG" b="1" dirty="0"/>
-          </a:p>
-        </p:txBody>
-      </p:sp>
-    </p:spTree>
-    <p:extLst>
-      <p:ext uri="{BB962C8B-B14F-4D97-AF65-F5344CB8AC3E}">
-        <p14:creationId xmlns:p14="http://schemas.microsoft.com/office/powerpoint/2010/main" val="1377302654"/>
-      </p:ext>
-    </p:extLst>
-  </p:cSld>
-  <p:clrMapOvr>
-    <a:masterClrMapping/>
-  </p:clrMapOvr>
-</p:sld>
-</file>
-
-<file path=ppt/slides/slide39.xml><?xml version="1.0" encoding="utf-8"?>
-<p:sld xmlns:a="http://schemas.openxmlformats.org/drawingml/2006/main" xmlns:r="http://schemas.openxmlformats.org/officeDocument/2006/relationships" xmlns:p="http://schemas.openxmlformats.org/presentationml/2006/main">
-  <p:cSld>
-    <p:spTree>
-      <p:nvGrpSpPr>
-        <p:cNvPr id="1" name=""/>
-        <p:cNvGrpSpPr/>
-        <p:nvPr/>
-      </p:nvGrpSpPr>
-      <p:grpSpPr>
-        <a:xfrm>
-          <a:off x="0" y="0"/>
-          <a:ext cx="0" cy="0"/>
-          <a:chOff x="0" y="0"/>
-          <a:chExt cx="0" cy="0"/>
-        </a:xfrm>
-      </p:grpSpPr>
-      <p:sp>
-        <p:nvSpPr>
-          <p:cNvPr id="2" name="Title 1">
-            <a:extLst>
-              <a:ext uri="{FF2B5EF4-FFF2-40B4-BE49-F238E27FC236}">
-                <a16:creationId xmlns:a16="http://schemas.microsoft.com/office/drawing/2014/main" id="{1D3B68C2-4970-4C7E-1F52-6140F374C9AD}"/>
-              </a:ext>
-            </a:extLst>
-          </p:cNvPr>
-          <p:cNvSpPr>
-            <a:spLocks noGrp="1"/>
-          </p:cNvSpPr>
-          <p:nvPr>
-            <p:ph type="title"/>
-          </p:nvPr>
-        </p:nvSpPr>
-        <p:spPr/>
-        <p:txBody>
-          <a:bodyPr/>
-          <a:lstStyle/>
-          <a:p>
-            <a:r>
-              <a:rPr lang="en-GB" dirty="0"/>
-              <a:t>Regularization</a:t>
-            </a:r>
-            <a:endParaRPr lang="en-SG" dirty="0"/>
-          </a:p>
-        </p:txBody>
-      </p:sp>
-      <p:sp>
-        <p:nvSpPr>
-          <p:cNvPr id="3" name="Content Placeholder 2">
-            <a:extLst>
-              <a:ext uri="{FF2B5EF4-FFF2-40B4-BE49-F238E27FC236}">
-                <a16:creationId xmlns:a16="http://schemas.microsoft.com/office/drawing/2014/main" id="{7BDE96C0-465C-7952-04EA-C267AC8BF678}"/>
-              </a:ext>
-            </a:extLst>
-          </p:cNvPr>
-          <p:cNvSpPr>
-            <a:spLocks noGrp="1"/>
-          </p:cNvSpPr>
-          <p:nvPr>
-            <p:ph sz="half" idx="1"/>
-          </p:nvPr>
-        </p:nvSpPr>
-        <p:spPr/>
-        <p:txBody>
           <a:bodyPr/>
           <a:lstStyle/>
           <a:p>
@@ -11275,334 +11035,7 @@
 </p:sld>
 </file>
 
-<file path=ppt/slides/slide4.xml><?xml version="1.0" encoding="utf-8"?>
-<p:sld xmlns:a="http://schemas.openxmlformats.org/drawingml/2006/main" xmlns:r="http://schemas.openxmlformats.org/officeDocument/2006/relationships" xmlns:p="http://schemas.openxmlformats.org/presentationml/2006/main">
-  <p:cSld>
-    <p:spTree>
-      <p:nvGrpSpPr>
-        <p:cNvPr id="1" name=""/>
-        <p:cNvGrpSpPr/>
-        <p:nvPr/>
-      </p:nvGrpSpPr>
-      <p:grpSpPr>
-        <a:xfrm>
-          <a:off x="0" y="0"/>
-          <a:ext cx="0" cy="0"/>
-          <a:chOff x="0" y="0"/>
-          <a:chExt cx="0" cy="0"/>
-        </a:xfrm>
-      </p:grpSpPr>
-      <p:sp>
-        <p:nvSpPr>
-          <p:cNvPr id="2" name="Title 1">
-            <a:extLst>
-              <a:ext uri="{FF2B5EF4-FFF2-40B4-BE49-F238E27FC236}">
-                <a16:creationId xmlns:a16="http://schemas.microsoft.com/office/drawing/2014/main" id="{49D40417-A4D3-4CE8-96E7-708E2439AE7B}"/>
-              </a:ext>
-            </a:extLst>
-          </p:cNvPr>
-          <p:cNvSpPr>
-            <a:spLocks noGrp="1"/>
-          </p:cNvSpPr>
-          <p:nvPr>
-            <p:ph type="title"/>
-          </p:nvPr>
-        </p:nvSpPr>
-        <p:spPr/>
-        <p:txBody>
-          <a:bodyPr/>
-          <a:lstStyle/>
-          <a:p>
-            <a:r>
-              <a:rPr lang="en-US" dirty="0"/>
-              <a:t>About this week (Week 1)</a:t>
-            </a:r>
-            <a:endParaRPr lang="en-GB" dirty="0"/>
-          </a:p>
-        </p:txBody>
-      </p:sp>
-      <p:sp>
-        <p:nvSpPr>
-          <p:cNvPr id="3" name="Content Placeholder 2">
-            <a:extLst>
-              <a:ext uri="{FF2B5EF4-FFF2-40B4-BE49-F238E27FC236}">
-                <a16:creationId xmlns:a16="http://schemas.microsoft.com/office/drawing/2014/main" id="{35995840-A9D9-479A-A34F-EA7DC229D38E}"/>
-              </a:ext>
-            </a:extLst>
-          </p:cNvPr>
-          <p:cNvSpPr>
-            <a:spLocks noGrp="1"/>
-          </p:cNvSpPr>
-          <p:nvPr>
-            <p:ph idx="1"/>
-          </p:nvPr>
-        </p:nvSpPr>
-        <p:spPr>
-          <a:xfrm>
-            <a:off x="838200" y="1825625"/>
-            <a:ext cx="10515600" cy="4827102"/>
-          </a:xfrm>
-        </p:spPr>
-        <p:txBody>
-          <a:bodyPr/>
-          <a:lstStyle/>
-          <a:p>
-            <a:pPr marL="514350" indent="-514350">
-              <a:buFont typeface="+mj-lt"/>
-              <a:buAutoNum type="arabicPeriod" startAt="14"/>
-            </a:pPr>
-            <a:r>
-              <a:rPr lang="en-US" dirty="0"/>
-              <a:t>What are </a:t>
-            </a:r>
-            <a:r>
-              <a:rPr lang="en-US" b="1" dirty="0"/>
-              <a:t>Neural</a:t>
-            </a:r>
-            <a:r>
-              <a:rPr lang="en-US" dirty="0"/>
-              <a:t> </a:t>
-            </a:r>
-            <a:r>
-              <a:rPr lang="en-US" b="1" dirty="0"/>
-              <a:t>Networks</a:t>
-            </a:r>
-            <a:r>
-              <a:rPr lang="en-US" dirty="0"/>
-              <a:t> and how do they relate to the </a:t>
-            </a:r>
-            <a:r>
-              <a:rPr lang="en-US" b="1" dirty="0"/>
-              <a:t>biology</a:t>
-            </a:r>
-            <a:r>
-              <a:rPr lang="en-US" dirty="0"/>
-              <a:t> </a:t>
-            </a:r>
-            <a:r>
-              <a:rPr lang="en-US" b="1" dirty="0"/>
-              <a:t>of a</a:t>
-            </a:r>
-            <a:r>
-              <a:rPr lang="en-US" dirty="0"/>
-              <a:t> </a:t>
-            </a:r>
-            <a:r>
-              <a:rPr lang="en-US" b="1" dirty="0"/>
-              <a:t>human</a:t>
-            </a:r>
-            <a:r>
-              <a:rPr lang="en-US" dirty="0"/>
-              <a:t> </a:t>
-            </a:r>
-            <a:r>
-              <a:rPr lang="en-US" b="1" dirty="0"/>
-              <a:t>brain</a:t>
-            </a:r>
-            <a:r>
-              <a:rPr lang="en-US" dirty="0"/>
-              <a:t>?</a:t>
-            </a:r>
-          </a:p>
-          <a:p>
-            <a:pPr marL="514350" indent="-514350">
-              <a:buFont typeface="+mj-lt"/>
-              <a:buAutoNum type="arabicPeriod" startAt="14"/>
-            </a:pPr>
-            <a:r>
-              <a:rPr lang="en-US" dirty="0"/>
-              <a:t>What is a </a:t>
-            </a:r>
-            <a:r>
-              <a:rPr lang="en-US" b="1" dirty="0"/>
-              <a:t>Neuron</a:t>
-            </a:r>
-            <a:r>
-              <a:rPr lang="en-US" dirty="0"/>
-              <a:t> in a Neural Network and how does it relate to linear/logistic regression?</a:t>
-            </a:r>
-          </a:p>
-          <a:p>
-            <a:pPr marL="514350" indent="-514350">
-              <a:buFont typeface="+mj-lt"/>
-              <a:buAutoNum type="arabicPeriod" startAt="14"/>
-            </a:pPr>
-            <a:r>
-              <a:rPr lang="en-US" dirty="0"/>
-              <a:t>What is the </a:t>
-            </a:r>
-            <a:r>
-              <a:rPr lang="en-US" b="1" dirty="0"/>
-              <a:t>difference</a:t>
-            </a:r>
-            <a:r>
-              <a:rPr lang="en-US" dirty="0"/>
-              <a:t> between a </a:t>
-            </a:r>
-            <a:r>
-              <a:rPr lang="en-US" b="1" dirty="0"/>
-              <a:t>shallow</a:t>
-            </a:r>
-            <a:r>
-              <a:rPr lang="en-US" dirty="0"/>
-              <a:t> and a </a:t>
-            </a:r>
-            <a:r>
-              <a:rPr lang="en-US" b="1" dirty="0"/>
-              <a:t>deep neural network</a:t>
-            </a:r>
-            <a:r>
-              <a:rPr lang="en-US" dirty="0"/>
-              <a:t>?</a:t>
-            </a:r>
-          </a:p>
-          <a:p>
-            <a:pPr marL="514350" indent="-514350">
-              <a:buFont typeface="+mj-lt"/>
-              <a:buAutoNum type="arabicPeriod" startAt="14"/>
-            </a:pPr>
-            <a:r>
-              <a:rPr lang="en-US" dirty="0"/>
-              <a:t>How to </a:t>
-            </a:r>
-            <a:r>
-              <a:rPr lang="en-US" b="1" dirty="0"/>
-              <a:t>implement</a:t>
-            </a:r>
-            <a:r>
-              <a:rPr lang="en-US" dirty="0"/>
-              <a:t> </a:t>
-            </a:r>
-            <a:r>
-              <a:rPr lang="en-US" b="1" dirty="0"/>
-              <a:t>a</a:t>
-            </a:r>
-            <a:r>
-              <a:rPr lang="en-US" dirty="0"/>
-              <a:t> </a:t>
-            </a:r>
-            <a:r>
-              <a:rPr lang="en-US" b="1" dirty="0"/>
-              <a:t>shallow</a:t>
-            </a:r>
-            <a:r>
-              <a:rPr lang="en-US" dirty="0"/>
-              <a:t> </a:t>
-            </a:r>
-            <a:r>
-              <a:rPr lang="en-US" b="1" dirty="0"/>
-              <a:t>Neural</a:t>
-            </a:r>
-            <a:r>
-              <a:rPr lang="en-US" dirty="0"/>
-              <a:t> </a:t>
-            </a:r>
-            <a:r>
-              <a:rPr lang="en-US" b="1" dirty="0"/>
-              <a:t>Network</a:t>
-            </a:r>
-            <a:r>
-              <a:rPr lang="en-US" dirty="0"/>
-              <a:t> manually and define a </a:t>
-            </a:r>
-            <a:r>
-              <a:rPr lang="en-US" b="1" dirty="0"/>
-              <a:t>forward</a:t>
-            </a:r>
-            <a:r>
-              <a:rPr lang="en-US" dirty="0"/>
-              <a:t> </a:t>
-            </a:r>
-            <a:r>
-              <a:rPr lang="en-US" b="1" dirty="0"/>
-              <a:t>propagation</a:t>
-            </a:r>
-            <a:r>
-              <a:rPr lang="en-US" dirty="0"/>
-              <a:t> method for it?</a:t>
-            </a:r>
-          </a:p>
-          <a:p>
-            <a:pPr marL="514350" indent="-514350">
-              <a:buFont typeface="+mj-lt"/>
-              <a:buAutoNum type="arabicPeriod" startAt="14"/>
-            </a:pPr>
-            <a:r>
-              <a:rPr lang="en-US" dirty="0"/>
-              <a:t>How to </a:t>
-            </a:r>
-            <a:r>
-              <a:rPr lang="en-US" b="1" dirty="0"/>
-              <a:t>train</a:t>
-            </a:r>
-            <a:r>
-              <a:rPr lang="en-US" dirty="0"/>
-              <a:t> </a:t>
-            </a:r>
-            <a:r>
-              <a:rPr lang="en-US" b="1" dirty="0"/>
-              <a:t>a shallow Neural Network </a:t>
-            </a:r>
-            <a:r>
-              <a:rPr lang="en-US" dirty="0"/>
-              <a:t>using </a:t>
-            </a:r>
-            <a:r>
-              <a:rPr lang="en-US" b="1" dirty="0"/>
-              <a:t>backpropagation</a:t>
-            </a:r>
-            <a:r>
-              <a:rPr lang="en-US" dirty="0"/>
-              <a:t>? How to define </a:t>
-            </a:r>
-            <a:r>
-              <a:rPr lang="en-US" b="1" dirty="0"/>
-              <a:t>backward</a:t>
-            </a:r>
-            <a:r>
-              <a:rPr lang="en-US" dirty="0"/>
-              <a:t> </a:t>
-            </a:r>
-            <a:r>
-              <a:rPr lang="en-US" b="1" dirty="0"/>
-              <a:t>propagation</a:t>
-            </a:r>
-            <a:r>
-              <a:rPr lang="en-US" dirty="0"/>
-              <a:t> and </a:t>
-            </a:r>
-            <a:r>
-              <a:rPr lang="en-US" b="1" dirty="0"/>
-              <a:t>trainer</a:t>
-            </a:r>
-            <a:r>
-              <a:rPr lang="en-US" dirty="0"/>
-              <a:t> functions?</a:t>
-            </a:r>
-          </a:p>
-          <a:p>
-            <a:pPr marL="514350" indent="-514350">
-              <a:buFont typeface="+mj-lt"/>
-              <a:buAutoNum type="arabicPeriod" startAt="14"/>
-            </a:pPr>
-            <a:endParaRPr lang="en-GB" dirty="0"/>
-          </a:p>
-        </p:txBody>
-      </p:sp>
-    </p:spTree>
-    <p:extLst>
-      <p:ext uri="{BB962C8B-B14F-4D97-AF65-F5344CB8AC3E}">
-        <p14:creationId xmlns:p14="http://schemas.microsoft.com/office/powerpoint/2010/main" val="3190584464"/>
-      </p:ext>
-    </p:extLst>
-  </p:cSld>
-  <p:clrMapOvr>
-    <a:masterClrMapping/>
-  </p:clrMapOvr>
-</p:sld>
-</file>
-
-<file path=ppt/slides/slide40.xml><?xml version="1.0" encoding="utf-8"?>
+<file path=ppt/slides/slide39.xml><?xml version="1.0" encoding="utf-8"?>
 <p:sld xmlns:a="http://schemas.openxmlformats.org/drawingml/2006/main" xmlns:r="http://schemas.openxmlformats.org/officeDocument/2006/relationships" xmlns:p="http://schemas.openxmlformats.org/presentationml/2006/main">
   <p:cSld>
     <p:spTree>
@@ -12307,7 +11740,334 @@
 </p:sld>
 </file>
 
-<file path=ppt/slides/slide41.xml><?xml version="1.0" encoding="utf-8"?>
+<file path=ppt/slides/slide4.xml><?xml version="1.0" encoding="utf-8"?>
+<p:sld xmlns:a="http://schemas.openxmlformats.org/drawingml/2006/main" xmlns:r="http://schemas.openxmlformats.org/officeDocument/2006/relationships" xmlns:p="http://schemas.openxmlformats.org/presentationml/2006/main">
+  <p:cSld>
+    <p:spTree>
+      <p:nvGrpSpPr>
+        <p:cNvPr id="1" name=""/>
+        <p:cNvGrpSpPr/>
+        <p:nvPr/>
+      </p:nvGrpSpPr>
+      <p:grpSpPr>
+        <a:xfrm>
+          <a:off x="0" y="0"/>
+          <a:ext cx="0" cy="0"/>
+          <a:chOff x="0" y="0"/>
+          <a:chExt cx="0" cy="0"/>
+        </a:xfrm>
+      </p:grpSpPr>
+      <p:sp>
+        <p:nvSpPr>
+          <p:cNvPr id="2" name="Title 1">
+            <a:extLst>
+              <a:ext uri="{FF2B5EF4-FFF2-40B4-BE49-F238E27FC236}">
+                <a16:creationId xmlns:a16="http://schemas.microsoft.com/office/drawing/2014/main" id="{49D40417-A4D3-4CE8-96E7-708E2439AE7B}"/>
+              </a:ext>
+            </a:extLst>
+          </p:cNvPr>
+          <p:cNvSpPr>
+            <a:spLocks noGrp="1"/>
+          </p:cNvSpPr>
+          <p:nvPr>
+            <p:ph type="title"/>
+          </p:nvPr>
+        </p:nvSpPr>
+        <p:spPr/>
+        <p:txBody>
+          <a:bodyPr/>
+          <a:lstStyle/>
+          <a:p>
+            <a:r>
+              <a:rPr lang="en-US" dirty="0"/>
+              <a:t>About this week (Week 1)</a:t>
+            </a:r>
+            <a:endParaRPr lang="en-GB" dirty="0"/>
+          </a:p>
+        </p:txBody>
+      </p:sp>
+      <p:sp>
+        <p:nvSpPr>
+          <p:cNvPr id="3" name="Content Placeholder 2">
+            <a:extLst>
+              <a:ext uri="{FF2B5EF4-FFF2-40B4-BE49-F238E27FC236}">
+                <a16:creationId xmlns:a16="http://schemas.microsoft.com/office/drawing/2014/main" id="{35995840-A9D9-479A-A34F-EA7DC229D38E}"/>
+              </a:ext>
+            </a:extLst>
+          </p:cNvPr>
+          <p:cNvSpPr>
+            <a:spLocks noGrp="1"/>
+          </p:cNvSpPr>
+          <p:nvPr>
+            <p:ph idx="1"/>
+          </p:nvPr>
+        </p:nvSpPr>
+        <p:spPr>
+          <a:xfrm>
+            <a:off x="838200" y="1825625"/>
+            <a:ext cx="10515600" cy="4827102"/>
+          </a:xfrm>
+        </p:spPr>
+        <p:txBody>
+          <a:bodyPr/>
+          <a:lstStyle/>
+          <a:p>
+            <a:pPr marL="514350" indent="-514350">
+              <a:buFont typeface="+mj-lt"/>
+              <a:buAutoNum type="arabicPeriod" startAt="14"/>
+            </a:pPr>
+            <a:r>
+              <a:rPr lang="en-US" dirty="0"/>
+              <a:t>What are </a:t>
+            </a:r>
+            <a:r>
+              <a:rPr lang="en-US" b="1" dirty="0"/>
+              <a:t>Neural</a:t>
+            </a:r>
+            <a:r>
+              <a:rPr lang="en-US" dirty="0"/>
+              <a:t> </a:t>
+            </a:r>
+            <a:r>
+              <a:rPr lang="en-US" b="1" dirty="0"/>
+              <a:t>Networks</a:t>
+            </a:r>
+            <a:r>
+              <a:rPr lang="en-US" dirty="0"/>
+              <a:t> and how do they relate to the </a:t>
+            </a:r>
+            <a:r>
+              <a:rPr lang="en-US" b="1" dirty="0"/>
+              <a:t>biology</a:t>
+            </a:r>
+            <a:r>
+              <a:rPr lang="en-US" dirty="0"/>
+              <a:t> </a:t>
+            </a:r>
+            <a:r>
+              <a:rPr lang="en-US" b="1" dirty="0"/>
+              <a:t>of a</a:t>
+            </a:r>
+            <a:r>
+              <a:rPr lang="en-US" dirty="0"/>
+              <a:t> </a:t>
+            </a:r>
+            <a:r>
+              <a:rPr lang="en-US" b="1" dirty="0"/>
+              <a:t>human</a:t>
+            </a:r>
+            <a:r>
+              <a:rPr lang="en-US" dirty="0"/>
+              <a:t> </a:t>
+            </a:r>
+            <a:r>
+              <a:rPr lang="en-US" b="1" dirty="0"/>
+              <a:t>brain</a:t>
+            </a:r>
+            <a:r>
+              <a:rPr lang="en-US" dirty="0"/>
+              <a:t>?</a:t>
+            </a:r>
+          </a:p>
+          <a:p>
+            <a:pPr marL="514350" indent="-514350">
+              <a:buFont typeface="+mj-lt"/>
+              <a:buAutoNum type="arabicPeriod" startAt="14"/>
+            </a:pPr>
+            <a:r>
+              <a:rPr lang="en-US" dirty="0"/>
+              <a:t>What is a </a:t>
+            </a:r>
+            <a:r>
+              <a:rPr lang="en-US" b="1" dirty="0"/>
+              <a:t>Neuron</a:t>
+            </a:r>
+            <a:r>
+              <a:rPr lang="en-US" dirty="0"/>
+              <a:t> in a Neural Network and how does it relate to linear/logistic regression?</a:t>
+            </a:r>
+          </a:p>
+          <a:p>
+            <a:pPr marL="514350" indent="-514350">
+              <a:buFont typeface="+mj-lt"/>
+              <a:buAutoNum type="arabicPeriod" startAt="14"/>
+            </a:pPr>
+            <a:r>
+              <a:rPr lang="en-US" dirty="0"/>
+              <a:t>What is the </a:t>
+            </a:r>
+            <a:r>
+              <a:rPr lang="en-US" b="1" dirty="0"/>
+              <a:t>difference</a:t>
+            </a:r>
+            <a:r>
+              <a:rPr lang="en-US" dirty="0"/>
+              <a:t> between a </a:t>
+            </a:r>
+            <a:r>
+              <a:rPr lang="en-US" b="1" dirty="0"/>
+              <a:t>shallow</a:t>
+            </a:r>
+            <a:r>
+              <a:rPr lang="en-US" dirty="0"/>
+              <a:t> and a </a:t>
+            </a:r>
+            <a:r>
+              <a:rPr lang="en-US" b="1" dirty="0"/>
+              <a:t>deep neural network</a:t>
+            </a:r>
+            <a:r>
+              <a:rPr lang="en-US" dirty="0"/>
+              <a:t>?</a:t>
+            </a:r>
+          </a:p>
+          <a:p>
+            <a:pPr marL="514350" indent="-514350">
+              <a:buFont typeface="+mj-lt"/>
+              <a:buAutoNum type="arabicPeriod" startAt="14"/>
+            </a:pPr>
+            <a:r>
+              <a:rPr lang="en-US" dirty="0"/>
+              <a:t>How to </a:t>
+            </a:r>
+            <a:r>
+              <a:rPr lang="en-US" b="1" dirty="0"/>
+              <a:t>implement</a:t>
+            </a:r>
+            <a:r>
+              <a:rPr lang="en-US" dirty="0"/>
+              <a:t> </a:t>
+            </a:r>
+            <a:r>
+              <a:rPr lang="en-US" b="1" dirty="0"/>
+              <a:t>a</a:t>
+            </a:r>
+            <a:r>
+              <a:rPr lang="en-US" dirty="0"/>
+              <a:t> </a:t>
+            </a:r>
+            <a:r>
+              <a:rPr lang="en-US" b="1" dirty="0"/>
+              <a:t>shallow</a:t>
+            </a:r>
+            <a:r>
+              <a:rPr lang="en-US" dirty="0"/>
+              <a:t> </a:t>
+            </a:r>
+            <a:r>
+              <a:rPr lang="en-US" b="1" dirty="0"/>
+              <a:t>Neural</a:t>
+            </a:r>
+            <a:r>
+              <a:rPr lang="en-US" dirty="0"/>
+              <a:t> </a:t>
+            </a:r>
+            <a:r>
+              <a:rPr lang="en-US" b="1" dirty="0"/>
+              <a:t>Network</a:t>
+            </a:r>
+            <a:r>
+              <a:rPr lang="en-US" dirty="0"/>
+              <a:t> manually and define a </a:t>
+            </a:r>
+            <a:r>
+              <a:rPr lang="en-US" b="1" dirty="0"/>
+              <a:t>forward</a:t>
+            </a:r>
+            <a:r>
+              <a:rPr lang="en-US" dirty="0"/>
+              <a:t> </a:t>
+            </a:r>
+            <a:r>
+              <a:rPr lang="en-US" b="1" dirty="0"/>
+              <a:t>propagation</a:t>
+            </a:r>
+            <a:r>
+              <a:rPr lang="en-US" dirty="0"/>
+              <a:t> method for it?</a:t>
+            </a:r>
+          </a:p>
+          <a:p>
+            <a:pPr marL="514350" indent="-514350">
+              <a:buFont typeface="+mj-lt"/>
+              <a:buAutoNum type="arabicPeriod" startAt="14"/>
+            </a:pPr>
+            <a:r>
+              <a:rPr lang="en-US" dirty="0"/>
+              <a:t>How to </a:t>
+            </a:r>
+            <a:r>
+              <a:rPr lang="en-US" b="1" dirty="0"/>
+              <a:t>train</a:t>
+            </a:r>
+            <a:r>
+              <a:rPr lang="en-US" dirty="0"/>
+              <a:t> </a:t>
+            </a:r>
+            <a:r>
+              <a:rPr lang="en-US" b="1" dirty="0"/>
+              <a:t>a shallow Neural Network </a:t>
+            </a:r>
+            <a:r>
+              <a:rPr lang="en-US" dirty="0"/>
+              <a:t>using </a:t>
+            </a:r>
+            <a:r>
+              <a:rPr lang="en-US" b="1" dirty="0"/>
+              <a:t>backpropagation</a:t>
+            </a:r>
+            <a:r>
+              <a:rPr lang="en-US" dirty="0"/>
+              <a:t>? How to define </a:t>
+            </a:r>
+            <a:r>
+              <a:rPr lang="en-US" b="1" dirty="0"/>
+              <a:t>backward</a:t>
+            </a:r>
+            <a:r>
+              <a:rPr lang="en-US" dirty="0"/>
+              <a:t> </a:t>
+            </a:r>
+            <a:r>
+              <a:rPr lang="en-US" b="1" dirty="0"/>
+              <a:t>propagation</a:t>
+            </a:r>
+            <a:r>
+              <a:rPr lang="en-US" dirty="0"/>
+              <a:t> and </a:t>
+            </a:r>
+            <a:r>
+              <a:rPr lang="en-US" b="1" dirty="0"/>
+              <a:t>trainer</a:t>
+            </a:r>
+            <a:r>
+              <a:rPr lang="en-US" dirty="0"/>
+              <a:t> functions?</a:t>
+            </a:r>
+          </a:p>
+          <a:p>
+            <a:pPr marL="514350" indent="-514350">
+              <a:buFont typeface="+mj-lt"/>
+              <a:buAutoNum type="arabicPeriod" startAt="14"/>
+            </a:pPr>
+            <a:endParaRPr lang="en-GB" dirty="0"/>
+          </a:p>
+        </p:txBody>
+      </p:sp>
+    </p:spTree>
+    <p:extLst>
+      <p:ext uri="{BB962C8B-B14F-4D97-AF65-F5344CB8AC3E}">
+        <p14:creationId xmlns:p14="http://schemas.microsoft.com/office/powerpoint/2010/main" val="3190584464"/>
+      </p:ext>
+    </p:extLst>
+  </p:cSld>
+  <p:clrMapOvr>
+    <a:masterClrMapping/>
+  </p:clrMapOvr>
+</p:sld>
+</file>
+
+<file path=ppt/slides/slide40.xml><?xml version="1.0" encoding="utf-8"?>
 <p:sld xmlns:a="http://schemas.openxmlformats.org/drawingml/2006/main" xmlns:r="http://schemas.openxmlformats.org/officeDocument/2006/relationships" xmlns:p="http://schemas.openxmlformats.org/presentationml/2006/main">
   <p:cSld>
     <p:spTree>
@@ -12647,7 +12407,7 @@
 </p:sld>
 </file>
 
-<file path=ppt/slides/slide42.xml><?xml version="1.0" encoding="utf-8"?>
+<file path=ppt/slides/slide41.xml><?xml version="1.0" encoding="utf-8"?>
 <p:sld xmlns:a="http://schemas.openxmlformats.org/drawingml/2006/main" xmlns:r="http://schemas.openxmlformats.org/officeDocument/2006/relationships" xmlns:p="http://schemas.openxmlformats.org/presentationml/2006/main">
   <p:cSld>
     <p:spTree>
@@ -12707,7 +12467,7 @@
 </p:sld>
 </file>
 
-<file path=ppt/slides/slide43.xml><?xml version="1.0" encoding="utf-8"?>
+<file path=ppt/slides/slide42.xml><?xml version="1.0" encoding="utf-8"?>
 <p:sld xmlns:a="http://schemas.openxmlformats.org/drawingml/2006/main" xmlns:r="http://schemas.openxmlformats.org/officeDocument/2006/relationships" xmlns:p="http://schemas.openxmlformats.org/presentationml/2006/main">
   <p:cSld>
     <p:spTree>
@@ -12937,6 +12697,193 @@
 </p:sld>
 </file>
 
+<file path=ppt/slides/slide43.xml><?xml version="1.0" encoding="utf-8"?>
+<p:sld xmlns:a="http://schemas.openxmlformats.org/drawingml/2006/main" xmlns:r="http://schemas.openxmlformats.org/officeDocument/2006/relationships" xmlns:p="http://schemas.openxmlformats.org/presentationml/2006/main">
+  <p:cSld>
+    <p:spTree>
+      <p:nvGrpSpPr>
+        <p:cNvPr id="1" name=""/>
+        <p:cNvGrpSpPr/>
+        <p:nvPr/>
+      </p:nvGrpSpPr>
+      <p:grpSpPr>
+        <a:xfrm>
+          <a:off x="0" y="0"/>
+          <a:ext cx="0" cy="0"/>
+          <a:chOff x="0" y="0"/>
+          <a:chExt cx="0" cy="0"/>
+        </a:xfrm>
+      </p:grpSpPr>
+      <p:sp>
+        <p:nvSpPr>
+          <p:cNvPr id="2" name="Title 1">
+            <a:extLst>
+              <a:ext uri="{FF2B5EF4-FFF2-40B4-BE49-F238E27FC236}">
+                <a16:creationId xmlns:a16="http://schemas.microsoft.com/office/drawing/2014/main" id="{1D3B68C2-4970-4C7E-1F52-6140F374C9AD}"/>
+              </a:ext>
+            </a:extLst>
+          </p:cNvPr>
+          <p:cNvSpPr>
+            <a:spLocks noGrp="1"/>
+          </p:cNvSpPr>
+          <p:nvPr>
+            <p:ph type="title"/>
+          </p:nvPr>
+        </p:nvSpPr>
+        <p:spPr/>
+        <p:txBody>
+          <a:bodyPr/>
+          <a:lstStyle/>
+          <a:p>
+            <a:r>
+              <a:rPr lang="en-GB" dirty="0"/>
+              <a:t>Regularization with other things than L2?</a:t>
+            </a:r>
+            <a:endParaRPr lang="en-SG" dirty="0"/>
+          </a:p>
+        </p:txBody>
+      </p:sp>
+      <p:sp>
+        <p:nvSpPr>
+          <p:cNvPr id="6" name="Content Placeholder 5">
+            <a:extLst>
+              <a:ext uri="{FF2B5EF4-FFF2-40B4-BE49-F238E27FC236}">
+                <a16:creationId xmlns:a16="http://schemas.microsoft.com/office/drawing/2014/main" id="{035BA096-4E67-B5D5-DBD3-F226777FADC7}"/>
+              </a:ext>
+            </a:extLst>
+          </p:cNvPr>
+          <p:cNvSpPr>
+            <a:spLocks noGrp="1"/>
+          </p:cNvSpPr>
+          <p:nvPr>
+            <p:ph idx="1"/>
+          </p:nvPr>
+        </p:nvSpPr>
+        <p:spPr>
+          <a:xfrm>
+            <a:off x="838200" y="1825624"/>
+            <a:ext cx="10515600" cy="5032375"/>
+          </a:xfrm>
+        </p:spPr>
+        <p:txBody>
+          <a:bodyPr>
+            <a:normAutofit/>
+          </a:bodyPr>
+          <a:lstStyle/>
+          <a:p>
+            <a:pPr marL="0" indent="0">
+              <a:buNone/>
+            </a:pPr>
+            <a:r>
+              <a:rPr lang="en-GB"/>
+              <a:t>Also possible </a:t>
+            </a:r>
+            <a:r>
+              <a:rPr lang="en-GB" dirty="0"/>
+              <a:t>to use the sum of </a:t>
+            </a:r>
+            <a:r>
+              <a:rPr lang="en-GB" b="1" u="sng" dirty="0"/>
+              <a:t>absolute</a:t>
+            </a:r>
+            <a:r>
+              <a:rPr lang="en-GB" dirty="0"/>
+              <a:t> values (or what we call a L1 regularization), making a </a:t>
+            </a:r>
+            <a:r>
+              <a:rPr lang="en-GB" b="1" dirty="0">
+                <a:solidFill>
+                  <a:srgbClr val="00B050"/>
+                </a:solidFill>
+              </a:rPr>
+              <a:t>Lasso Regressor </a:t>
+            </a:r>
+            <a:r>
+              <a:rPr lang="en-GB" dirty="0"/>
+              <a:t>instead of a </a:t>
+            </a:r>
+            <a:r>
+              <a:rPr lang="en-GB" b="1" dirty="0">
+                <a:solidFill>
+                  <a:srgbClr val="00B050"/>
+                </a:solidFill>
+              </a:rPr>
+              <a:t>Ridge Regressor</a:t>
+            </a:r>
+            <a:r>
+              <a:rPr lang="en-GB" dirty="0"/>
+              <a:t>.</a:t>
+            </a:r>
+            <a:endParaRPr lang="en-GB" b="1" dirty="0"/>
+          </a:p>
+          <a:p>
+            <a:pPr marL="0" indent="0">
+              <a:buNone/>
+            </a:pPr>
+            <a:r>
+              <a:rPr lang="en-GB" b="1" dirty="0"/>
+              <a:t>Why use L1 regularization over L2 regularization?</a:t>
+            </a:r>
+          </a:p>
+          <a:p>
+            <a:r>
+              <a:rPr lang="en-GB" dirty="0"/>
+              <a:t>L1 regularization results in some weights being exactly equal to zero, which can be used for feature selection.</a:t>
+            </a:r>
+          </a:p>
+          <a:p>
+            <a:r>
+              <a:rPr lang="en-GB" dirty="0"/>
+              <a:t>L2 regularization will not produce sparse models, and it will only shrink the weights.</a:t>
+            </a:r>
+          </a:p>
+          <a:p>
+            <a:endParaRPr lang="en-GB" dirty="0"/>
+          </a:p>
+          <a:p>
+            <a:pPr marL="0" indent="0">
+              <a:buNone/>
+            </a:pPr>
+            <a:r>
+              <a:rPr lang="en-GB" b="1" dirty="0"/>
+              <a:t>Why prefer L1 over L2 (and vice versa)? </a:t>
+            </a:r>
+            <a:r>
+              <a:rPr lang="en-GB" dirty="0"/>
+              <a:t>Have a look at this, if curious!</a:t>
+            </a:r>
+            <a:br>
+              <a:rPr lang="en-GB" dirty="0"/>
+            </a:br>
+            <a:r>
+              <a:rPr lang="en-GB" dirty="0">
+                <a:hlinkClick r:id="rId2"/>
+              </a:rPr>
+              <a:t>https://medium.com/@fernando.dijkinga/explaining-l1-and-l2-regularization-in-machine-learning-2356ee91c8e3</a:t>
+            </a:r>
+            <a:r>
+              <a:rPr lang="en-GB" dirty="0"/>
+              <a:t> </a:t>
+            </a:r>
+          </a:p>
+          <a:p>
+            <a:endParaRPr lang="en-SG" dirty="0"/>
+          </a:p>
+        </p:txBody>
+      </p:sp>
+    </p:spTree>
+    <p:extLst>
+      <p:ext uri="{BB962C8B-B14F-4D97-AF65-F5344CB8AC3E}">
+        <p14:creationId xmlns:p14="http://schemas.microsoft.com/office/powerpoint/2010/main" val="1659504250"/>
+      </p:ext>
+    </p:extLst>
+  </p:cSld>
+  <p:clrMapOvr>
+    <a:masterClrMapping/>
+  </p:clrMapOvr>
+</p:sld>
+</file>
+
 <file path=ppt/slides/slide44.xml><?xml version="1.0" encoding="utf-8"?>
 <p:sld xmlns:a="http://schemas.openxmlformats.org/drawingml/2006/main" xmlns:r="http://schemas.openxmlformats.org/officeDocument/2006/relationships" xmlns:p="http://schemas.openxmlformats.org/presentationml/2006/main">
   <p:cSld>
@@ -12983,138 +12930,820 @@
           </a:p>
         </p:txBody>
       </p:sp>
+      <mc:AlternateContent xmlns:mc="http://schemas.openxmlformats.org/markup-compatibility/2006">
+        <mc:Choice xmlns:a14="http://schemas.microsoft.com/office/drawing/2010/main" Requires="a14">
+          <p:sp>
+            <p:nvSpPr>
+              <p:cNvPr id="6" name="Content Placeholder 5">
+                <a:extLst>
+                  <a:ext uri="{FF2B5EF4-FFF2-40B4-BE49-F238E27FC236}">
+                    <a16:creationId xmlns:a16="http://schemas.microsoft.com/office/drawing/2014/main" id="{035BA096-4E67-B5D5-DBD3-F226777FADC7}"/>
+                  </a:ext>
+                </a:extLst>
+              </p:cNvPr>
+              <p:cNvSpPr>
+                <a:spLocks noGrp="1"/>
+              </p:cNvSpPr>
+              <p:nvPr>
+                <p:ph idx="1"/>
+              </p:nvPr>
+            </p:nvSpPr>
+            <p:spPr>
+              <a:xfrm>
+                <a:off x="838199" y="1825625"/>
+                <a:ext cx="10929257" cy="4351338"/>
+              </a:xfrm>
+            </p:spPr>
+            <p:txBody>
+              <a:bodyPr>
+                <a:normAutofit/>
+              </a:bodyPr>
+              <a:lstStyle/>
+              <a:p>
+                <a:pPr marL="0" indent="0">
+                  <a:buNone/>
+                </a:pPr>
+                <a:r>
+                  <a:rPr lang="en-GB" dirty="0"/>
+                  <a:t>Also possible to use the sum of </a:t>
+                </a:r>
+                <a:r>
+                  <a:rPr lang="en-GB" b="1" u="sng" dirty="0"/>
+                  <a:t>absolute</a:t>
+                </a:r>
+                <a:r>
+                  <a:rPr lang="en-GB" dirty="0"/>
+                  <a:t> values </a:t>
+                </a:r>
+                <a:r>
+                  <a:rPr lang="en-GB" b="1" u="sng" dirty="0"/>
+                  <a:t>AND</a:t>
+                </a:r>
+                <a:r>
+                  <a:rPr lang="en-GB" dirty="0"/>
+                  <a:t> </a:t>
+                </a:r>
+                <a:r>
+                  <a:rPr lang="en-GB" b="1" u="sng" dirty="0"/>
+                  <a:t>squared</a:t>
+                </a:r>
+                <a:r>
+                  <a:rPr lang="en-GB" dirty="0"/>
+                  <a:t> values as regularization, i.e. combining the </a:t>
+                </a:r>
+                <a:r>
+                  <a:rPr lang="en-GB" b="1" dirty="0">
+                    <a:solidFill>
+                      <a:srgbClr val="7030A0"/>
+                    </a:solidFill>
+                  </a:rPr>
+                  <a:t>L1</a:t>
+                </a:r>
+                <a:r>
+                  <a:rPr lang="en-GB" dirty="0"/>
+                  <a:t> and </a:t>
+                </a:r>
+                <a:r>
+                  <a:rPr lang="en-GB" b="1" dirty="0">
+                    <a:solidFill>
+                      <a:srgbClr val="0070C0"/>
+                    </a:solidFill>
+                  </a:rPr>
+                  <a:t>L2</a:t>
+                </a:r>
+                <a:r>
+                  <a:rPr lang="en-GB" dirty="0"/>
+                  <a:t> regularizations together.</a:t>
+                </a:r>
+              </a:p>
+              <a:p>
+                <a:pPr marL="0" indent="0">
+                  <a:buNone/>
+                </a:pPr>
+                <a:endParaRPr lang="en-GB" dirty="0"/>
+              </a:p>
+              <a:p>
+                <a:pPr marL="0" indent="0">
+                  <a:buNone/>
+                </a:pPr>
+                <a:r>
+                  <a:rPr lang="en-GB" dirty="0"/>
+                  <a:t>Essentially getting the best of both worlds, and making an </a:t>
+                </a:r>
+                <a:r>
+                  <a:rPr lang="en-GB" b="1" dirty="0">
+                    <a:solidFill>
+                      <a:srgbClr val="00B050"/>
+                    </a:solidFill>
+                  </a:rPr>
+                  <a:t>Elastic Regressor </a:t>
+                </a:r>
+                <a:r>
+                  <a:rPr lang="en-GB" dirty="0"/>
+                  <a:t>instead! (MSE + L1 Reg + L2 Reg)</a:t>
+                </a:r>
+                <a:br>
+                  <a:rPr lang="en-GB" dirty="0"/>
+                </a:br>
+                <a:endParaRPr lang="en-GB" dirty="0"/>
+              </a:p>
+              <a:p>
+                <a:pPr marL="0" indent="0">
+                  <a:buNone/>
+                </a:pPr>
+                <a14:m>
+                  <m:oMathPara xmlns:m="http://schemas.openxmlformats.org/officeDocument/2006/math">
+                    <m:oMathParaPr>
+                      <m:jc m:val="centerGroup"/>
+                    </m:oMathParaPr>
+                    <m:oMath xmlns:m="http://schemas.openxmlformats.org/officeDocument/2006/math">
+                      <m:sSub>
+                        <m:sSubPr>
+                          <m:ctrlPr>
+                            <a:rPr lang="fr-FR" b="0" i="1" smtClean="0">
+                              <a:latin typeface="Cambria Math" panose="02040503050406030204" pitchFamily="18" charset="0"/>
+                            </a:rPr>
+                          </m:ctrlPr>
+                        </m:sSubPr>
+                        <m:e>
+                          <m:r>
+                            <a:rPr lang="fr-FR" b="0" i="1" smtClean="0">
+                              <a:latin typeface="Cambria Math" panose="02040503050406030204" pitchFamily="18" charset="0"/>
+                            </a:rPr>
+                            <m:t>𝐿</m:t>
+                          </m:r>
+                        </m:e>
+                        <m:sub>
+                          <m:r>
+                            <a:rPr lang="fr-FR" b="0" i="1" smtClean="0">
+                              <a:latin typeface="Cambria Math" panose="02040503050406030204" pitchFamily="18" charset="0"/>
+                            </a:rPr>
+                            <m:t>𝐸𝑅</m:t>
+                          </m:r>
+                        </m:sub>
+                      </m:sSub>
+                      <m:r>
+                        <a:rPr lang="fr-FR" b="0" i="1" smtClean="0">
+                          <a:latin typeface="Cambria Math" panose="02040503050406030204" pitchFamily="18" charset="0"/>
+                        </a:rPr>
+                        <m:t>=</m:t>
+                      </m:r>
+                      <m:f>
+                        <m:fPr>
+                          <m:ctrlPr>
+                            <a:rPr lang="fr-FR" b="0" i="1" smtClean="0">
+                              <a:latin typeface="Cambria Math" panose="02040503050406030204" pitchFamily="18" charset="0"/>
+                            </a:rPr>
+                          </m:ctrlPr>
+                        </m:fPr>
+                        <m:num>
+                          <m:r>
+                            <a:rPr lang="fr-FR" b="0" i="1" smtClean="0">
+                              <a:latin typeface="Cambria Math" panose="02040503050406030204" pitchFamily="18" charset="0"/>
+                            </a:rPr>
+                            <m:t>1</m:t>
+                          </m:r>
+                        </m:num>
+                        <m:den>
+                          <m:r>
+                            <a:rPr lang="fr-FR" b="0" i="1" smtClean="0">
+                              <a:latin typeface="Cambria Math" panose="02040503050406030204" pitchFamily="18" charset="0"/>
+                            </a:rPr>
+                            <m:t>𝑁</m:t>
+                          </m:r>
+                        </m:den>
+                      </m:f>
+                      <m:nary>
+                        <m:naryPr>
+                          <m:chr m:val="∑"/>
+                          <m:ctrlPr>
+                            <a:rPr lang="fr-FR" b="0" i="1" smtClean="0">
+                              <a:latin typeface="Cambria Math" panose="02040503050406030204" pitchFamily="18" charset="0"/>
+                            </a:rPr>
+                          </m:ctrlPr>
+                        </m:naryPr>
+                        <m:sub>
+                          <m:r>
+                            <m:rPr>
+                              <m:brk m:alnAt="23"/>
+                            </m:rPr>
+                            <a:rPr lang="fr-FR" b="0" i="1" smtClean="0">
+                              <a:latin typeface="Cambria Math" panose="02040503050406030204" pitchFamily="18" charset="0"/>
+                            </a:rPr>
+                            <m:t>𝑖</m:t>
+                          </m:r>
+                          <m:r>
+                            <a:rPr lang="fr-FR" b="0" i="1" smtClean="0">
+                              <a:latin typeface="Cambria Math" panose="02040503050406030204" pitchFamily="18" charset="0"/>
+                            </a:rPr>
+                            <m:t>=1</m:t>
+                          </m:r>
+                        </m:sub>
+                        <m:sup>
+                          <m:r>
+                            <a:rPr lang="fr-FR" b="0" i="1" smtClean="0">
+                              <a:latin typeface="Cambria Math" panose="02040503050406030204" pitchFamily="18" charset="0"/>
+                            </a:rPr>
+                            <m:t>𝑁</m:t>
+                          </m:r>
+                        </m:sup>
+                        <m:e>
+                          <m:sSup>
+                            <m:sSupPr>
+                              <m:ctrlPr>
+                                <a:rPr lang="fr-FR" b="0" i="1" smtClean="0">
+                                  <a:latin typeface="Cambria Math" panose="02040503050406030204" pitchFamily="18" charset="0"/>
+                                </a:rPr>
+                              </m:ctrlPr>
+                            </m:sSupPr>
+                            <m:e>
+                              <m:d>
+                                <m:dPr>
+                                  <m:ctrlPr>
+                                    <a:rPr lang="fr-FR" b="0" i="1" smtClean="0">
+                                      <a:latin typeface="Cambria Math" panose="02040503050406030204" pitchFamily="18" charset="0"/>
+                                    </a:rPr>
+                                  </m:ctrlPr>
+                                </m:dPr>
+                                <m:e>
+                                  <m:r>
+                                    <a:rPr lang="fr-FR" b="0" i="1" smtClean="0">
+                                      <a:latin typeface="Cambria Math" panose="02040503050406030204" pitchFamily="18" charset="0"/>
+                                    </a:rPr>
+                                    <m:t>𝑝</m:t>
+                                  </m:r>
+                                  <m:d>
+                                    <m:dPr>
+                                      <m:ctrlPr>
+                                        <a:rPr lang="fr-FR" b="0" i="1" smtClean="0">
+                                          <a:latin typeface="Cambria Math" panose="02040503050406030204" pitchFamily="18" charset="0"/>
+                                        </a:rPr>
+                                      </m:ctrlPr>
+                                    </m:dPr>
+                                    <m:e>
+                                      <m:sSub>
+                                        <m:sSubPr>
+                                          <m:ctrlPr>
+                                            <a:rPr lang="fr-FR" b="0" i="1" smtClean="0">
+                                              <a:latin typeface="Cambria Math" panose="02040503050406030204" pitchFamily="18" charset="0"/>
+                                            </a:rPr>
+                                          </m:ctrlPr>
+                                        </m:sSubPr>
+                                        <m:e>
+                                          <m:r>
+                                            <a:rPr lang="fr-FR" b="0" i="1" smtClean="0">
+                                              <a:latin typeface="Cambria Math" panose="02040503050406030204" pitchFamily="18" charset="0"/>
+                                            </a:rPr>
+                                            <m:t>𝑥</m:t>
+                                          </m:r>
+                                        </m:e>
+                                        <m:sub>
+                                          <m:r>
+                                            <a:rPr lang="fr-FR" b="0" i="1" smtClean="0">
+                                              <a:latin typeface="Cambria Math" panose="02040503050406030204" pitchFamily="18" charset="0"/>
+                                            </a:rPr>
+                                            <m:t>𝑖</m:t>
+                                          </m:r>
+                                        </m:sub>
+                                      </m:sSub>
+                                    </m:e>
+                                  </m:d>
+                                  <m:r>
+                                    <a:rPr lang="fr-FR" b="0" i="1" smtClean="0">
+                                      <a:latin typeface="Cambria Math" panose="02040503050406030204" pitchFamily="18" charset="0"/>
+                                    </a:rPr>
+                                    <m:t>−</m:t>
+                                  </m:r>
+                                  <m:sSub>
+                                    <m:sSubPr>
+                                      <m:ctrlPr>
+                                        <a:rPr lang="fr-FR" b="0" i="1" smtClean="0">
+                                          <a:latin typeface="Cambria Math" panose="02040503050406030204" pitchFamily="18" charset="0"/>
+                                        </a:rPr>
+                                      </m:ctrlPr>
+                                    </m:sSubPr>
+                                    <m:e>
+                                      <m:r>
+                                        <a:rPr lang="fr-FR" b="0" i="1" smtClean="0">
+                                          <a:latin typeface="Cambria Math" panose="02040503050406030204" pitchFamily="18" charset="0"/>
+                                        </a:rPr>
+                                        <m:t>𝑦</m:t>
+                                      </m:r>
+                                    </m:e>
+                                    <m:sub>
+                                      <m:r>
+                                        <a:rPr lang="fr-FR" b="0" i="1" smtClean="0">
+                                          <a:latin typeface="Cambria Math" panose="02040503050406030204" pitchFamily="18" charset="0"/>
+                                        </a:rPr>
+                                        <m:t>𝑖</m:t>
+                                      </m:r>
+                                    </m:sub>
+                                  </m:sSub>
+                                </m:e>
+                              </m:d>
+                            </m:e>
+                            <m:sup>
+                              <m:r>
+                                <a:rPr lang="fr-FR" b="0" i="1" smtClean="0">
+                                  <a:latin typeface="Cambria Math" panose="02040503050406030204" pitchFamily="18" charset="0"/>
+                                </a:rPr>
+                                <m:t>2</m:t>
+                              </m:r>
+                            </m:sup>
+                          </m:sSup>
+                          <m:r>
+                            <a:rPr lang="fr-FR" b="0" i="1" smtClean="0">
+                              <a:latin typeface="Cambria Math" panose="02040503050406030204" pitchFamily="18" charset="0"/>
+                            </a:rPr>
+                            <m:t>+</m:t>
+                          </m:r>
+                          <m:sSub>
+                            <m:sSubPr>
+                              <m:ctrlPr>
+                                <a:rPr lang="fr-FR" i="1">
+                                  <a:latin typeface="Cambria Math" panose="02040503050406030204" pitchFamily="18" charset="0"/>
+                                </a:rPr>
+                              </m:ctrlPr>
+                            </m:sSubPr>
+                            <m:e>
+                              <m:r>
+                                <a:rPr lang="fr-FR" i="1">
+                                  <a:latin typeface="Cambria Math" panose="02040503050406030204" pitchFamily="18" charset="0"/>
+                                </a:rPr>
+                                <m:t>𝜆</m:t>
+                              </m:r>
+                            </m:e>
+                            <m:sub>
+                              <m:r>
+                                <a:rPr lang="fr-FR" i="1">
+                                  <a:latin typeface="Cambria Math" panose="02040503050406030204" pitchFamily="18" charset="0"/>
+                                </a:rPr>
+                                <m:t>1</m:t>
+                              </m:r>
+                            </m:sub>
+                          </m:sSub>
+                          <m:d>
+                            <m:dPr>
+                              <m:ctrlPr>
+                                <a:rPr lang="fr-FR" b="0" i="1" smtClean="0">
+                                  <a:latin typeface="Cambria Math" panose="02040503050406030204" pitchFamily="18" charset="0"/>
+                                </a:rPr>
+                              </m:ctrlPr>
+                            </m:dPr>
+                            <m:e>
+                              <m:nary>
+                                <m:naryPr>
+                                  <m:chr m:val="∑"/>
+                                  <m:ctrlPr>
+                                    <a:rPr lang="fr-FR" i="1">
+                                      <a:latin typeface="Cambria Math" panose="02040503050406030204" pitchFamily="18" charset="0"/>
+                                    </a:rPr>
+                                  </m:ctrlPr>
+                                </m:naryPr>
+                                <m:sub>
+                                  <m:r>
+                                    <m:rPr>
+                                      <m:brk m:alnAt="23"/>
+                                    </m:rPr>
+                                    <a:rPr lang="fr-FR" i="1">
+                                      <a:latin typeface="Cambria Math" panose="02040503050406030204" pitchFamily="18" charset="0"/>
+                                    </a:rPr>
+                                    <m:t>𝑘</m:t>
+                                  </m:r>
+                                  <m:r>
+                                    <a:rPr lang="fr-FR" i="1">
+                                      <a:latin typeface="Cambria Math" panose="02040503050406030204" pitchFamily="18" charset="0"/>
+                                    </a:rPr>
+                                    <m:t>=1 </m:t>
+                                  </m:r>
+                                </m:sub>
+                                <m:sup>
+                                  <m:r>
+                                    <a:rPr lang="fr-FR" i="1">
+                                      <a:latin typeface="Cambria Math" panose="02040503050406030204" pitchFamily="18" charset="0"/>
+                                    </a:rPr>
+                                    <m:t>𝐾</m:t>
+                                  </m:r>
+                                </m:sup>
+                                <m:e>
+                                  <m:d>
+                                    <m:dPr>
+                                      <m:begChr m:val="|"/>
+                                      <m:endChr m:val="|"/>
+                                      <m:ctrlPr>
+                                        <a:rPr lang="fr-FR" b="0" i="1" smtClean="0">
+                                          <a:latin typeface="Cambria Math" panose="02040503050406030204" pitchFamily="18" charset="0"/>
+                                        </a:rPr>
+                                      </m:ctrlPr>
+                                    </m:dPr>
+                                    <m:e>
+                                      <m:sSub>
+                                        <m:sSubPr>
+                                          <m:ctrlPr>
+                                            <a:rPr lang="fr-FR" b="0" i="1" smtClean="0">
+                                              <a:latin typeface="Cambria Math" panose="02040503050406030204" pitchFamily="18" charset="0"/>
+                                            </a:rPr>
+                                          </m:ctrlPr>
+                                        </m:sSubPr>
+                                        <m:e>
+                                          <m:r>
+                                            <a:rPr lang="fr-FR" b="0" i="1" smtClean="0">
+                                              <a:latin typeface="Cambria Math" panose="02040503050406030204" pitchFamily="18" charset="0"/>
+                                            </a:rPr>
+                                            <m:t>𝑎</m:t>
+                                          </m:r>
+                                        </m:e>
+                                        <m:sub>
+                                          <m:r>
+                                            <a:rPr lang="fr-FR" b="0" i="1" smtClean="0">
+                                              <a:latin typeface="Cambria Math" panose="02040503050406030204" pitchFamily="18" charset="0"/>
+                                            </a:rPr>
+                                            <m:t>𝑘</m:t>
+                                          </m:r>
+                                        </m:sub>
+                                      </m:sSub>
+                                    </m:e>
+                                  </m:d>
+                                </m:e>
+                              </m:nary>
+                              <m:r>
+                                <a:rPr lang="fr-FR" b="0" i="1" smtClean="0">
+                                  <a:latin typeface="Cambria Math" panose="02040503050406030204" pitchFamily="18" charset="0"/>
+                                </a:rPr>
+                                <m:t>+|</m:t>
+                              </m:r>
+                              <m:r>
+                                <a:rPr lang="fr-FR" b="0" i="1" smtClean="0">
+                                  <a:latin typeface="Cambria Math" panose="02040503050406030204" pitchFamily="18" charset="0"/>
+                                </a:rPr>
+                                <m:t>𝑏</m:t>
+                              </m:r>
+                              <m:r>
+                                <a:rPr lang="fr-FR" b="0" i="1" smtClean="0">
+                                  <a:latin typeface="Cambria Math" panose="02040503050406030204" pitchFamily="18" charset="0"/>
+                                </a:rPr>
+                                <m:t>|</m:t>
+                              </m:r>
+                            </m:e>
+                          </m:d>
+                          <m:r>
+                            <a:rPr lang="fr-FR" b="0" i="1" smtClean="0">
+                              <a:latin typeface="Cambria Math" panose="02040503050406030204" pitchFamily="18" charset="0"/>
+                            </a:rPr>
+                            <m:t>+</m:t>
+                          </m:r>
+                          <m:sSub>
+                            <m:sSubPr>
+                              <m:ctrlPr>
+                                <a:rPr lang="fr-FR" b="0" i="1" smtClean="0">
+                                  <a:latin typeface="Cambria Math" panose="02040503050406030204" pitchFamily="18" charset="0"/>
+                                </a:rPr>
+                              </m:ctrlPr>
+                            </m:sSubPr>
+                            <m:e>
+                              <m:r>
+                                <a:rPr lang="fr-FR" b="0" i="1" smtClean="0">
+                                  <a:latin typeface="Cambria Math" panose="02040503050406030204" pitchFamily="18" charset="0"/>
+                                </a:rPr>
+                                <m:t>𝜆</m:t>
+                              </m:r>
+                            </m:e>
+                            <m:sub>
+                              <m:r>
+                                <a:rPr lang="fr-FR" b="0" i="1" smtClean="0">
+                                  <a:latin typeface="Cambria Math" panose="02040503050406030204" pitchFamily="18" charset="0"/>
+                                </a:rPr>
+                                <m:t>2</m:t>
+                              </m:r>
+                            </m:sub>
+                          </m:sSub>
+                          <m:d>
+                            <m:dPr>
+                              <m:ctrlPr>
+                                <a:rPr lang="fr-FR" b="0" i="1" smtClean="0">
+                                  <a:latin typeface="Cambria Math" panose="02040503050406030204" pitchFamily="18" charset="0"/>
+                                </a:rPr>
+                              </m:ctrlPr>
+                            </m:dPr>
+                            <m:e>
+                              <m:nary>
+                                <m:naryPr>
+                                  <m:chr m:val="∑"/>
+                                  <m:ctrlPr>
+                                    <a:rPr lang="fr-FR" b="0" i="1" smtClean="0">
+                                      <a:latin typeface="Cambria Math" panose="02040503050406030204" pitchFamily="18" charset="0"/>
+                                    </a:rPr>
+                                  </m:ctrlPr>
+                                </m:naryPr>
+                                <m:sub>
+                                  <m:r>
+                                    <m:rPr>
+                                      <m:brk m:alnAt="23"/>
+                                    </m:rPr>
+                                    <a:rPr lang="fr-FR" b="0" i="1" smtClean="0">
+                                      <a:latin typeface="Cambria Math" panose="02040503050406030204" pitchFamily="18" charset="0"/>
+                                    </a:rPr>
+                                    <m:t>𝑘</m:t>
+                                  </m:r>
+                                  <m:r>
+                                    <a:rPr lang="fr-FR" b="0" i="1" smtClean="0">
+                                      <a:latin typeface="Cambria Math" panose="02040503050406030204" pitchFamily="18" charset="0"/>
+                                    </a:rPr>
+                                    <m:t>=1 </m:t>
+                                  </m:r>
+                                </m:sub>
+                                <m:sup>
+                                  <m:r>
+                                    <a:rPr lang="fr-FR" b="0" i="1" smtClean="0">
+                                      <a:latin typeface="Cambria Math" panose="02040503050406030204" pitchFamily="18" charset="0"/>
+                                    </a:rPr>
+                                    <m:t>𝐾</m:t>
+                                  </m:r>
+                                </m:sup>
+                                <m:e>
+                                  <m:sSup>
+                                    <m:sSupPr>
+                                      <m:ctrlPr>
+                                        <a:rPr lang="fr-FR" b="0" i="1" smtClean="0">
+                                          <a:latin typeface="Cambria Math" panose="02040503050406030204" pitchFamily="18" charset="0"/>
+                                        </a:rPr>
+                                      </m:ctrlPr>
+                                    </m:sSupPr>
+                                    <m:e>
+                                      <m:d>
+                                        <m:dPr>
+                                          <m:ctrlPr>
+                                            <a:rPr lang="fr-FR" b="0" i="1" smtClean="0">
+                                              <a:latin typeface="Cambria Math" panose="02040503050406030204" pitchFamily="18" charset="0"/>
+                                            </a:rPr>
+                                          </m:ctrlPr>
+                                        </m:dPr>
+                                        <m:e>
+                                          <m:sSub>
+                                            <m:sSubPr>
+                                              <m:ctrlPr>
+                                                <a:rPr lang="fr-FR" b="0" i="1" smtClean="0">
+                                                  <a:latin typeface="Cambria Math" panose="02040503050406030204" pitchFamily="18" charset="0"/>
+                                                </a:rPr>
+                                              </m:ctrlPr>
+                                            </m:sSubPr>
+                                            <m:e>
+                                              <m:r>
+                                                <a:rPr lang="fr-FR" b="0" i="1" smtClean="0">
+                                                  <a:latin typeface="Cambria Math" panose="02040503050406030204" pitchFamily="18" charset="0"/>
+                                                </a:rPr>
+                                                <m:t>𝑎</m:t>
+                                              </m:r>
+                                            </m:e>
+                                            <m:sub>
+                                              <m:r>
+                                                <a:rPr lang="fr-FR" b="0" i="1" smtClean="0">
+                                                  <a:latin typeface="Cambria Math" panose="02040503050406030204" pitchFamily="18" charset="0"/>
+                                                </a:rPr>
+                                                <m:t>𝑘</m:t>
+                                              </m:r>
+                                            </m:sub>
+                                          </m:sSub>
+                                        </m:e>
+                                      </m:d>
+                                    </m:e>
+                                    <m:sup>
+                                      <m:r>
+                                        <a:rPr lang="fr-FR" b="0" i="1" smtClean="0">
+                                          <a:latin typeface="Cambria Math" panose="02040503050406030204" pitchFamily="18" charset="0"/>
+                                        </a:rPr>
+                                        <m:t>2</m:t>
+                                      </m:r>
+                                    </m:sup>
+                                  </m:sSup>
+                                </m:e>
+                              </m:nary>
+                              <m:sSup>
+                                <m:sSupPr>
+                                  <m:ctrlPr>
+                                    <a:rPr lang="fr-FR" b="0" i="1" smtClean="0">
+                                      <a:latin typeface="Cambria Math" panose="02040503050406030204" pitchFamily="18" charset="0"/>
+                                    </a:rPr>
+                                  </m:ctrlPr>
+                                </m:sSupPr>
+                                <m:e>
+                                  <m:r>
+                                    <a:rPr lang="fr-FR" b="0" i="1" smtClean="0">
+                                      <a:latin typeface="Cambria Math" panose="02040503050406030204" pitchFamily="18" charset="0"/>
+                                    </a:rPr>
+                                    <m:t>+</m:t>
+                                  </m:r>
+                                  <m:r>
+                                    <a:rPr lang="fr-FR" b="0" i="1" smtClean="0">
+                                      <a:latin typeface="Cambria Math" panose="02040503050406030204" pitchFamily="18" charset="0"/>
+                                    </a:rPr>
+                                    <m:t>𝑏</m:t>
+                                  </m:r>
+                                </m:e>
+                                <m:sup>
+                                  <m:r>
+                                    <a:rPr lang="fr-FR" b="0" i="1" smtClean="0">
+                                      <a:latin typeface="Cambria Math" panose="02040503050406030204" pitchFamily="18" charset="0"/>
+                                    </a:rPr>
+                                    <m:t>2</m:t>
+                                  </m:r>
+                                </m:sup>
+                              </m:sSup>
+                            </m:e>
+                          </m:d>
+                        </m:e>
+                      </m:nary>
+                    </m:oMath>
+                  </m:oMathPara>
+                </a14:m>
+                <a:endParaRPr lang="en-GB" dirty="0"/>
+              </a:p>
+            </p:txBody>
+          </p:sp>
+        </mc:Choice>
+        <mc:Fallback>
+          <p:sp>
+            <p:nvSpPr>
+              <p:cNvPr id="6" name="Content Placeholder 5">
+                <a:extLst>
+                  <a:ext uri="{FF2B5EF4-FFF2-40B4-BE49-F238E27FC236}">
+                    <a16:creationId xmlns:a16="http://schemas.microsoft.com/office/drawing/2014/main" id="{035BA096-4E67-B5D5-DBD3-F226777FADC7}"/>
+                  </a:ext>
+                </a:extLst>
+              </p:cNvPr>
+              <p:cNvSpPr>
+                <a:spLocks noGrp="1" noRot="1" noChangeAspect="1" noMove="1" noResize="1" noEditPoints="1" noAdjustHandles="1" noChangeArrowheads="1" noChangeShapeType="1" noTextEdit="1"/>
+              </p:cNvSpPr>
+              <p:nvPr>
+                <p:ph idx="1"/>
+              </p:nvPr>
+            </p:nvSpPr>
+            <p:spPr>
+              <a:xfrm>
+                <a:off x="838199" y="1825625"/>
+                <a:ext cx="10929257" cy="4351338"/>
+              </a:xfrm>
+              <a:blipFill>
+                <a:blip r:embed="rId2"/>
+                <a:stretch>
+                  <a:fillRect l="-1115" t="-2241"/>
+                </a:stretch>
+              </a:blipFill>
+            </p:spPr>
+            <p:txBody>
+              <a:bodyPr/>
+              <a:lstStyle/>
+              <a:p>
+                <a:r>
+                  <a:rPr lang="en-GB">
+                    <a:noFill/>
+                  </a:rPr>
+                  <a:t> </a:t>
+                </a:r>
+              </a:p>
+            </p:txBody>
+          </p:sp>
+        </mc:Fallback>
+      </mc:AlternateContent>
       <p:sp>
         <p:nvSpPr>
-          <p:cNvPr id="6" name="Content Placeholder 5">
+          <p:cNvPr id="11" name="TextBox 10">
             <a:extLst>
               <a:ext uri="{FF2B5EF4-FFF2-40B4-BE49-F238E27FC236}">
-                <a16:creationId xmlns:a16="http://schemas.microsoft.com/office/drawing/2014/main" id="{035BA096-4E67-B5D5-DBD3-F226777FADC7}"/>
+                <a16:creationId xmlns:a16="http://schemas.microsoft.com/office/drawing/2014/main" id="{ED238786-5737-F9FC-6108-858704D8D20C}"/>
               </a:ext>
             </a:extLst>
           </p:cNvPr>
-          <p:cNvSpPr>
-            <a:spLocks noGrp="1"/>
-          </p:cNvSpPr>
-          <p:nvPr>
-            <p:ph idx="1"/>
-          </p:nvPr>
+          <p:cNvSpPr txBox="1"/>
+          <p:nvPr/>
         </p:nvSpPr>
         <p:spPr>
           <a:xfrm>
-            <a:off x="838200" y="1825624"/>
-            <a:ext cx="10515600" cy="5032375"/>
+            <a:off x="3378434" y="5533834"/>
+            <a:ext cx="1976284" cy="584775"/>
           </a:xfrm>
+          <a:prstGeom prst="rect">
+            <a:avLst/>
+          </a:prstGeom>
+          <a:noFill/>
         </p:spPr>
         <p:txBody>
-          <a:bodyPr>
-            <a:normAutofit/>
+          <a:bodyPr wrap="square" rtlCol="0">
+            <a:spAutoFit/>
           </a:bodyPr>
           <a:lstStyle/>
           <a:p>
-            <a:pPr marL="0" indent="0">
-              <a:buNone/>
-            </a:pPr>
-            <a:r>
-              <a:rPr lang="en-GB"/>
-              <a:t>Also possible </a:t>
-            </a:r>
-            <a:r>
-              <a:rPr lang="en-GB" dirty="0"/>
-              <a:t>to use the sum of </a:t>
-            </a:r>
-            <a:r>
-              <a:rPr lang="en-GB" b="1" u="sng" dirty="0"/>
-              <a:t>absolute</a:t>
-            </a:r>
-            <a:r>
-              <a:rPr lang="en-GB" dirty="0"/>
-              <a:t> values (or what we call a L1 regularization), making a </a:t>
-            </a:r>
-            <a:r>
-              <a:rPr lang="en-GB" b="1" dirty="0">
+            <a:pPr algn="ctr"/>
+            <a:r>
+              <a:rPr lang="en-GB" sz="3200" dirty="0">
                 <a:solidFill>
                   <a:srgbClr val="00B050"/>
                 </a:solidFill>
               </a:rPr>
-              <a:t>Lasso Regressor </a:t>
-            </a:r>
-            <a:r>
-              <a:rPr lang="en-GB" dirty="0"/>
-              <a:t>instead of a </a:t>
-            </a:r>
-            <a:r>
-              <a:rPr lang="en-GB" b="1" dirty="0">
+              <a:t>MSE</a:t>
+            </a:r>
+            <a:endParaRPr lang="en-SG" sz="3200" dirty="0">
+              <a:solidFill>
+                <a:srgbClr val="00B050"/>
+              </a:solidFill>
+            </a:endParaRPr>
+          </a:p>
+        </p:txBody>
+      </p:sp>
+      <p:sp>
+        <p:nvSpPr>
+          <p:cNvPr id="12" name="TextBox 11">
+            <a:extLst>
+              <a:ext uri="{FF2B5EF4-FFF2-40B4-BE49-F238E27FC236}">
+                <a16:creationId xmlns:a16="http://schemas.microsoft.com/office/drawing/2014/main" id="{61A8A419-4FE0-7FCD-F823-C870DB3A155F}"/>
+              </a:ext>
+            </a:extLst>
+          </p:cNvPr>
+          <p:cNvSpPr txBox="1"/>
+          <p:nvPr/>
+        </p:nvSpPr>
+        <p:spPr>
+          <a:xfrm>
+            <a:off x="6096000" y="5533834"/>
+            <a:ext cx="1976284" cy="584775"/>
+          </a:xfrm>
+          <a:prstGeom prst="rect">
+            <a:avLst/>
+          </a:prstGeom>
+          <a:noFill/>
+        </p:spPr>
+        <p:txBody>
+          <a:bodyPr wrap="square" rtlCol="0">
+            <a:spAutoFit/>
+          </a:bodyPr>
+          <a:lstStyle/>
+          <a:p>
+            <a:pPr algn="ctr"/>
+            <a:r>
+              <a:rPr lang="en-GB" sz="3200" dirty="0">
                 <a:solidFill>
-                  <a:srgbClr val="00B050"/>
+                  <a:srgbClr val="7030A0"/>
                 </a:solidFill>
               </a:rPr>
-              <a:t>Ridge Regressor</a:t>
-            </a:r>
-            <a:r>
-              <a:rPr lang="en-GB" dirty="0"/>
-              <a:t>.</a:t>
-            </a:r>
-            <a:endParaRPr lang="en-GB" b="1" dirty="0"/>
-          </a:p>
-          <a:p>
-            <a:pPr marL="0" indent="0">
-              <a:buNone/>
-            </a:pPr>
-            <a:r>
-              <a:rPr lang="en-GB" b="1" dirty="0"/>
-              <a:t>Why use L1 regularization over L2 regularization?</a:t>
-            </a:r>
-          </a:p>
-          <a:p>
-            <a:r>
-              <a:rPr lang="en-GB" dirty="0"/>
-              <a:t>L1 regularization results in some weights being exactly equal to zero, which can be used for feature selection.</a:t>
-            </a:r>
-          </a:p>
-          <a:p>
-            <a:r>
-              <a:rPr lang="en-GB" dirty="0"/>
-              <a:t>L2 regularization will not produce sparse models, and it will only shrink the weights.</a:t>
-            </a:r>
-          </a:p>
-          <a:p>
-            <a:endParaRPr lang="en-GB" dirty="0"/>
-          </a:p>
-          <a:p>
-            <a:pPr marL="0" indent="0">
-              <a:buNone/>
-            </a:pPr>
-            <a:r>
-              <a:rPr lang="en-GB" b="1" dirty="0"/>
-              <a:t>Why prefer L1 over L2 (and vice versa)? </a:t>
-            </a:r>
-            <a:r>
-              <a:rPr lang="en-GB" dirty="0"/>
-              <a:t>Have a look at this, if curious!</a:t>
-            </a:r>
-            <a:br>
-              <a:rPr lang="en-GB" dirty="0"/>
-            </a:br>
-            <a:r>
-              <a:rPr lang="en-GB" dirty="0">
-                <a:hlinkClick r:id="rId2"/>
+              <a:t>L1</a:t>
+            </a:r>
+            <a:endParaRPr lang="en-SG" sz="3200" dirty="0">
+              <a:solidFill>
+                <a:srgbClr val="7030A0"/>
+              </a:solidFill>
+            </a:endParaRPr>
+          </a:p>
+        </p:txBody>
+      </p:sp>
+      <p:sp>
+        <p:nvSpPr>
+          <p:cNvPr id="13" name="TextBox 12">
+            <a:extLst>
+              <a:ext uri="{FF2B5EF4-FFF2-40B4-BE49-F238E27FC236}">
+                <a16:creationId xmlns:a16="http://schemas.microsoft.com/office/drawing/2014/main" id="{CF53D115-A062-0A2A-006C-7B83C5ABE2B7}"/>
+              </a:ext>
+            </a:extLst>
+          </p:cNvPr>
+          <p:cNvSpPr txBox="1"/>
+          <p:nvPr/>
+        </p:nvSpPr>
+        <p:spPr>
+          <a:xfrm>
+            <a:off x="9377516" y="5592188"/>
+            <a:ext cx="1976284" cy="584775"/>
+          </a:xfrm>
+          <a:prstGeom prst="rect">
+            <a:avLst/>
+          </a:prstGeom>
+          <a:noFill/>
+        </p:spPr>
+        <p:txBody>
+          <a:bodyPr wrap="square" rtlCol="0">
+            <a:spAutoFit/>
+          </a:bodyPr>
+          <a:lstStyle/>
+          <a:p>
+            <a:pPr algn="ctr"/>
+            <a:r>
+              <a:rPr lang="en-GB" sz="3200" dirty="0">
+                <a:solidFill>
+                  <a:srgbClr val="0070C0"/>
+                </a:solidFill>
               </a:rPr>
-              <a:t>https://medium.com/@fernando.dijkinga/explaining-l1-and-l2-regularization-in-machine-learning-2356ee91c8e3</a:t>
-            </a:r>
-            <a:r>
-              <a:rPr lang="en-GB" dirty="0"/>
-              <a:t> </a:t>
-            </a:r>
-          </a:p>
-          <a:p>
-            <a:endParaRPr lang="en-SG" dirty="0"/>
+              <a:t>L2</a:t>
+            </a:r>
+            <a:endParaRPr lang="en-SG" sz="3200" dirty="0">
+              <a:solidFill>
+                <a:srgbClr val="0070C0"/>
+              </a:solidFill>
+            </a:endParaRPr>
           </a:p>
         </p:txBody>
       </p:sp>
     </p:spTree>
     <p:extLst>
       <p:ext uri="{BB962C8B-B14F-4D97-AF65-F5344CB8AC3E}">
-        <p14:creationId xmlns:p14="http://schemas.microsoft.com/office/powerpoint/2010/main" val="1659504250"/>
+        <p14:creationId xmlns:p14="http://schemas.microsoft.com/office/powerpoint/2010/main" val="3607984374"/>
       </p:ext>
     </p:extLst>
   </p:cSld>
@@ -13143,10 +13772,10 @@
       </p:grpSpPr>
       <p:sp>
         <p:nvSpPr>
-          <p:cNvPr id="2" name="Title 1">
+          <p:cNvPr id="4" name="Title 3">
             <a:extLst>
               <a:ext uri="{FF2B5EF4-FFF2-40B4-BE49-F238E27FC236}">
-                <a16:creationId xmlns:a16="http://schemas.microsoft.com/office/drawing/2014/main" id="{1D3B68C2-4970-4C7E-1F52-6140F374C9AD}"/>
+                <a16:creationId xmlns:a16="http://schemas.microsoft.com/office/drawing/2014/main" id="{B449D360-8EA5-756A-5FBC-C8D82B54867F}"/>
               </a:ext>
             </a:extLst>
           </p:cNvPr>
@@ -13164,18 +13793,17 @@
           <a:p>
             <a:r>
               <a:rPr lang="en-GB" dirty="0"/>
-              <a:t>Regularization with other things than L2?</a:t>
-            </a:r>
-            <a:endParaRPr lang="en-SG" dirty="0"/>
+              <a:t>Done for today!</a:t>
+            </a:r>
           </a:p>
         </p:txBody>
       </p:sp>
       <p:sp>
         <p:nvSpPr>
-          <p:cNvPr id="6" name="Content Placeholder 5">
+          <p:cNvPr id="5" name="Text Placeholder 4">
             <a:extLst>
               <a:ext uri="{FF2B5EF4-FFF2-40B4-BE49-F238E27FC236}">
-                <a16:creationId xmlns:a16="http://schemas.microsoft.com/office/drawing/2014/main" id="{035BA096-4E67-B5D5-DBD3-F226777FADC7}"/>
+                <a16:creationId xmlns:a16="http://schemas.microsoft.com/office/drawing/2014/main" id="{A742FBCE-29AB-A5D4-EE61-EF8038238C69}"/>
               </a:ext>
             </a:extLst>
           </p:cNvPr>
@@ -13183,10 +13811,125 @@
             <a:spLocks noGrp="1"/>
           </p:cNvSpPr>
           <p:nvPr>
-            <p:ph idx="1"/>
+            <p:ph type="body" idx="1"/>
           </p:nvPr>
         </p:nvSpPr>
         <p:spPr/>
+        <p:txBody>
+          <a:bodyPr/>
+          <a:lstStyle/>
+          <a:p>
+            <a:r>
+              <a:rPr lang="en-GB" dirty="0"/>
+              <a:t>Let us know if you had any installation issues (</a:t>
+            </a:r>
+            <a:r>
+              <a:rPr lang="en-GB" dirty="0" err="1"/>
+              <a:t>PyTorch</a:t>
+            </a:r>
+            <a:r>
+              <a:rPr lang="en-GB" dirty="0"/>
+              <a:t> + CUDA) and need help.</a:t>
+            </a:r>
+          </a:p>
+          <a:p>
+            <a:r>
+              <a:rPr lang="en-GB" dirty="0"/>
+              <a:t>Otherwise, feel free to play with </a:t>
+            </a:r>
+            <a:r>
+              <a:rPr lang="en-GB"/>
+              <a:t>the notebooks.</a:t>
+            </a:r>
+            <a:endParaRPr lang="en-GB" dirty="0"/>
+          </a:p>
+        </p:txBody>
+      </p:sp>
+    </p:spTree>
+    <p:extLst>
+      <p:ext uri="{BB962C8B-B14F-4D97-AF65-F5344CB8AC3E}">
+        <p14:creationId xmlns:p14="http://schemas.microsoft.com/office/powerpoint/2010/main" val="3647508694"/>
+      </p:ext>
+    </p:extLst>
+  </p:cSld>
+  <p:clrMapOvr>
+    <a:masterClrMapping/>
+  </p:clrMapOvr>
+</p:sld>
+</file>
+
+<file path=ppt/slides/slide46.xml><?xml version="1.0" encoding="utf-8"?>
+<p:sld xmlns:a="http://schemas.openxmlformats.org/drawingml/2006/main" xmlns:r="http://schemas.openxmlformats.org/officeDocument/2006/relationships" xmlns:p="http://schemas.openxmlformats.org/presentationml/2006/main">
+  <p:cSld>
+    <p:spTree>
+      <p:nvGrpSpPr>
+        <p:cNvPr id="1" name=""/>
+        <p:cNvGrpSpPr/>
+        <p:nvPr/>
+      </p:nvGrpSpPr>
+      <p:grpSpPr>
+        <a:xfrm>
+          <a:off x="0" y="0"/>
+          <a:ext cx="0" cy="0"/>
+          <a:chOff x="0" y="0"/>
+          <a:chExt cx="0" cy="0"/>
+        </a:xfrm>
+      </p:grpSpPr>
+      <p:sp>
+        <p:nvSpPr>
+          <p:cNvPr id="2" name="Title 1">
+            <a:extLst>
+              <a:ext uri="{FF2B5EF4-FFF2-40B4-BE49-F238E27FC236}">
+                <a16:creationId xmlns:a16="http://schemas.microsoft.com/office/drawing/2014/main" id="{CA62C214-EC19-770C-7653-ED041921B2C8}"/>
+              </a:ext>
+            </a:extLst>
+          </p:cNvPr>
+          <p:cNvSpPr>
+            <a:spLocks noGrp="1"/>
+          </p:cNvSpPr>
+          <p:nvPr>
+            <p:ph type="title"/>
+          </p:nvPr>
+        </p:nvSpPr>
+        <p:spPr/>
+        <p:txBody>
+          <a:bodyPr/>
+          <a:lstStyle/>
+          <a:p>
+            <a:r>
+              <a:rPr lang="en-GB"/>
+              <a:t>Quick parenthesis</a:t>
+            </a:r>
+            <a:r>
+              <a:rPr lang="en-GB" dirty="0"/>
+              <a:t>: The hyperplane concept</a:t>
+            </a:r>
+            <a:endParaRPr lang="en-SG" dirty="0"/>
+          </a:p>
+        </p:txBody>
+      </p:sp>
+      <p:sp>
+        <p:nvSpPr>
+          <p:cNvPr id="4" name="Content Placeholder 3">
+            <a:extLst>
+              <a:ext uri="{FF2B5EF4-FFF2-40B4-BE49-F238E27FC236}">
+                <a16:creationId xmlns:a16="http://schemas.microsoft.com/office/drawing/2014/main" id="{657F3A6F-958B-7334-0196-4CE158CF83B0}"/>
+              </a:ext>
+            </a:extLst>
+          </p:cNvPr>
+          <p:cNvSpPr>
+            <a:spLocks noGrp="1"/>
+          </p:cNvSpPr>
+          <p:nvPr>
+            <p:ph sz="half" idx="1"/>
+          </p:nvPr>
+        </p:nvSpPr>
+        <p:spPr>
+          <a:xfrm>
+            <a:off x="838200" y="1825624"/>
+            <a:ext cx="5181600" cy="5032375"/>
+          </a:xfrm>
+        </p:spPr>
         <p:txBody>
           <a:bodyPr>
             <a:normAutofit/>
@@ -13197,71 +13940,8 @@
               <a:buNone/>
             </a:pPr>
             <a:r>
-              <a:rPr lang="en-GB" dirty="0"/>
-              <a:t>Also possible to use the sum of </a:t>
-            </a:r>
-            <a:r>
-              <a:rPr lang="en-GB" b="1" u="sng" dirty="0"/>
-              <a:t>absolute</a:t>
-            </a:r>
-            <a:r>
-              <a:rPr lang="en-GB" dirty="0"/>
-              <a:t> values </a:t>
-            </a:r>
-            <a:r>
-              <a:rPr lang="en-GB" b="1" u="sng" dirty="0"/>
-              <a:t>AND</a:t>
-            </a:r>
-            <a:r>
-              <a:rPr lang="en-GB" dirty="0"/>
-              <a:t> </a:t>
-            </a:r>
-            <a:r>
-              <a:rPr lang="en-GB" b="1" u="sng" dirty="0"/>
-              <a:t>squared</a:t>
-            </a:r>
-            <a:r>
-              <a:rPr lang="en-GB" dirty="0"/>
-              <a:t> values as regularization, i.e. combining the </a:t>
-            </a:r>
-            <a:r>
-              <a:rPr lang="en-GB" b="1" dirty="0">
-                <a:solidFill>
-                  <a:srgbClr val="7030A0"/>
-                </a:solidFill>
-              </a:rPr>
-              <a:t>L1</a:t>
-            </a:r>
-            <a:r>
-              <a:rPr lang="en-GB" dirty="0"/>
-              <a:t> and </a:t>
-            </a:r>
-            <a:r>
-              <a:rPr lang="en-GB" b="1" dirty="0">
-                <a:solidFill>
-                  <a:srgbClr val="0070C0"/>
-                </a:solidFill>
-              </a:rPr>
-              <a:t>L2</a:t>
-            </a:r>
-            <a:r>
-              <a:rPr lang="en-GB" dirty="0"/>
-              <a:t> regularizations together.</a:t>
-            </a:r>
-          </a:p>
-          <a:p>
-            <a:pPr marL="0" indent="0">
-              <a:buNone/>
-            </a:pPr>
-            <a:endParaRPr lang="en-GB" dirty="0"/>
-          </a:p>
-          <a:p>
-            <a:pPr marL="0" indent="0">
-              <a:buNone/>
-            </a:pPr>
-            <a:r>
-              <a:rPr lang="en-GB" dirty="0"/>
-              <a:t>Essentially getting the best of both worlds, and making an </a:t>
+              <a:rPr lang="en-GB" b="1" dirty="0"/>
+              <a:t>Definition (</a:t>
             </a:r>
             <a:r>
               <a:rPr lang="en-GB" b="1" dirty="0">
@@ -13269,195 +13949,215 @@
                   <a:srgbClr val="00B050"/>
                 </a:solidFill>
               </a:rPr>
-              <a:t>Elastic Regressor </a:t>
-            </a:r>
+              <a:t>Hyperplanes</a:t>
+            </a:r>
+            <a:r>
+              <a:rPr lang="en-GB" b="1" dirty="0"/>
+              <a:t> in Linear Algebra):</a:t>
+            </a:r>
+          </a:p>
+          <a:p>
+            <a:pPr marL="0" indent="0">
+              <a:buNone/>
+            </a:pPr>
             <a:r>
               <a:rPr lang="en-GB" dirty="0"/>
-              <a:t>instead! </a:t>
-            </a:r>
-            <a:r>
-              <a:rPr lang="en-GB"/>
-              <a:t>(MSE + L1 Reg + L2 Reg)</a:t>
-            </a:r>
-            <a:endParaRPr lang="en-GB" dirty="0"/>
-          </a:p>
-        </p:txBody>
-      </p:sp>
-      <p:pic>
-        <p:nvPicPr>
-          <p:cNvPr id="10" name="Picture 9" descr="A picture containing font, text, line, typography&#10;&#10;Description automatically generated">
-            <a:extLst>
-              <a:ext uri="{FF2B5EF4-FFF2-40B4-BE49-F238E27FC236}">
-                <a16:creationId xmlns:a16="http://schemas.microsoft.com/office/drawing/2014/main" id="{71584AF8-DE87-F7E2-AD58-35BCCD7D1F89}"/>
-              </a:ext>
-            </a:extLst>
-          </p:cNvPr>
-          <p:cNvPicPr>
-            <a:picLocks noChangeAspect="1"/>
-          </p:cNvPicPr>
-          <p:nvPr/>
-        </p:nvPicPr>
-        <p:blipFill>
-          <a:blip r:embed="rId2">
-            <a:extLst>
-              <a:ext uri="{28A0092B-C50C-407E-A947-70E740481C1C}">
-                <a14:useLocalDpi xmlns:a14="http://schemas.microsoft.com/office/drawing/2010/main" val="0"/>
-              </a:ext>
-            </a:extLst>
-          </a:blip>
-          <a:stretch>
-            <a:fillRect/>
-          </a:stretch>
-        </p:blipFill>
-        <p:spPr>
-          <a:xfrm>
-            <a:off x="1220069" y="4495704"/>
-            <a:ext cx="9751862" cy="1564551"/>
-          </a:xfrm>
-          <a:prstGeom prst="rect">
-            <a:avLst/>
-          </a:prstGeom>
-        </p:spPr>
-      </p:pic>
-      <p:sp>
-        <p:nvSpPr>
-          <p:cNvPr id="11" name="TextBox 10">
-            <a:extLst>
-              <a:ext uri="{FF2B5EF4-FFF2-40B4-BE49-F238E27FC236}">
-                <a16:creationId xmlns:a16="http://schemas.microsoft.com/office/drawing/2014/main" id="{ED238786-5737-F9FC-6108-858704D8D20C}"/>
-              </a:ext>
-            </a:extLst>
-          </p:cNvPr>
-          <p:cNvSpPr txBox="1"/>
-          <p:nvPr/>
-        </p:nvSpPr>
-        <p:spPr>
-          <a:xfrm>
-            <a:off x="4434348" y="6060255"/>
-            <a:ext cx="1976284" cy="584775"/>
-          </a:xfrm>
-          <a:prstGeom prst="rect">
-            <a:avLst/>
-          </a:prstGeom>
-          <a:noFill/>
-        </p:spPr>
-        <p:txBody>
-          <a:bodyPr wrap="square" rtlCol="0">
-            <a:spAutoFit/>
-          </a:bodyPr>
-          <a:lstStyle/>
-          <a:p>
-            <a:pPr algn="ctr"/>
-            <a:r>
-              <a:rPr lang="en-GB" sz="3200" dirty="0">
+              <a:t>A </a:t>
+            </a:r>
+            <a:r>
+              <a:rPr lang="en-GB" b="1" dirty="0">
                 <a:solidFill>
                   <a:srgbClr val="00B050"/>
                 </a:solidFill>
               </a:rPr>
-              <a:t>MSE</a:t>
-            </a:r>
-            <a:endParaRPr lang="en-SG" sz="3200" dirty="0">
-              <a:solidFill>
-                <a:srgbClr val="00B050"/>
-              </a:solidFill>
-            </a:endParaRPr>
+              <a:t>hyperplane</a:t>
+            </a:r>
+            <a:r>
+              <a:rPr lang="en-GB" dirty="0"/>
+              <a:t> is a subspace of one dimension less than the ambient space.</a:t>
+            </a:r>
+          </a:p>
+          <a:p>
+            <a:pPr marL="0" indent="0">
+              <a:buNone/>
+            </a:pPr>
+            <a:endParaRPr lang="en-GB" dirty="0"/>
+          </a:p>
+          <a:p>
+            <a:pPr marL="0" indent="0">
+              <a:buNone/>
+            </a:pPr>
+            <a:r>
+              <a:rPr lang="en-GB" dirty="0"/>
+              <a:t>In the case of linear regression with one input feature and one output feature, the ambient space is of dimension 2 (that is 1+1). </a:t>
+            </a:r>
+          </a:p>
+          <a:p>
+            <a:pPr marL="0" indent="0">
+              <a:buNone/>
+            </a:pPr>
+            <a:endParaRPr lang="en-SG" b="1" dirty="0"/>
           </a:p>
         </p:txBody>
       </p:sp>
-      <p:sp>
-        <p:nvSpPr>
-          <p:cNvPr id="12" name="TextBox 11">
-            <a:extLst>
-              <a:ext uri="{FF2B5EF4-FFF2-40B4-BE49-F238E27FC236}">
-                <a16:creationId xmlns:a16="http://schemas.microsoft.com/office/drawing/2014/main" id="{61A8A419-4FE0-7FCD-F823-C870DB3A155F}"/>
-              </a:ext>
-            </a:extLst>
-          </p:cNvPr>
-          <p:cNvSpPr txBox="1"/>
-          <p:nvPr/>
-        </p:nvSpPr>
-        <p:spPr>
-          <a:xfrm>
-            <a:off x="7143135" y="6060254"/>
-            <a:ext cx="1976284" cy="584775"/>
-          </a:xfrm>
-          <a:prstGeom prst="rect">
-            <a:avLst/>
-          </a:prstGeom>
-          <a:noFill/>
-        </p:spPr>
-        <p:txBody>
-          <a:bodyPr wrap="square" rtlCol="0">
-            <a:spAutoFit/>
-          </a:bodyPr>
-          <a:lstStyle/>
-          <a:p>
-            <a:pPr algn="ctr"/>
-            <a:r>
-              <a:rPr lang="en-GB" sz="3200" dirty="0">
-                <a:solidFill>
-                  <a:srgbClr val="7030A0"/>
-                </a:solidFill>
-              </a:rPr>
-              <a:t>L1</a:t>
-            </a:r>
-            <a:endParaRPr lang="en-SG" sz="3200" dirty="0">
-              <a:solidFill>
-                <a:srgbClr val="7030A0"/>
-              </a:solidFill>
-            </a:endParaRPr>
-          </a:p>
-        </p:txBody>
-      </p:sp>
-      <p:sp>
-        <p:nvSpPr>
-          <p:cNvPr id="13" name="TextBox 12">
-            <a:extLst>
-              <a:ext uri="{FF2B5EF4-FFF2-40B4-BE49-F238E27FC236}">
-                <a16:creationId xmlns:a16="http://schemas.microsoft.com/office/drawing/2014/main" id="{CF53D115-A062-0A2A-006C-7B83C5ABE2B7}"/>
-              </a:ext>
-            </a:extLst>
-          </p:cNvPr>
-          <p:cNvSpPr txBox="1"/>
-          <p:nvPr/>
-        </p:nvSpPr>
-        <p:spPr>
-          <a:xfrm>
-            <a:off x="9261553" y="6060254"/>
-            <a:ext cx="1976284" cy="584775"/>
-          </a:xfrm>
-          <a:prstGeom prst="rect">
-            <a:avLst/>
-          </a:prstGeom>
-          <a:noFill/>
-        </p:spPr>
-        <p:txBody>
-          <a:bodyPr wrap="square" rtlCol="0">
-            <a:spAutoFit/>
-          </a:bodyPr>
-          <a:lstStyle/>
-          <a:p>
-            <a:pPr algn="ctr"/>
-            <a:r>
-              <a:rPr lang="en-GB" sz="3200" dirty="0">
-                <a:solidFill>
-                  <a:srgbClr val="0070C0"/>
-                </a:solidFill>
-              </a:rPr>
-              <a:t>L2</a:t>
-            </a:r>
-            <a:endParaRPr lang="en-SG" sz="3200" dirty="0">
-              <a:solidFill>
-                <a:srgbClr val="0070C0"/>
-              </a:solidFill>
-            </a:endParaRPr>
-          </a:p>
-        </p:txBody>
-      </p:sp>
+      <mc:AlternateContent xmlns:mc="http://schemas.openxmlformats.org/markup-compatibility/2006" xmlns:a14="http://schemas.microsoft.com/office/drawing/2010/main">
+        <mc:Choice Requires="a14">
+          <p:sp>
+            <p:nvSpPr>
+              <p:cNvPr id="5" name="Content Placeholder 4">
+                <a:extLst>
+                  <a:ext uri="{FF2B5EF4-FFF2-40B4-BE49-F238E27FC236}">
+                    <a16:creationId xmlns:a16="http://schemas.microsoft.com/office/drawing/2014/main" id="{6D84BCCB-A835-F94C-CAC7-2175BFC0AEB5}"/>
+                  </a:ext>
+                </a:extLst>
+              </p:cNvPr>
+              <p:cNvSpPr>
+                <a:spLocks noGrp="1"/>
+              </p:cNvSpPr>
+              <p:nvPr>
+                <p:ph sz="half" idx="2"/>
+              </p:nvPr>
+            </p:nvSpPr>
+            <p:spPr>
+              <a:xfrm>
+                <a:off x="6172199" y="1825625"/>
+                <a:ext cx="5665840" cy="5032374"/>
+              </a:xfrm>
+            </p:spPr>
+            <p:txBody>
+              <a:bodyPr>
+                <a:normAutofit/>
+              </a:bodyPr>
+              <a:lstStyle/>
+              <a:p>
+                <a:pPr marL="0" indent="0">
+                  <a:buNone/>
+                </a:pPr>
+                <a:r>
+                  <a:rPr lang="en-GB" dirty="0"/>
+                  <a:t>The Linear Regression model equation, is defined as</a:t>
+                </a:r>
+              </a:p>
+              <a:p>
+                <a:pPr marL="0" indent="0">
+                  <a:buNone/>
+                </a:pPr>
+                <a14:m>
+                  <m:oMathPara xmlns:m="http://schemas.openxmlformats.org/officeDocument/2006/math">
+                    <m:oMathParaPr>
+                      <m:jc m:val="centerGroup"/>
+                    </m:oMathParaPr>
+                    <m:oMath xmlns:m="http://schemas.openxmlformats.org/officeDocument/2006/math">
+                      <m:r>
+                        <a:rPr lang="en-GB" b="0" i="1" smtClean="0">
+                          <a:latin typeface="Cambria Math" panose="02040503050406030204" pitchFamily="18" charset="0"/>
+                        </a:rPr>
+                        <m:t>𝑦</m:t>
+                      </m:r>
+                      <m:r>
+                        <a:rPr lang="en-GB" b="0" i="1" smtClean="0">
+                          <a:latin typeface="Cambria Math" panose="02040503050406030204" pitchFamily="18" charset="0"/>
+                        </a:rPr>
+                        <m:t>= </m:t>
+                      </m:r>
+                      <m:r>
+                        <a:rPr lang="en-GB" b="0" i="1" smtClean="0">
+                          <a:latin typeface="Cambria Math" panose="02040503050406030204" pitchFamily="18" charset="0"/>
+                        </a:rPr>
+                        <m:t>𝑎𝑥</m:t>
+                      </m:r>
+                      <m:r>
+                        <a:rPr lang="en-GB" b="0" i="1" smtClean="0">
+                          <a:latin typeface="Cambria Math" panose="02040503050406030204" pitchFamily="18" charset="0"/>
+                        </a:rPr>
+                        <m:t>+</m:t>
+                      </m:r>
+                      <m:r>
+                        <a:rPr lang="en-GB" b="0" i="1" smtClean="0">
+                          <a:latin typeface="Cambria Math" panose="02040503050406030204" pitchFamily="18" charset="0"/>
+                        </a:rPr>
+                        <m:t>𝑏</m:t>
+                      </m:r>
+                    </m:oMath>
+                  </m:oMathPara>
+                </a14:m>
+                <a:endParaRPr lang="en-GB" dirty="0"/>
+              </a:p>
+              <a:p>
+                <a:pPr marL="0" indent="0">
+                  <a:buNone/>
+                </a:pPr>
+                <a:endParaRPr lang="en-GB" dirty="0"/>
+              </a:p>
+              <a:p>
+                <a:pPr marL="0" indent="0">
+                  <a:buNone/>
+                </a:pPr>
+                <a:r>
+                  <a:rPr lang="en-GB" dirty="0"/>
+                  <a:t>This is the equation of a line, which is a 1D subspace, and therefore a hyperplane of the 2D ambient space.</a:t>
+                </a:r>
+              </a:p>
+              <a:p>
+                <a:pPr marL="0" indent="0">
+                  <a:buNone/>
+                </a:pPr>
+                <a:r>
+                  <a:rPr lang="en-GB" dirty="0"/>
+                  <a:t>The same happens with the polynomial regression, but at a higher degree instead of just 2D/1D.</a:t>
+                </a:r>
+              </a:p>
+            </p:txBody>
+          </p:sp>
+        </mc:Choice>
+        <mc:Fallback xmlns="">
+          <p:sp>
+            <p:nvSpPr>
+              <p:cNvPr id="5" name="Content Placeholder 4">
+                <a:extLst>
+                  <a:ext uri="{FF2B5EF4-FFF2-40B4-BE49-F238E27FC236}">
+                    <a16:creationId xmlns:a16="http://schemas.microsoft.com/office/drawing/2014/main" id="{6D84BCCB-A835-F94C-CAC7-2175BFC0AEB5}"/>
+                  </a:ext>
+                </a:extLst>
+              </p:cNvPr>
+              <p:cNvSpPr>
+                <a:spLocks noGrp="1" noRot="1" noChangeAspect="1" noMove="1" noResize="1" noEditPoints="1" noAdjustHandles="1" noChangeArrowheads="1" noChangeShapeType="1" noTextEdit="1"/>
+              </p:cNvSpPr>
+              <p:nvPr>
+                <p:ph sz="half" idx="2"/>
+              </p:nvPr>
+            </p:nvSpPr>
+            <p:spPr>
+              <a:xfrm>
+                <a:off x="6172199" y="1825625"/>
+                <a:ext cx="5665840" cy="5032374"/>
+              </a:xfrm>
+              <a:blipFill>
+                <a:blip r:embed="rId2"/>
+                <a:stretch>
+                  <a:fillRect l="-2151" t="-1937" r="-3333"/>
+                </a:stretch>
+              </a:blipFill>
+            </p:spPr>
+            <p:txBody>
+              <a:bodyPr/>
+              <a:lstStyle/>
+              <a:p>
+                <a:r>
+                  <a:rPr lang="en-SG">
+                    <a:noFill/>
+                  </a:rPr>
+                  <a:t> </a:t>
+                </a:r>
+              </a:p>
+            </p:txBody>
+          </p:sp>
+        </mc:Fallback>
+      </mc:AlternateContent>
     </p:spTree>
     <p:extLst>
       <p:ext uri="{BB962C8B-B14F-4D97-AF65-F5344CB8AC3E}">
-        <p14:creationId xmlns:p14="http://schemas.microsoft.com/office/powerpoint/2010/main" val="3607984374"/>
+        <p14:creationId xmlns:p14="http://schemas.microsoft.com/office/powerpoint/2010/main" val="423541333"/>
       </p:ext>
     </p:extLst>
   </p:cSld>
@@ -13587,7 +14287,7 @@
               <a:p>
                 <a:r>
                   <a:rPr lang="en-GB" dirty="0"/>
-                  <a:t>The surface </a:t>
+                  <a:t>The surface in sqm </a:t>
                 </a:r>
                 <a14:m>
                   <m:oMath xmlns:m="http://schemas.openxmlformats.org/officeDocument/2006/math">
@@ -13637,7 +14337,7 @@
               <a:p>
                 <a:r>
                   <a:rPr lang="en-GB" dirty="0"/>
-                  <a:t>The distance to closest MRT </a:t>
+                  <a:t>The distance to the closest MRT station in meters </a:t>
                 </a:r>
                 <a14:m>
                   <m:oMath xmlns:m="http://schemas.openxmlformats.org/officeDocument/2006/math">
@@ -13683,12 +14383,6 @@
                   </m:oMath>
                 </a14:m>
                 <a:endParaRPr lang="en-GB" b="0" dirty="0"/>
-              </a:p>
-              <a:p>
-                <a:r>
-                  <a:rPr lang="en-GB" b="0" dirty="0"/>
-                  <a:t>Etc.</a:t>
-                </a:r>
               </a:p>
               <a:p>
                 <a:pPr marL="0" indent="0">
